--- a/palestra/apresentacao.pptx
+++ b/palestra/apresentacao.pptx
@@ -3000,7 +3000,7 @@
 6. Por tarefa: o ganho (se houver) está nas tarefas de convenção (03–07) ou nas de controle?
 Comparar com a aposta da plateia (slide 5) depois de ler o veredito.
 Não comemorar nem lamentar ainda: os próximos slides explicam como ler.
-Exemplo de resultado (o ensaio gravado, não o de hoje): A 13/16 (81%, 57% a 93%), B 16/16 (100%, 81% a 100%), pass^2 6/8 × 8/8, 3 fora do escopo, todos de A (mexeram em `src/legado/` ou fora dos permitidos), 0 erro_agente → inconclusivo.</a:t>
+Exemplo de resultado (o ensaio gravado, não o de hoje): A 12/16 (75%, 51% a 90%), B 16/16 (100%, 81% a 100%), pass^2 6/8 × 8/8, 3 fora do escopo e 1 teste escondido falhando, todos de A (mexeram em `src/legado/` ou fora dos permitidos), 0 erro_agente → inconclusivo.</a:t>
             </a:r>
             <a:endParaRPr lang="en-US" dirty="0"/>
           </a:p>
@@ -3358,9 +3358,9 @@
           <a:p>
             <a:r>
               <a:rPr lang="en-US" dirty="0"/>
-              <a:t>[45:30–46:00] Slide único, sem cliques. Resposta (do ENSAIO, não do run de hoje): com as taxas do ensaio mantidas (A 13/16 × B 16/16), 38 execuções por variante até os intervalos de Wilson pararem de se sobrepor (critério do veredito); o piso pelo teste z é 34. Dizer "do ensaio" em voz alta.
+              <a:t>[45:30–46:00] Slide único, sem cliques. Resposta (do ENSAIO, não do run de hoje): com as taxas do ensaio mantidas (A 12/16 × B 16/16), 27 execuções por variante até os intervalos de Wilson pararem de se sobrepor (critério do veredito); o piso pelo teste z é 24. Dizer "do ensaio" em voz alta.
 Se o relatório de hoje mostrou outro número em "execuções necessárias por variante (critério do veredito)" (campo execucoesNecessariasPorVariante), dizer: "no de hoje, deu [N]". Se as duas taxas forem iguais, o relatório diz "não calculável".
-Quem chutou 40 chegou mais perto. Quem chutou 16: "é o que a gente rodou hoje, e não bastou."</a:t>
+Quem chutou 16 chegou perto: "é o que a gente rodou hoje, e não bastou." Quem chutou 40: "um pouco a mais do que precisava."</a:t>
             </a:r>
             <a:endParaRPr lang="en-US" dirty="0"/>
           </a:p>
@@ -3543,7 +3543,7 @@
           <a:p>
             <a:r>
               <a:rPr lang="en-US" dirty="0"/>
-              <a:t>[01:15–02:15] Rodar `pnpm eval` AGORA, ao vivo. Deixar o terminal num monitor ou minimizado; não voltar nele até o minuto 40. No ensaio (sonnet, concorrência 4), as 32 execuções levaram ~3 min 17 s: o run termina muito antes da revelação, e o resultado fica esperando.
+              <a:t>[01:15–02:15] Rodar `pnpm eval` AGORA, ao vivo. Deixar o terminal num monitor ou minimizado; não voltar nele até o minuto 40. No ensaio (sonnet, concorrência 4), as 32 execuções levaram ~3 min 28 s: o run termina muito antes da revelação, e o resultado fica esperando.
 De onde vem o 32: 2 variantes × 8 tarefas × 2 repetições = 32 execuções do Claude Code, rodando enquanto eu falo. Vou mudar UMA coisa no repositório: um `CLAUDE.md` com as convenções do projeto.
 Fala: "Eu escrevi um CLAUDE.md para este projeto. Acho que ele ajuda. Mas 'acho' não é medida. Então o agente vai trabalhar 32 vezes enquanto eu falo, e no minuto 40 a gente vê."
 Plano B se o run falhar (rede, login, cota): no minuto 40 usar `pnpm relatorio:ensaio`, que lê o run gravado na véspera. Dizer isso em voz alta só se precisar.</a:t>

--- a/palestra/apresentacao.pptx
+++ b/palestra/apresentacao.pptx
@@ -2722,7 +2722,7 @@
             <a:r>
               <a:rPr lang="en-US" dirty="0"/>
               <a:t>[37:00–38:30] Passo a passo: (1) o agente erra algo no dia a dia; (2) você escreve uma TAREFA com o prompt real e um TESTE ESCONDIDO que prova o certo; confere: falha no app intacto, passa com a solução; (3) entra no conjunto e não sai mais.
-É a lição 7 do KTLO aplicada ao agente de código: o erro de terça vira tarefa na quarta. Catraca: o conjunto de tarefas só cresce.</a:t>
+É a lição do KTLO aplicada ao agente de código: o erro de terça vira tarefa na quarta. Catraca: o conjunto de tarefas só cresce.</a:t>
             </a:r>
             <a:endParaRPr lang="en-US" dirty="0"/>
           </a:p>
@@ -2810,7 +2810,7 @@
           <a:p>
             <a:r>
               <a:rPr lang="en-US" dirty="0"/>
-              <a:t>[38:30–40:00] Um clique por linha. O portão roda no CI: se B ficar PIOR que A (intervalos sem sobreposição), sai com código 1. No repo: "inconclusivo" não quebra o build. Só "A melhor" quebra.
+              <a:t>[38:30–40:00] Três cliques: um por linha e a frase final. O portão roda no CI: se B ficar PIOR que A (intervalos sem sobreposição), sai com código 1. No repo: "inconclusivo" não quebra o build. Só "A melhor" quebra.
 Termos: CI = integração contínua, o pipeline que roda testes a cada push/PR (ex.: GitHub Actions); "quebrar o build" = o pipeline fica vermelho e o merge é bloqueado.
 Por que o portão não olha a taxa crua: com 16 execuções, a taxa oscila de uma rodada para outra só por ruído; um portão "não pode cair" ficaria vermelho sem o agente ter piorado.
 Por que "inconclusivo" não quebra: quebrar o build por falta de dado ensina o time a ignorar o portão. Quebrar só quando há evidência de piora mantém o portão confiável.
@@ -2990,7 +2990,7 @@
           <a:p>
             <a:r>
               <a:rPr lang="en-US" dirty="0"/>
-              <a:t>[40:30–43:00] Se o run ainda não terminou: mostrar o progresso do promptfoo e usar o ensaio. Se terminou: `pnpm relatorio` e abrir o HTML. Plano B: `pnpm relatorio:ensaio` (run gravado na véspera).
+              <a:t>[40:30–43:00] Se o run ainda não terminou: mostrar o progresso do promptfoo e usar o ensaio. Se terminou: `pnpm relatorio` e abrir o HTML. Plano B: `pnpm relatorio:ensaio` (run gravado no ensaio).
 Roteiro de leitura (nesta ordem; a ordem importa):
 1. n real por variante e quantos erro_agente (contados à parte).
 2. Taxa de sucesso de A e de B, com a barra do intervalo.
@@ -3000,7 +3000,7 @@
 6. Por tarefa: o ganho (se houver) está nas tarefas de convenção (03–07) ou nas de controle?
 Comparar com a aposta da plateia (slide 5) depois de ler o veredito.
 Não comemorar nem lamentar ainda: os próximos slides explicam como ler.
-Exemplo de resultado (o ensaio gravado, não o de hoje): A 12/16 (75%, 51% a 90%), B 16/16 (100%, 81% a 100%), pass^2 6/8 × 8/8, 3 fora do escopo e 1 teste escondido falhando, todos de A (mexeram em `src/legado/` ou fora dos permitidos), 0 erro_agente → inconclusivo.</a:t>
+Exemplo de resultado (o ensaio gravado, não o de hoje): A 12/16 (75%, 51% a 90%), B 16/16 (100%, 81% a 100%), pass^2 6/8 × 8/8, 3 fora do escopo (mexeram em `src/legado/` ou fora dos permitidos) e 1 teste escondido falhando, todos de A, 0 erro_agente → inconclusivo.</a:t>
             </a:r>
             <a:endParaRPr lang="en-US" dirty="0"/>
           </a:p>
@@ -3088,7 +3088,7 @@
           <a:p>
             <a:r>
               <a:rPr lang="en-US" dirty="0"/>
-              <a:t>[43:00–43:45] Slide único, sem cliques. Perguntar: "A passou 6 de 16, B passou 12 de 16. B é o dobro. Quem acha que B ganhou?" (mãos; até 15 s). Se a maioria disse "ganhou": "É a resposta natural. E é exatamente o 'parece que melhorou'."
+              <a:t>[43:00–43:45] Slide único, sem cliques. EXEMPLO INVENTADO, não é o run de hoje. Perguntar: "A passou 6 de 16, B passou 12 de 16. B é o dobro. Quem acha que B ganhou?" (mãos; até 15 s). Se a maioria disse "ganhou": "É a resposta natural. E é exatamente o 'parece que melhorou'."
 Avançar para o slide seguinte com a resposta.</a:t>
             </a:r>
             <a:endParaRPr lang="en-US" dirty="0"/>
@@ -3546,7 +3546,7 @@
               <a:t>[01:15–02:15] Rodar `pnpm eval` AGORA, ao vivo. Deixar o terminal num monitor ou minimizado; não voltar nele até o minuto 40. No ensaio (sonnet, concorrência 4), as 32 execuções levaram ~3 min 28 s: o run termina muito antes da revelação, e o resultado fica esperando.
 De onde vem o 32: 2 variantes × 8 tarefas × 2 repetições = 32 execuções do Claude Code, rodando enquanto eu falo. Vou mudar UMA coisa no repositório: um `CLAUDE.md` com as convenções do projeto.
 Fala: "Eu escrevi um CLAUDE.md para este projeto. Acho que ele ajuda. Mas 'acho' não é medida. Então o agente vai trabalhar 32 vezes enquanto eu falo, e no minuto 40 a gente vê."
-Plano B se o run falhar (rede, login, cota): no minuto 40 usar `pnpm relatorio:ensaio`, que lê o run gravado na véspera. Dizer isso em voz alta só se precisar.</a:t>
+Plano B se o run falhar (rede, login, cota): no minuto 40 usar `pnpm relatorio:ensaio`, que lê o run gravado no ensaio. Dizer isso em voz alta só se precisar.</a:t>
             </a:r>
             <a:endParaRPr lang="en-US" dirty="0"/>
           </a:p>
@@ -3816,7 +3816,7 @@
           <a:p>
             <a:r>
               <a:rPr lang="en-US" dirty="0"/>
-              <a:t>[02:15–03:00] Slide único, sem cliques: opções e a frase "a resposta sai no minuto 40" já estão na tela. Perguntar e pedir mãos em cada opção: "Quem acha que o B, com CLAUDE.md, ganha?" / "Quem acha que dá empate?" / "Quem acha que o A ganha?". Contar por alto e GUARDAR a proporção (ex.: "uns 70% no B, uns 20% no empate"): ela volta no slide 32. No máximo 20 s.
+              <a:t>[02:15–03:00] Slide único, sem cliques: opções e a frase "a resposta sai no minuto 40" já estão na tela. Perguntar e pedir mãos em cada opção: "Quem acha que o B, com CLAUDE.md, ganha?" / "Quem acha que dá empate?" / "Quem acha que o A ganha?". Contar por alto e GUARDAR a proporção (ex.: "uns 70% no B, uns 20% no empate"): ela volta no slide 33. No máximo 20 s.
 Se ninguém aposta no A: "Ninguém no A? Guardem isso." Se muita gente aposta no empate: "Tem gente desconfiada. Bom sinal."
 Fechar apontando a frase na tela: "a resposta sai no minuto 40".</a:t>
             </a:r>

--- a/palestra/apresentacao.pptx
+++ b/palestra/apresentacao.pptx
@@ -29,26 +29,9 @@
     <p:sldId id="277" r:id="rId23"/>
     <p:sldId id="278" r:id="rId24"/>
     <p:sldId id="279" r:id="rId25"/>
-    <p:sldId id="280" r:id="rId26"/>
-    <p:sldId id="281" r:id="rId27"/>
-    <p:sldId id="282" r:id="rId28"/>
-    <p:sldId id="283" r:id="rId29"/>
-    <p:sldId id="284" r:id="rId30"/>
-    <p:sldId id="285" r:id="rId31"/>
-    <p:sldId id="286" r:id="rId32"/>
-    <p:sldId id="287" r:id="rId33"/>
-    <p:sldId id="288" r:id="rId34"/>
-    <p:sldId id="289" r:id="rId35"/>
-    <p:sldId id="290" r:id="rId36"/>
-    <p:sldId id="291" r:id="rId37"/>
-    <p:sldId id="292" r:id="rId38"/>
-    <p:sldId id="293" r:id="rId39"/>
-    <p:sldId id="294" r:id="rId40"/>
-    <p:sldId id="295" r:id="rId41"/>
-    <p:sldId id="296" r:id="rId42"/>
   </p:sldIdLst>
   <p:notesMasterIdLst>
-    <p:notesMasterId r:id="rId43"/>
+    <p:notesMasterId r:id="rId26"/>
   </p:notesMasterIdLst>
   <p:sldSz cx="12192000" cy="6858000"/>
   <p:notesSz cx="6858000" cy="12192000"/>
@@ -631,635 +614,7 @@
           <a:p>
             <a:r>
               <a:rPr lang="en-US" dirty="0"/>
-              <a:t>[06:45–08:00] Slide único, sem cliques: as duas barras já estão na tela. A barra de 1 de 1 vai de 21% a 100%: "Com uma execução, a taxa real pode ser 21%." A de 16 de 16 vai de 81% a 100%: "Mesmo o '100%' de 16 execuções não prova 100%."
-Os números são conta, não opinião: intervalo de Wilson 95% para 1/1 e 16/16 (o mesmo cálculo que o relatório usa; dá para conferir em `src/metricas.ts`). A gente volta nele no minuto 43.
-Transição: "Se uma execução não basta, o que eu meço, e quantas vezes?"</a:t>
-            </a:r>
-            <a:endParaRPr lang="en-US" dirty="0"/>
-          </a:p>
-        </p:txBody>
-      </p:sp>
-      <p:sp>
-        <p:nvSpPr>
-          <p:cNvPr id="4" name="Slide Number Placeholder 3"/>
-          <p:cNvSpPr>
-            <a:spLocks noGrp="1"/>
-          </p:cNvSpPr>
-          <p:nvPr>
-            <p:ph type="sldNum" sz="quarter" idx="10"/>
-          </p:nvPr>
-        </p:nvSpPr>
-        <p:spPr/>
-        <p:txBody>
-          <a:bodyPr/>
-          <a:lstStyle/>
-          <a:p>
-            <a:fld id="{F7021451-1387-4CA6-816F-3879F97B5CBC}" type="slidenum">
-              <a:rPr lang="en-US"/>
-              <a:t>10</a:t>
-            </a:fld>
-            <a:endParaRPr lang="en-US"/>
-          </a:p>
-        </p:txBody>
-      </p:sp>
-    </p:spTree>
-    <p:extLst>
-      <p:ext uri="{BB962C8B-B14F-4D97-AF65-F5344CB8AC3E}">
-        <p14:creationId xmlns:p14="http://schemas.microsoft.com/office/powerpoint/2010/main" val="1024086991"/>
-      </p:ext>
-    </p:extLst>
-  </p:cSld>
-  <p:clrMapOvr>
-    <a:masterClrMapping/>
-  </p:clrMapOvr>
-</p:notes>
-</file>
-
-<file path=ppt/notesSlides/notesSlide11.xml><?xml version="1.0" encoding="utf-8"?>
-<p:notes xmlns:a="http://schemas.openxmlformats.org/drawingml/2006/main" xmlns:r="http://schemas.openxmlformats.org/officeDocument/2006/relationships" xmlns:p="http://schemas.openxmlformats.org/presentationml/2006/main">
-  <p:cSld>
-    <p:spTree>
-      <p:nvGrpSpPr>
-        <p:cNvPr id="1" name=""/>
-        <p:cNvGrpSpPr/>
-        <p:nvPr/>
-      </p:nvGrpSpPr>
-      <p:grpSpPr>
-        <a:xfrm>
-          <a:off x="0" y="0"/>
-          <a:ext cx="0" cy="0"/>
-          <a:chOff x="0" y="0"/>
-          <a:chExt cx="0" cy="0"/>
-        </a:xfrm>
-      </p:grpSpPr>
-      <p:sp>
-        <p:nvSpPr>
-          <p:cNvPr id="2" name="Slide Image Placeholder 1"/>
-          <p:cNvSpPr>
-            <a:spLocks noGrp="1" noRot="1" noChangeAspect="1"/>
-          </p:cNvSpPr>
-          <p:nvPr>
-            <p:ph type="sldImg"/>
-          </p:nvPr>
-        </p:nvSpPr>
-        <p:spPr/>
-      </p:sp>
-      <p:sp>
-        <p:nvSpPr>
-          <p:cNvPr id="3" name="Notes Placeholder 2"/>
-          <p:cNvSpPr>
-            <a:spLocks noGrp="1"/>
-          </p:cNvSpPr>
-          <p:nvPr>
-            <p:ph type="body" idx="1"/>
-          </p:nvPr>
-        </p:nvSpPr>
-        <p:spPr/>
-        <p:txBody>
-          <a:bodyPr/>
-          <a:lstStyle/>
-          <a:p>
-            <a:r>
-              <a:rPr lang="en-US" dirty="0"/>
-              <a:t>[08:00]</a:t>
-            </a:r>
-            <a:endParaRPr lang="en-US" dirty="0"/>
-          </a:p>
-        </p:txBody>
-      </p:sp>
-      <p:sp>
-        <p:nvSpPr>
-          <p:cNvPr id="4" name="Slide Number Placeholder 3"/>
-          <p:cNvSpPr>
-            <a:spLocks noGrp="1"/>
-          </p:cNvSpPr>
-          <p:nvPr>
-            <p:ph type="sldNum" sz="quarter" idx="10"/>
-          </p:nvPr>
-        </p:nvSpPr>
-        <p:spPr/>
-        <p:txBody>
-          <a:bodyPr/>
-          <a:lstStyle/>
-          <a:p>
-            <a:fld id="{F7021451-1387-4CA6-816F-3879F97B5CBC}" type="slidenum">
-              <a:rPr lang="en-US"/>
-              <a:t>11</a:t>
-            </a:fld>
-            <a:endParaRPr lang="en-US"/>
-          </a:p>
-        </p:txBody>
-      </p:sp>
-    </p:spTree>
-    <p:extLst>
-      <p:ext uri="{BB962C8B-B14F-4D97-AF65-F5344CB8AC3E}">
-        <p14:creationId xmlns:p14="http://schemas.microsoft.com/office/powerpoint/2010/main" val="1024086991"/>
-      </p:ext>
-    </p:extLst>
-  </p:cSld>
-  <p:clrMapOvr>
-    <a:masterClrMapping/>
-  </p:clrMapOvr>
-</p:notes>
-</file>
-
-<file path=ppt/notesSlides/notesSlide12.xml><?xml version="1.0" encoding="utf-8"?>
-<p:notes xmlns:a="http://schemas.openxmlformats.org/drawingml/2006/main" xmlns:r="http://schemas.openxmlformats.org/officeDocument/2006/relationships" xmlns:p="http://schemas.openxmlformats.org/presentationml/2006/main">
-  <p:cSld>
-    <p:spTree>
-      <p:nvGrpSpPr>
-        <p:cNvPr id="1" name=""/>
-        <p:cNvGrpSpPr/>
-        <p:nvPr/>
-      </p:nvGrpSpPr>
-      <p:grpSpPr>
-        <a:xfrm>
-          <a:off x="0" y="0"/>
-          <a:ext cx="0" cy="0"/>
-          <a:chOff x="0" y="0"/>
-          <a:chExt cx="0" cy="0"/>
-        </a:xfrm>
-      </p:grpSpPr>
-      <p:sp>
-        <p:nvSpPr>
-          <p:cNvPr id="2" name="Slide Image Placeholder 1"/>
-          <p:cNvSpPr>
-            <a:spLocks noGrp="1" noRot="1" noChangeAspect="1"/>
-          </p:cNvSpPr>
-          <p:nvPr>
-            <p:ph type="sldImg"/>
-          </p:nvPr>
-        </p:nvSpPr>
-        <p:spPr/>
-      </p:sp>
-      <p:sp>
-        <p:nvSpPr>
-          <p:cNvPr id="3" name="Notes Placeholder 2"/>
-          <p:cNvSpPr>
-            <a:spLocks noGrp="1"/>
-          </p:cNvSpPr>
-          <p:nvPr>
-            <p:ph type="body" idx="1"/>
-          </p:nvPr>
-        </p:nvSpPr>
-        <p:spPr/>
-        <p:txBody>
-          <a:bodyPr/>
-          <a:lstStyle/>
-          <a:p>
-            <a:r>
-              <a:rPr lang="en-US" dirty="0"/>
-              <a:t>[08:00–10:30] Ir linha por linha, devagar. Para quem é júnior: "turno" = uma ida e volta entre o modelo e uma ferramenta (ler arquivo, editar, rodar teste).
-Como o repo mede cada uma: sucesso = teste escondido passou (critério de feito); custo/tokens = `usage` e `total_cost_usd` do `claude -p`; turnos = `num_turns`; tempo = `duration_ms`; fora do escopo = diff fora dos arquivos permitidos; consistência = pass^k (passou em todas as repetições).
-O `claude -p --output-format json` devolve esses campos no JSON final (doc "Run Claude Code programmatically"). A doc diz que o custo é estimativa do lado do cliente: com assinatura, leia o custo em US$ como "tamanho do esforço", não como fatura.
-Tokens: o relatório mostra a mediana de entrada + saída separada da mediana de cache (leitura + criação), porque o cache domina a contagem e esconderia a diferença.</a:t>
-            </a:r>
-            <a:endParaRPr lang="en-US" dirty="0"/>
-          </a:p>
-        </p:txBody>
-      </p:sp>
-      <p:sp>
-        <p:nvSpPr>
-          <p:cNvPr id="4" name="Slide Number Placeholder 3"/>
-          <p:cNvSpPr>
-            <a:spLocks noGrp="1"/>
-          </p:cNvSpPr>
-          <p:nvPr>
-            <p:ph type="sldNum" sz="quarter" idx="10"/>
-          </p:nvPr>
-        </p:nvSpPr>
-        <p:spPr/>
-        <p:txBody>
-          <a:bodyPr/>
-          <a:lstStyle/>
-          <a:p>
-            <a:fld id="{F7021451-1387-4CA6-816F-3879F97B5CBC}" type="slidenum">
-              <a:rPr lang="en-US"/>
-              <a:t>12</a:t>
-            </a:fld>
-            <a:endParaRPr lang="en-US"/>
-          </a:p>
-        </p:txBody>
-      </p:sp>
-    </p:spTree>
-    <p:extLst>
-      <p:ext uri="{BB962C8B-B14F-4D97-AF65-F5344CB8AC3E}">
-        <p14:creationId xmlns:p14="http://schemas.microsoft.com/office/powerpoint/2010/main" val="1024086991"/>
-      </p:ext>
-    </p:extLst>
-  </p:cSld>
-  <p:clrMapOvr>
-    <a:masterClrMapping/>
-  </p:clrMapOvr>
-</p:notes>
-</file>
-
-<file path=ppt/notesSlides/notesSlide13.xml><?xml version="1.0" encoding="utf-8"?>
-<p:notes xmlns:a="http://schemas.openxmlformats.org/drawingml/2006/main" xmlns:r="http://schemas.openxmlformats.org/officeDocument/2006/relationships" xmlns:p="http://schemas.openxmlformats.org/presentationml/2006/main">
-  <p:cSld>
-    <p:spTree>
-      <p:nvGrpSpPr>
-        <p:cNvPr id="1" name=""/>
-        <p:cNvGrpSpPr/>
-        <p:nvPr/>
-      </p:nvGrpSpPr>
-      <p:grpSpPr>
-        <a:xfrm>
-          <a:off x="0" y="0"/>
-          <a:ext cx="0" cy="0"/>
-          <a:chOff x="0" y="0"/>
-          <a:chExt cx="0" cy="0"/>
-        </a:xfrm>
-      </p:grpSpPr>
-      <p:sp>
-        <p:nvSpPr>
-          <p:cNvPr id="2" name="Slide Image Placeholder 1"/>
-          <p:cNvSpPr>
-            <a:spLocks noGrp="1" noRot="1" noChangeAspect="1"/>
-          </p:cNvSpPr>
-          <p:nvPr>
-            <p:ph type="sldImg"/>
-          </p:nvPr>
-        </p:nvSpPr>
-        <p:spPr/>
-      </p:sp>
-      <p:sp>
-        <p:nvSpPr>
-          <p:cNvPr id="3" name="Notes Placeholder 2"/>
-          <p:cNvSpPr>
-            <a:spLocks noGrp="1"/>
-          </p:cNvSpPr>
-          <p:nvPr>
-            <p:ph type="body" idx="1"/>
-          </p:nvPr>
-        </p:nvSpPr>
-        <p:spPr/>
-        <p:txBody>
-          <a:bodyPr/>
-          <a:lstStyle/>
-          <a:p>
-            <a:r>
-              <a:rPr lang="en-US" dirty="0"/>
-              <a:t>[10:30–12:00] Dois agentes com a mesma taxa podem ter custo muito diferente, ou um deles pode resolver mexendo em arquivo que não devia.
-Fora do escopo é métrica separada de propósito: "resolveu, mas editou o código congelado" não é sucesso.
-Transição: "Antes de contar sucesso, eu preciso dizer o que conta como sucesso."</a:t>
-            </a:r>
-            <a:endParaRPr lang="en-US" dirty="0"/>
-          </a:p>
-        </p:txBody>
-      </p:sp>
-      <p:sp>
-        <p:nvSpPr>
-          <p:cNvPr id="4" name="Slide Number Placeholder 3"/>
-          <p:cNvSpPr>
-            <a:spLocks noGrp="1"/>
-          </p:cNvSpPr>
-          <p:nvPr>
-            <p:ph type="sldNum" sz="quarter" idx="10"/>
-          </p:nvPr>
-        </p:nvSpPr>
-        <p:spPr/>
-        <p:txBody>
-          <a:bodyPr/>
-          <a:lstStyle/>
-          <a:p>
-            <a:fld id="{F7021451-1387-4CA6-816F-3879F97B5CBC}" type="slidenum">
-              <a:rPr lang="en-US"/>
-              <a:t>13</a:t>
-            </a:fld>
-            <a:endParaRPr lang="en-US"/>
-          </a:p>
-        </p:txBody>
-      </p:sp>
-    </p:spTree>
-    <p:extLst>
-      <p:ext uri="{BB962C8B-B14F-4D97-AF65-F5344CB8AC3E}">
-        <p14:creationId xmlns:p14="http://schemas.microsoft.com/office/powerpoint/2010/main" val="1024086991"/>
-      </p:ext>
-    </p:extLst>
-  </p:cSld>
-  <p:clrMapOvr>
-    <a:masterClrMapping/>
-  </p:clrMapOvr>
-</p:notes>
-</file>
-
-<file path=ppt/notesSlides/notesSlide14.xml><?xml version="1.0" encoding="utf-8"?>
-<p:notes xmlns:a="http://schemas.openxmlformats.org/drawingml/2006/main" xmlns:r="http://schemas.openxmlformats.org/officeDocument/2006/relationships" xmlns:p="http://schemas.openxmlformats.org/presentationml/2006/main">
-  <p:cSld>
-    <p:spTree>
-      <p:nvGrpSpPr>
-        <p:cNvPr id="1" name=""/>
-        <p:cNvGrpSpPr/>
-        <p:nvPr/>
-      </p:nvGrpSpPr>
-      <p:grpSpPr>
-        <a:xfrm>
-          <a:off x="0" y="0"/>
-          <a:ext cx="0" cy="0"/>
-          <a:chOff x="0" y="0"/>
-          <a:chExt cx="0" cy="0"/>
-        </a:xfrm>
-      </p:grpSpPr>
-      <p:sp>
-        <p:nvSpPr>
-          <p:cNvPr id="2" name="Slide Image Placeholder 1"/>
-          <p:cNvSpPr>
-            <a:spLocks noGrp="1" noRot="1" noChangeAspect="1"/>
-          </p:cNvSpPr>
-          <p:nvPr>
-            <p:ph type="sldImg"/>
-          </p:nvPr>
-        </p:nvSpPr>
-        <p:spPr/>
-      </p:sp>
-      <p:sp>
-        <p:nvSpPr>
-          <p:cNvPr id="3" name="Notes Placeholder 2"/>
-          <p:cNvSpPr>
-            <a:spLocks noGrp="1"/>
-          </p:cNvSpPr>
-          <p:nvPr>
-            <p:ph type="body" idx="1"/>
-          </p:nvPr>
-        </p:nvSpPr>
-        <p:spPr/>
-        <p:txBody>
-          <a:bodyPr/>
-          <a:lstStyle/>
-          <a:p>
-            <a:r>
-              <a:rPr lang="en-US" dirty="0"/>
-              <a:t>[12:00–13:30] Desfecho, não "funcionou?": cada execução termina em UM rótulo. erro_agente = timeout, login, limite de turnos.
-Erro do agente é contado à parte: não é falha da tarefa (clique).
-Desfecho explícito vem direto do caso real (bloco 4): sem rótulo, "funcionou?" vira discussão.</a:t>
-            </a:r>
-            <a:endParaRPr lang="en-US" dirty="0"/>
-          </a:p>
-        </p:txBody>
-      </p:sp>
-      <p:sp>
-        <p:nvSpPr>
-          <p:cNvPr id="4" name="Slide Number Placeholder 3"/>
-          <p:cNvSpPr>
-            <a:spLocks noGrp="1"/>
-          </p:cNvSpPr>
-          <p:nvPr>
-            <p:ph type="sldNum" sz="quarter" idx="10"/>
-          </p:nvPr>
-        </p:nvSpPr>
-        <p:spPr/>
-        <p:txBody>
-          <a:bodyPr/>
-          <a:lstStyle/>
-          <a:p>
-            <a:fld id="{F7021451-1387-4CA6-816F-3879F97B5CBC}" type="slidenum">
-              <a:rPr lang="en-US"/>
-              <a:t>14</a:t>
-            </a:fld>
-            <a:endParaRPr lang="en-US"/>
-          </a:p>
-        </p:txBody>
-      </p:sp>
-    </p:spTree>
-    <p:extLst>
-      <p:ext uri="{BB962C8B-B14F-4D97-AF65-F5344CB8AC3E}">
-        <p14:creationId xmlns:p14="http://schemas.microsoft.com/office/powerpoint/2010/main" val="1024086991"/>
-      </p:ext>
-    </p:extLst>
-  </p:cSld>
-  <p:clrMapOvr>
-    <a:masterClrMapping/>
-  </p:clrMapOvr>
-</p:notes>
-</file>
-
-<file path=ppt/notesSlides/notesSlide15.xml><?xml version="1.0" encoding="utf-8"?>
-<p:notes xmlns:a="http://schemas.openxmlformats.org/drawingml/2006/main" xmlns:r="http://schemas.openxmlformats.org/officeDocument/2006/relationships" xmlns:p="http://schemas.openxmlformats.org/presentationml/2006/main">
-  <p:cSld>
-    <p:spTree>
-      <p:nvGrpSpPr>
-        <p:cNvPr id="1" name=""/>
-        <p:cNvGrpSpPr/>
-        <p:nvPr/>
-      </p:nvGrpSpPr>
-      <p:grpSpPr>
-        <a:xfrm>
-          <a:off x="0" y="0"/>
-          <a:ext cx="0" cy="0"/>
-          <a:chOff x="0" y="0"/>
-          <a:chExt cx="0" cy="0"/>
-        </a:xfrm>
-      </p:grpSpPr>
-      <p:sp>
-        <p:nvSpPr>
-          <p:cNvPr id="2" name="Slide Image Placeholder 1"/>
-          <p:cNvSpPr>
-            <a:spLocks noGrp="1" noRot="1" noChangeAspect="1"/>
-          </p:cNvSpPr>
-          <p:nvPr>
-            <p:ph type="sldImg"/>
-          </p:nvPr>
-        </p:nvSpPr>
-        <p:spPr/>
-      </p:sp>
-      <p:sp>
-        <p:nvSpPr>
-          <p:cNvPr id="3" name="Notes Placeholder 2"/>
-          <p:cNvSpPr>
-            <a:spLocks noGrp="1"/>
-          </p:cNvSpPr>
-          <p:nvPr>
-            <p:ph type="body" idx="1"/>
-          </p:nvPr>
-        </p:nvSpPr>
-        <p:spPr/>
-        <p:txBody>
-          <a:bodyPr/>
-          <a:lstStyle/>
-          <a:p>
-            <a:r>
-              <a:rPr lang="en-US" dirty="0"/>
-              <a:t>[13:30–15:00] Ler as duas linhas e PERGUNTAR antes de clicar: "Quando k cresce, pass@k sobe ou desce?" (deixar a plateia gritar; até 10 s). Clique: sobe (mais chances de acertar uma). "E o pass^k?" Clique: desce (mais chances de errar uma).
-Se alguém responder errado: "Pensa em k = 100: acertar pelo menos uma de 100 é fácil; acertar as 100 é difícil."
-Clique final: para um agente que roda sozinho, pass^k é o que importa: você não vai ficar pedindo de novo até dar certo. É a métrica honesta para automação.
-pass^k com k=2 é o que o run de hoje mede: das 8 tarefas, quantas passaram nas duas repetições. Conservador: uma repetição com erro_agente conta como "não passou".</a:t>
-            </a:r>
-            <a:endParaRPr lang="en-US" dirty="0"/>
-          </a:p>
-        </p:txBody>
-      </p:sp>
-      <p:sp>
-        <p:nvSpPr>
-          <p:cNvPr id="4" name="Slide Number Placeholder 3"/>
-          <p:cNvSpPr>
-            <a:spLocks noGrp="1"/>
-          </p:cNvSpPr>
-          <p:nvPr>
-            <p:ph type="sldNum" sz="quarter" idx="10"/>
-          </p:nvPr>
-        </p:nvSpPr>
-        <p:spPr/>
-        <p:txBody>
-          <a:bodyPr/>
-          <a:lstStyle/>
-          <a:p>
-            <a:fld id="{F7021451-1387-4CA6-816F-3879F97B5CBC}" type="slidenum">
-              <a:rPr lang="en-US"/>
-              <a:t>15</a:t>
-            </a:fld>
-            <a:endParaRPr lang="en-US"/>
-          </a:p>
-        </p:txBody>
-      </p:sp>
-    </p:spTree>
-    <p:extLst>
-      <p:ext uri="{BB962C8B-B14F-4D97-AF65-F5344CB8AC3E}">
-        <p14:creationId xmlns:p14="http://schemas.microsoft.com/office/powerpoint/2010/main" val="1024086991"/>
-      </p:ext>
-    </p:extLst>
-  </p:cSld>
-  <p:clrMapOvr>
-    <a:masterClrMapping/>
-  </p:clrMapOvr>
-</p:notes>
-</file>
-
-<file path=ppt/notesSlides/notesSlide16.xml><?xml version="1.0" encoding="utf-8"?>
-<p:notes xmlns:a="http://schemas.openxmlformats.org/drawingml/2006/main" xmlns:r="http://schemas.openxmlformats.org/officeDocument/2006/relationships" xmlns:p="http://schemas.openxmlformats.org/presentationml/2006/main">
-  <p:cSld>
-    <p:spTree>
-      <p:nvGrpSpPr>
-        <p:cNvPr id="1" name=""/>
-        <p:cNvGrpSpPr/>
-        <p:nvPr/>
-      </p:nvGrpSpPr>
-      <p:grpSpPr>
-        <a:xfrm>
-          <a:off x="0" y="0"/>
-          <a:ext cx="0" cy="0"/>
-          <a:chOff x="0" y="0"/>
-          <a:chExt cx="0" cy="0"/>
-        </a:xfrm>
-      </p:grpSpPr>
-      <p:sp>
-        <p:nvSpPr>
-          <p:cNvPr id="2" name="Slide Image Placeholder 1"/>
-          <p:cNvSpPr>
-            <a:spLocks noGrp="1" noRot="1" noChangeAspect="1"/>
-          </p:cNvSpPr>
-          <p:nvPr>
-            <p:ph type="sldImg"/>
-          </p:nvPr>
-        </p:nvSpPr>
-        <p:spPr/>
-      </p:sp>
-      <p:sp>
-        <p:nvSpPr>
-          <p:cNvPr id="3" name="Notes Placeholder 2"/>
-          <p:cNvSpPr>
-            <a:spLocks noGrp="1"/>
-          </p:cNvSpPr>
-          <p:nvPr>
-            <p:ph type="body" idx="1"/>
-          </p:nvPr>
-        </p:nvSpPr>
-        <p:spPr/>
-        <p:txBody>
-          <a:bodyPr/>
-          <a:lstStyle/>
-          <a:p>
-            <a:r>
-              <a:rPr lang="en-US" dirty="0"/>
-              <a:t>[15:00]</a:t>
-            </a:r>
-            <a:endParaRPr lang="en-US" dirty="0"/>
-          </a:p>
-        </p:txBody>
-      </p:sp>
-      <p:sp>
-        <p:nvSpPr>
-          <p:cNvPr id="4" name="Slide Number Placeholder 3"/>
-          <p:cNvSpPr>
-            <a:spLocks noGrp="1"/>
-          </p:cNvSpPr>
-          <p:nvPr>
-            <p:ph type="sldNum" sz="quarter" idx="10"/>
-          </p:nvPr>
-        </p:nvSpPr>
-        <p:spPr/>
-        <p:txBody>
-          <a:bodyPr/>
-          <a:lstStyle/>
-          <a:p>
-            <a:fld id="{F7021451-1387-4CA6-816F-3879F97B5CBC}" type="slidenum">
-              <a:rPr lang="en-US"/>
-              <a:t>16</a:t>
-            </a:fld>
-            <a:endParaRPr lang="en-US"/>
-          </a:p>
-        </p:txBody>
-      </p:sp>
-    </p:spTree>
-    <p:extLst>
-      <p:ext uri="{BB962C8B-B14F-4D97-AF65-F5344CB8AC3E}">
-        <p14:creationId xmlns:p14="http://schemas.microsoft.com/office/powerpoint/2010/main" val="1024086991"/>
-      </p:ext>
-    </p:extLst>
-  </p:cSld>
-  <p:clrMapOvr>
-    <a:masterClrMapping/>
-  </p:clrMapOvr>
-</p:notes>
-</file>
-
-<file path=ppt/notesSlides/notesSlide17.xml><?xml version="1.0" encoding="utf-8"?>
-<p:notes xmlns:a="http://schemas.openxmlformats.org/drawingml/2006/main" xmlns:r="http://schemas.openxmlformats.org/officeDocument/2006/relationships" xmlns:p="http://schemas.openxmlformats.org/presentationml/2006/main">
-  <p:cSld>
-    <p:spTree>
-      <p:nvGrpSpPr>
-        <p:cNvPr id="1" name=""/>
-        <p:cNvGrpSpPr/>
-        <p:nvPr/>
-      </p:nvGrpSpPr>
-      <p:grpSpPr>
-        <a:xfrm>
-          <a:off x="0" y="0"/>
-          <a:ext cx="0" cy="0"/>
-          <a:chOff x="0" y="0"/>
-          <a:chExt cx="0" cy="0"/>
-        </a:xfrm>
-      </p:grpSpPr>
-      <p:sp>
-        <p:nvSpPr>
-          <p:cNvPr id="2" name="Slide Image Placeholder 1"/>
-          <p:cNvSpPr>
-            <a:spLocks noGrp="1" noRot="1" noChangeAspect="1"/>
-          </p:cNvSpPr>
-          <p:nvPr>
-            <p:ph type="sldImg"/>
-          </p:nvPr>
-        </p:nvSpPr>
-        <p:spPr/>
-      </p:sp>
-      <p:sp>
-        <p:nvSpPr>
-          <p:cNvPr id="3" name="Notes Placeholder 2"/>
-          <p:cNvSpPr>
-            <a:spLocks noGrp="1"/>
-          </p:cNvSpPr>
-          <p:nvPr>
-            <p:ph type="body" idx="1"/>
-          </p:nvPr>
-        </p:nvSpPr>
-        <p:spPr/>
-        <p:txBody>
-          <a:bodyPr/>
-          <a:lstStyle/>
-          <a:p>
-            <a:r>
-              <a:rPr lang="en-US" dirty="0"/>
-              <a:t>[15:00–17:00] App de laboratório: agenda de meetups, sintético. O prompt é escrito como issue de verdade e não cita a convenção. Se o prompt dissesse "use ErroDominio", A e B empatariam e a gente não mediria nada.
+              <a:t>[09:00–11:00] App de laboratório: agenda de meetups, sintético. O prompt é escrito como issue de verdade e não cita a convenção. Se o prompt dissesse "use ErroDominio", A e B empatariam e a gente não mediria nada.
 As 8 tarefas (como uma issue → o que o teste escondido exige):
 01 "A listagem de próximos eventos está devolvendo um a menos." → controle.
 02 "Preciso de uma função que conte inscritos de um evento." → controle.
@@ -1292,7 +647,7 @@
           <a:p>
             <a:fld id="{F7021451-1387-4CA6-816F-3879F97B5CBC}" type="slidenum">
               <a:rPr lang="en-US"/>
-              <a:t>17</a:t>
+              <a:t>10</a:t>
             </a:fld>
             <a:endParaRPr lang="en-US"/>
           </a:p>
@@ -1311,7 +666,7 @@
 </p:notes>
 </file>
 
-<file path=ppt/notesSlides/notesSlide18.xml><?xml version="1.0" encoding="utf-8"?>
+<file path=ppt/notesSlides/notesSlide11.xml><?xml version="1.0" encoding="utf-8"?>
 <p:notes xmlns:a="http://schemas.openxmlformats.org/drawingml/2006/main" xmlns:r="http://schemas.openxmlformats.org/officeDocument/2006/relationships" xmlns:p="http://schemas.openxmlformats.org/presentationml/2006/main">
   <p:cSld>
     <p:spTree>
@@ -1357,7 +712,7 @@
           <a:p>
             <a:r>
               <a:rPr lang="en-US" dirty="0"/>
-              <a:t>[17:00–19:00] Arquivos reais de `tarefas/03-evento-lotado/`. Em cima, o trecho do `prompt` do `tarefa.json`; prompt inteiro: "Hoje dá para inscrever mais gente do que a capacidade do evento. Não deixe inscrever em evento lotado: quando o evento já tiver `capacidade` inscritos, `inscrever` deve recusar a nova inscrição." O agente só vê o prompt. O campo `permitidos` (`src/inscricoes.ts`, `test/**`) define o escopo.
+              <a:t>[11:00–13:00] Arquivos reais de `tarefas/03-evento-lotado/`. Em cima, o trecho do `prompt` do `tarefa.json`; prompt inteiro: "Hoje dá para inscrever mais gente do que a capacidade do evento. Não deixe inscrever em evento lotado: quando o evento já tiver `capacidade` inscritos, `inscrever` deve recusar a nova inscrição." O agente só vê o prompt. O campo `permitidos` (`src/inscricoes.ts`, `test/**`) define o escopo.
 Embaixo, as asserções do `oculto.test.ts` (o agente não vê; a última, no arquivo, tem a mensagem "CAPACIDADE_INVALIDA já existe e significa outra coisa"). O teste tem mais um caso: a vaga liberada por cancelamento pode ser ocupada.
 Ler o critério de feito: não basta "lançar um erro". Tem que ser o erro do domínio (`ErroDominio`), com o código no formato da casa (SCREAMING_SNAKE). O prompt não diz qual código usar, então o teste não exige um nome exato: aceita qualquer nome razoável de lotação e só recusa reaproveitar `CAPACIDADE_INVALIDA`, que já existe e significa outra coisa. É exatamente o tipo de coisa que um dev novo no time erraria sem ler a documentação, e que o agente sem CLAUDE.md também tende a errar.
 O teste nunca entra na pasta do agente: a correção roda numa pasta nova, com o app intacto + os arquivos que o agente mudou, e o teste escondido entra por último, por cima de qualquer arquivo com o mesmo nome. Se o agente "criar" um teste oculto falso para passar, não adianta.</a:t>
@@ -1383,7 +738,7 @@
           <a:p>
             <a:fld id="{F7021451-1387-4CA6-816F-3879F97B5CBC}" type="slidenum">
               <a:rPr lang="en-US"/>
-              <a:t>18</a:t>
+              <a:t>11</a:t>
             </a:fld>
             <a:endParaRPr lang="en-US"/>
           </a:p>
@@ -1402,7 +757,7 @@
 </p:notes>
 </file>
 
-<file path=ppt/notesSlides/notesSlide19.xml><?xml version="1.0" encoding="utf-8"?>
+<file path=ppt/notesSlides/notesSlide12.xml><?xml version="1.0" encoding="utf-8"?>
 <p:notes xmlns:a="http://schemas.openxmlformats.org/drawingml/2006/main" xmlns:r="http://schemas.openxmlformats.org/officeDocument/2006/relationships" xmlns:p="http://schemas.openxmlformats.org/presentationml/2006/main">
   <p:cSld>
     <p:spTree>
@@ -1448,7 +803,7 @@
           <a:p>
             <a:r>
               <a:rPr lang="en-US" dirty="0"/>
-              <a:t>[19:00–21:00] 1 · Cópia limpa: pasta temporária com o app. Variante B ganha o CLAUDE.md. O git que mede o diff fica FORA da cópia.
+              <a:t>[13:00–14:30] 1 · Cópia limpa: pasta temporária com o app. Variante B ganha o CLAUDE.md. O git que mede o diff fica FORA da cópia.
 2 · Agente: `claude -p` headless, saída JSON, ferramentas numa lista fechada, sandbox do SO (sem rede, escrita só na cópia), limite de turnos e timeout.
 3 · Correção: pasta NOVA: app intacto + o que o agente mudou + teste escondido. Vitest em sandbox; diff contra `permitidos`.
 O promptfoo orquestra: um provider JS por variante, `repeat: 2`, concorrência 4, saída em JSON. Um script lê o JSON e calcula as métricas.
@@ -1480,6 +835,659 @@
           <a:p>
             <a:fld id="{F7021451-1387-4CA6-816F-3879F97B5CBC}" type="slidenum">
               <a:rPr lang="en-US"/>
+              <a:t>12</a:t>
+            </a:fld>
+            <a:endParaRPr lang="en-US"/>
+          </a:p>
+        </p:txBody>
+      </p:sp>
+    </p:spTree>
+    <p:extLst>
+      <p:ext uri="{BB962C8B-B14F-4D97-AF65-F5344CB8AC3E}">
+        <p14:creationId xmlns:p14="http://schemas.microsoft.com/office/powerpoint/2010/main" val="1024086991"/>
+      </p:ext>
+    </p:extLst>
+  </p:cSld>
+  <p:clrMapOvr>
+    <a:masterClrMapping/>
+  </p:clrMapOvr>
+</p:notes>
+</file>
+
+<file path=ppt/notesSlides/notesSlide13.xml><?xml version="1.0" encoding="utf-8"?>
+<p:notes xmlns:a="http://schemas.openxmlformats.org/drawingml/2006/main" xmlns:r="http://schemas.openxmlformats.org/officeDocument/2006/relationships" xmlns:p="http://schemas.openxmlformats.org/presentationml/2006/main">
+  <p:cSld>
+    <p:spTree>
+      <p:nvGrpSpPr>
+        <p:cNvPr id="1" name=""/>
+        <p:cNvGrpSpPr/>
+        <p:nvPr/>
+      </p:nvGrpSpPr>
+      <p:grpSpPr>
+        <a:xfrm>
+          <a:off x="0" y="0"/>
+          <a:ext cx="0" cy="0"/>
+          <a:chOff x="0" y="0"/>
+          <a:chExt cx="0" cy="0"/>
+        </a:xfrm>
+      </p:grpSpPr>
+      <p:sp>
+        <p:nvSpPr>
+          <p:cNvPr id="2" name="Slide Image Placeholder 1"/>
+          <p:cNvSpPr>
+            <a:spLocks noGrp="1" noRot="1" noChangeAspect="1"/>
+          </p:cNvSpPr>
+          <p:nvPr>
+            <p:ph type="sldImg"/>
+          </p:nvPr>
+        </p:nvSpPr>
+        <p:spPr/>
+      </p:sp>
+      <p:sp>
+        <p:nvSpPr>
+          <p:cNvPr id="3" name="Notes Placeholder 2"/>
+          <p:cNvSpPr>
+            <a:spLocks noGrp="1"/>
+          </p:cNvSpPr>
+          <p:nvPr>
+            <p:ph type="body" idx="1"/>
+          </p:nvPr>
+        </p:nvSpPr>
+        <p:spPr/>
+        <p:txBody>
+          <a:bodyPr/>
+          <a:lstStyle/>
+          <a:p>
+            <a:r>
+              <a:rPr lang="en-US" dirty="0"/>
+              <a:t>[14:30–16:00] Ajuda: critérios que teste não pega (clareza, estilo, mensagem de commit); rápido de escrever (`llm-rubric` no promptfoo); bom para triagem, antes do olho humano.
+Atrapalha: vieses conhecidos (posição, verbosidade, preferir a si mesmo); juiz não determinístico avaliando agente não determinístico SOMA variância; precisa ser avaliado contra rótulo humano.
+Hoje o critério de feito é 100% teste: nenhuma tarefa precisa de juiz.
+Não é regra universal. Pergunta para a plateia (falar, não está no slide): "Que tarefa do seu dia a dia não dá para verificar com teste?" (ex.: "a documentação ficou clara?", "o PR está bem descrito?"). Ali o juiz pode valer, desde que você meça o juiz também.
+No caso real, o juiz foi rejeitado: juiz variável avaliando agente variável soma variância.
+Transição: "Isso aqui não é teoria de laboratório. Vou mostrar o que aprendemos fazendo isso em produção."</a:t>
+            </a:r>
+            <a:endParaRPr lang="en-US" dirty="0"/>
+          </a:p>
+        </p:txBody>
+      </p:sp>
+      <p:sp>
+        <p:nvSpPr>
+          <p:cNvPr id="4" name="Slide Number Placeholder 3"/>
+          <p:cNvSpPr>
+            <a:spLocks noGrp="1"/>
+          </p:cNvSpPr>
+          <p:nvPr>
+            <p:ph type="sldNum" sz="quarter" idx="10"/>
+          </p:nvPr>
+        </p:nvSpPr>
+        <p:spPr/>
+        <p:txBody>
+          <a:bodyPr/>
+          <a:lstStyle/>
+          <a:p>
+            <a:fld id="{F7021451-1387-4CA6-816F-3879F97B5CBC}" type="slidenum">
+              <a:rPr lang="en-US"/>
+              <a:t>13</a:t>
+            </a:fld>
+            <a:endParaRPr lang="en-US"/>
+          </a:p>
+        </p:txBody>
+      </p:sp>
+    </p:spTree>
+    <p:extLst>
+      <p:ext uri="{BB962C8B-B14F-4D97-AF65-F5344CB8AC3E}">
+        <p14:creationId xmlns:p14="http://schemas.microsoft.com/office/powerpoint/2010/main" val="1024086991"/>
+      </p:ext>
+    </p:extLst>
+  </p:cSld>
+  <p:clrMapOvr>
+    <a:masterClrMapping/>
+  </p:clrMapOvr>
+</p:notes>
+</file>
+
+<file path=ppt/notesSlides/notesSlide14.xml><?xml version="1.0" encoding="utf-8"?>
+<p:notes xmlns:a="http://schemas.openxmlformats.org/drawingml/2006/main" xmlns:r="http://schemas.openxmlformats.org/officeDocument/2006/relationships" xmlns:p="http://schemas.openxmlformats.org/presentationml/2006/main">
+  <p:cSld>
+    <p:spTree>
+      <p:nvGrpSpPr>
+        <p:cNvPr id="1" name=""/>
+        <p:cNvGrpSpPr/>
+        <p:nvPr/>
+      </p:nvGrpSpPr>
+      <p:grpSpPr>
+        <a:xfrm>
+          <a:off x="0" y="0"/>
+          <a:ext cx="0" cy="0"/>
+          <a:chOff x="0" y="0"/>
+          <a:chExt cx="0" cy="0"/>
+        </a:xfrm>
+      </p:grpSpPr>
+      <p:sp>
+        <p:nvSpPr>
+          <p:cNvPr id="2" name="Slide Image Placeholder 1"/>
+          <p:cNvSpPr>
+            <a:spLocks noGrp="1" noRot="1" noChangeAspect="1"/>
+          </p:cNvSpPr>
+          <p:nvPr>
+            <p:ph type="sldImg"/>
+          </p:nvPr>
+        </p:nvSpPr>
+        <p:spPr/>
+      </p:sp>
+      <p:sp>
+        <p:nvSpPr>
+          <p:cNvPr id="3" name="Notes Placeholder 2"/>
+          <p:cNvSpPr>
+            <a:spLocks noGrp="1"/>
+          </p:cNvSpPr>
+          <p:nvPr>
+            <p:ph type="body" idx="1"/>
+          </p:nvPr>
+        </p:nvSpPr>
+        <p:spPr/>
+        <p:txBody>
+          <a:bodyPr/>
+          <a:lstStyle/>
+          <a:p>
+            <a:r>
+              <a:rPr lang="en-US" dirty="0"/>
+              <a:t>[16:00–17:30] Contexto em uma frase: um time da Creditas construiu agentes que resolvem chamados operacionais de suporte (o "keep the lights on", KTLO). Não vou mostrar números internos nem nomes de sistemas: só o que aprendemos sobre medir.
+Lição 1 · Desfecho explícito por execução: toda execução termina com um rótulo: resolvido, assistido, escalado ou falta informação. "Funcionou?" não é pergunta que se responde no painel.
+"Assistido" = o agente diagnosticou, mas um humano executou. Contar isso como "resolvido" infla o número; contar como "falha" esconde valor. Por isso é um rótulo próprio.
+Lição 2 (clique) · Desfecho mal definido distorce a métrica: caso fora do escopo do agente contado como falha derruba a taxa, e ninguém sabe se o agente piorou ou se entrou outro tipo de caso. Se o denominador muda de composição, a taxa muda sem o agente mudar. Defina o desfecho antes de olhar o número.
+No repo de hoje: `passou`, `falhou`, `fora_do_escopo`, `erro_agente`.</a:t>
+            </a:r>
+            <a:endParaRPr lang="en-US" dirty="0"/>
+          </a:p>
+        </p:txBody>
+      </p:sp>
+      <p:sp>
+        <p:nvSpPr>
+          <p:cNvPr id="4" name="Slide Number Placeholder 3"/>
+          <p:cNvSpPr>
+            <a:spLocks noGrp="1"/>
+          </p:cNvSpPr>
+          <p:nvPr>
+            <p:ph type="sldNum" sz="quarter" idx="10"/>
+          </p:nvPr>
+        </p:nvSpPr>
+        <p:spPr/>
+        <p:txBody>
+          <a:bodyPr/>
+          <a:lstStyle/>
+          <a:p>
+            <a:fld id="{F7021451-1387-4CA6-816F-3879F97B5CBC}" type="slidenum">
+              <a:rPr lang="en-US"/>
+              <a:t>14</a:t>
+            </a:fld>
+            <a:endParaRPr lang="en-US"/>
+          </a:p>
+        </p:txBody>
+      </p:sp>
+    </p:spTree>
+    <p:extLst>
+      <p:ext uri="{BB962C8B-B14F-4D97-AF65-F5344CB8AC3E}">
+        <p14:creationId xmlns:p14="http://schemas.microsoft.com/office/powerpoint/2010/main" val="1024086991"/>
+      </p:ext>
+    </p:extLst>
+  </p:cSld>
+  <p:clrMapOvr>
+    <a:masterClrMapping/>
+  </p:clrMapOvr>
+</p:notes>
+</file>
+
+<file path=ppt/notesSlides/notesSlide15.xml><?xml version="1.0" encoding="utf-8"?>
+<p:notes xmlns:a="http://schemas.openxmlformats.org/drawingml/2006/main" xmlns:r="http://schemas.openxmlformats.org/officeDocument/2006/relationships" xmlns:p="http://schemas.openxmlformats.org/presentationml/2006/main">
+  <p:cSld>
+    <p:spTree>
+      <p:nvGrpSpPr>
+        <p:cNvPr id="1" name=""/>
+        <p:cNvGrpSpPr/>
+        <p:nvPr/>
+      </p:nvGrpSpPr>
+      <p:grpSpPr>
+        <a:xfrm>
+          <a:off x="0" y="0"/>
+          <a:ext cx="0" cy="0"/>
+          <a:chOff x="0" y="0"/>
+          <a:chExt cx="0" cy="0"/>
+        </a:xfrm>
+      </p:grpSpPr>
+      <p:sp>
+        <p:nvSpPr>
+          <p:cNvPr id="2" name="Slide Image Placeholder 1"/>
+          <p:cNvSpPr>
+            <a:spLocks noGrp="1" noRot="1" noChangeAspect="1"/>
+          </p:cNvSpPr>
+          <p:nvPr>
+            <p:ph type="sldImg"/>
+          </p:nvPr>
+        </p:nvSpPr>
+        <p:spPr/>
+      </p:sp>
+      <p:sp>
+        <p:nvSpPr>
+          <p:cNvPr id="3" name="Notes Placeholder 2"/>
+          <p:cNvSpPr>
+            <a:spLocks noGrp="1"/>
+          </p:cNvSpPr>
+          <p:nvPr>
+            <p:ph type="body" idx="1"/>
+          </p:nvPr>
+        </p:nvSpPr>
+        <p:spPr/>
+        <p:txBody>
+          <a:bodyPr/>
+          <a:lstStyle/>
+          <a:p>
+            <a:r>
+              <a:rPr lang="en-US" dirty="0"/>
+              <a:t>[17:30–19:00] Um clique por linha (três cliques).
+Lição 4 · Duas camadas: determinística a cada commit; modelo real contra gabarito curado por humano. O gabarito NASCE VAZIO, para não herdar o viés da resposta do agente: o humano escreve a resposta esperada sem olhar o que o agente respondeu. Se você copia a resposta do agente para o gabarito, você mede o agente contra ele mesmo.
+Lição 5 · Matriz-catraca: rota × desfecho. A lista de células SEM cobertura só pode encolher; um teste quebra se alguém tirar cobertura. Catraca é um mecanismo que só gira para um lado. Aplicado a eval: o conjunto de casos cobertos só cresce.
+Lição 7 · Falha vira caso: "Falhou na terça, teste na quarta: o erro do dia a dia vira tarefa nova com teste escondido, e o conjunto só cresce." Aprendizado visto em 2 ou mais casos vira regra; o "2 ou mais casos" evita transformar uma exceção em regra para todo mundo.
+Transição: "Então, como eu uso isso para melhorar o MEU agente?"</a:t>
+            </a:r>
+            <a:endParaRPr lang="en-US" dirty="0"/>
+          </a:p>
+        </p:txBody>
+      </p:sp>
+      <p:sp>
+        <p:nvSpPr>
+          <p:cNvPr id="4" name="Slide Number Placeholder 3"/>
+          <p:cNvSpPr>
+            <a:spLocks noGrp="1"/>
+          </p:cNvSpPr>
+          <p:nvPr>
+            <p:ph type="sldNum" sz="quarter" idx="10"/>
+          </p:nvPr>
+        </p:nvSpPr>
+        <p:spPr/>
+        <p:txBody>
+          <a:bodyPr/>
+          <a:lstStyle/>
+          <a:p>
+            <a:fld id="{F7021451-1387-4CA6-816F-3879F97B5CBC}" type="slidenum">
+              <a:rPr lang="en-US"/>
+              <a:t>15</a:t>
+            </a:fld>
+            <a:endParaRPr lang="en-US"/>
+          </a:p>
+        </p:txBody>
+      </p:sp>
+    </p:spTree>
+    <p:extLst>
+      <p:ext uri="{BB962C8B-B14F-4D97-AF65-F5344CB8AC3E}">
+        <p14:creationId xmlns:p14="http://schemas.microsoft.com/office/powerpoint/2010/main" val="1024086991"/>
+      </p:ext>
+    </p:extLst>
+  </p:cSld>
+  <p:clrMapOvr>
+    <a:masterClrMapping/>
+  </p:clrMapOvr>
+</p:notes>
+</file>
+
+<file path=ppt/notesSlides/notesSlide16.xml><?xml version="1.0" encoding="utf-8"?>
+<p:notes xmlns:a="http://schemas.openxmlformats.org/drawingml/2006/main" xmlns:r="http://schemas.openxmlformats.org/officeDocument/2006/relationships" xmlns:p="http://schemas.openxmlformats.org/presentationml/2006/main">
+  <p:cSld>
+    <p:spTree>
+      <p:nvGrpSpPr>
+        <p:cNvPr id="1" name=""/>
+        <p:cNvGrpSpPr/>
+        <p:nvPr/>
+      </p:nvGrpSpPr>
+      <p:grpSpPr>
+        <a:xfrm>
+          <a:off x="0" y="0"/>
+          <a:ext cx="0" cy="0"/>
+          <a:chOff x="0" y="0"/>
+          <a:chExt cx="0" cy="0"/>
+        </a:xfrm>
+      </p:grpSpPr>
+      <p:sp>
+        <p:nvSpPr>
+          <p:cNvPr id="2" name="Slide Image Placeholder 1"/>
+          <p:cNvSpPr>
+            <a:spLocks noGrp="1" noRot="1" noChangeAspect="1"/>
+          </p:cNvSpPr>
+          <p:nvPr>
+            <p:ph type="sldImg"/>
+          </p:nvPr>
+        </p:nvSpPr>
+        <p:spPr/>
+      </p:sp>
+      <p:sp>
+        <p:nvSpPr>
+          <p:cNvPr id="3" name="Notes Placeholder 2"/>
+          <p:cNvSpPr>
+            <a:spLocks noGrp="1"/>
+          </p:cNvSpPr>
+          <p:nvPr>
+            <p:ph type="body" idx="1"/>
+          </p:nvPr>
+        </p:nvSpPr>
+        <p:spPr/>
+        <p:txBody>
+          <a:bodyPr/>
+          <a:lstStyle/>
+          <a:p>
+            <a:r>
+              <a:rPr lang="en-US" dirty="0"/>
+              <a:t>[19:00–20:30] Rode a eval ANTES (linha de base); mude UMA coisa; rode a eval de novo, com repetições; compare com intervalo, não com a média.
+O que conta como "uma coisa": o CLAUDE.md, uma skill nova, um hook, o modelo, o prompt da tarefa. Mudou o modelo E o CLAUDE.md juntos? Você não sabe quem ganhou.
+É o mesmo princípio de teste A/B de produto. O experimento de hoje muda só uma coisa: a existência do CLAUDE.md.
+Dica prática: commite a configuração do agente junto com o resultado da eval. Assim, daqui a um mês você sabe qual versão gerou qual número.</a:t>
+            </a:r>
+            <a:endParaRPr lang="en-US" dirty="0"/>
+          </a:p>
+        </p:txBody>
+      </p:sp>
+      <p:sp>
+        <p:nvSpPr>
+          <p:cNvPr id="4" name="Slide Number Placeholder 3"/>
+          <p:cNvSpPr>
+            <a:spLocks noGrp="1"/>
+          </p:cNvSpPr>
+          <p:nvPr>
+            <p:ph type="sldNum" sz="quarter" idx="10"/>
+          </p:nvPr>
+        </p:nvSpPr>
+        <p:spPr/>
+        <p:txBody>
+          <a:bodyPr/>
+          <a:lstStyle/>
+          <a:p>
+            <a:fld id="{F7021451-1387-4CA6-816F-3879F97B5CBC}" type="slidenum">
+              <a:rPr lang="en-US"/>
+              <a:t>16</a:t>
+            </a:fld>
+            <a:endParaRPr lang="en-US"/>
+          </a:p>
+        </p:txBody>
+      </p:sp>
+    </p:spTree>
+    <p:extLst>
+      <p:ext uri="{BB962C8B-B14F-4D97-AF65-F5344CB8AC3E}">
+        <p14:creationId xmlns:p14="http://schemas.microsoft.com/office/powerpoint/2010/main" val="1024086991"/>
+      </p:ext>
+    </p:extLst>
+  </p:cSld>
+  <p:clrMapOvr>
+    <a:masterClrMapping/>
+  </p:clrMapOvr>
+</p:notes>
+</file>
+
+<file path=ppt/notesSlides/notesSlide17.xml><?xml version="1.0" encoding="utf-8"?>
+<p:notes xmlns:a="http://schemas.openxmlformats.org/drawingml/2006/main" xmlns:r="http://schemas.openxmlformats.org/officeDocument/2006/relationships" xmlns:p="http://schemas.openxmlformats.org/presentationml/2006/main">
+  <p:cSld>
+    <p:spTree>
+      <p:nvGrpSpPr>
+        <p:cNvPr id="1" name=""/>
+        <p:cNvGrpSpPr/>
+        <p:nvPr/>
+      </p:nvGrpSpPr>
+      <p:grpSpPr>
+        <a:xfrm>
+          <a:off x="0" y="0"/>
+          <a:ext cx="0" cy="0"/>
+          <a:chOff x="0" y="0"/>
+          <a:chExt cx="0" cy="0"/>
+        </a:xfrm>
+      </p:grpSpPr>
+      <p:sp>
+        <p:nvSpPr>
+          <p:cNvPr id="2" name="Slide Image Placeholder 1"/>
+          <p:cNvSpPr>
+            <a:spLocks noGrp="1" noRot="1" noChangeAspect="1"/>
+          </p:cNvSpPr>
+          <p:nvPr>
+            <p:ph type="sldImg"/>
+          </p:nvPr>
+        </p:nvSpPr>
+        <p:spPr/>
+      </p:sp>
+      <p:sp>
+        <p:nvSpPr>
+          <p:cNvPr id="3" name="Notes Placeholder 2"/>
+          <p:cNvSpPr>
+            <a:spLocks noGrp="1"/>
+          </p:cNvSpPr>
+          <p:nvPr>
+            <p:ph type="body" idx="1"/>
+          </p:nvPr>
+        </p:nvSpPr>
+        <p:spPr/>
+        <p:txBody>
+          <a:bodyPr/>
+          <a:lstStyle/>
+          <a:p>
+            <a:r>
+              <a:rPr lang="en-US" dirty="0"/>
+              <a:t>[20:30–22:00] CLAUDE.md: entra em TODA sessão; bom para convenções do repo, comando de teste, pastas proibidas; cuidado: é contexto, NÃO obrigação.
+Skill: entra só quando é usada; boa para procedimento longo, material de referência; cuidado: descrição ruim = nunca é chamada.
+Hook: roda antes/depois de cada ferramenta; para regra que PRECISA valer sempre; cuidado: é código, teste como código.
+A própria doc do Claude Code diz que CLAUDE.md é tratado como contexto, não como configuração obrigatória; para bloquear uma ação, use um hook PreToolUse.
+Skill: a doc diz que o corpo da skill só entra no contexto quando ela é usada, então referência longa custa quase nada até ser necessária.
+Clique: regra que não pode falhar não mora no prompt. Mora no hook, no teste ou no CI.
+Cada uma dessas mudanças é uma variante B possível no repo: troque o CLAUDE.md por uma skill ou um hook e rode de novo.
+Transição: "Já deu tempo. Vamos ver o que o agente fez." Voltar para o terminal.</a:t>
+            </a:r>
+            <a:endParaRPr lang="en-US" dirty="0"/>
+          </a:p>
+        </p:txBody>
+      </p:sp>
+      <p:sp>
+        <p:nvSpPr>
+          <p:cNvPr id="4" name="Slide Number Placeholder 3"/>
+          <p:cNvSpPr>
+            <a:spLocks noGrp="1"/>
+          </p:cNvSpPr>
+          <p:nvPr>
+            <p:ph type="sldNum" sz="quarter" idx="10"/>
+          </p:nvPr>
+        </p:nvSpPr>
+        <p:spPr/>
+        <p:txBody>
+          <a:bodyPr/>
+          <a:lstStyle/>
+          <a:p>
+            <a:fld id="{F7021451-1387-4CA6-816F-3879F97B5CBC}" type="slidenum">
+              <a:rPr lang="en-US"/>
+              <a:t>17</a:t>
+            </a:fld>
+            <a:endParaRPr lang="en-US"/>
+          </a:p>
+        </p:txBody>
+      </p:sp>
+    </p:spTree>
+    <p:extLst>
+      <p:ext uri="{BB962C8B-B14F-4D97-AF65-F5344CB8AC3E}">
+        <p14:creationId xmlns:p14="http://schemas.microsoft.com/office/powerpoint/2010/main" val="1024086991"/>
+      </p:ext>
+    </p:extLst>
+  </p:cSld>
+  <p:clrMapOvr>
+    <a:masterClrMapping/>
+  </p:clrMapOvr>
+</p:notes>
+</file>
+
+<file path=ppt/notesSlides/notesSlide18.xml><?xml version="1.0" encoding="utf-8"?>
+<p:notes xmlns:a="http://schemas.openxmlformats.org/drawingml/2006/main" xmlns:r="http://schemas.openxmlformats.org/officeDocument/2006/relationships" xmlns:p="http://schemas.openxmlformats.org/presentationml/2006/main">
+  <p:cSld>
+    <p:spTree>
+      <p:nvGrpSpPr>
+        <p:cNvPr id="1" name=""/>
+        <p:cNvGrpSpPr/>
+        <p:nvPr/>
+      </p:nvGrpSpPr>
+      <p:grpSpPr>
+        <a:xfrm>
+          <a:off x="0" y="0"/>
+          <a:ext cx="0" cy="0"/>
+          <a:chOff x="0" y="0"/>
+          <a:chExt cx="0" cy="0"/>
+        </a:xfrm>
+      </p:grpSpPr>
+      <p:sp>
+        <p:nvSpPr>
+          <p:cNvPr id="2" name="Slide Image Placeholder 1"/>
+          <p:cNvSpPr>
+            <a:spLocks noGrp="1" noRot="1" noChangeAspect="1"/>
+          </p:cNvSpPr>
+          <p:nvPr>
+            <p:ph type="sldImg"/>
+          </p:nvPr>
+        </p:nvSpPr>
+        <p:spPr/>
+      </p:sp>
+      <p:sp>
+        <p:nvSpPr>
+          <p:cNvPr id="3" name="Notes Placeholder 2"/>
+          <p:cNvSpPr>
+            <a:spLocks noGrp="1"/>
+          </p:cNvSpPr>
+          <p:nvPr>
+            <p:ph type="body" idx="1"/>
+          </p:nvPr>
+        </p:nvSpPr>
+        <p:spPr/>
+        <p:txBody>
+          <a:bodyPr/>
+          <a:lstStyle/>
+          <a:p>
+            <a:r>
+              <a:rPr lang="en-US" dirty="0"/>
+              <a:t>[22:00–25:00] Primeiro, a volta da aposta (slide 5): "No começo, [a proporção que você guardou, ex.: uns 70%] apostou no B. Vamos ver." Não pedir mãos de novo; só lembrar.
+Se o run ainda não terminou: mostrar o progresso do promptfoo e usar o ensaio. Se terminou: `pnpm relatorio` e abrir o HTML. Plano B: `pnpm relatorio:ensaio` (run gravado no ensaio).
+Roteiro de leitura (nesta ordem; a ordem importa):
+1. n real por variante e quantos erro_agente (contados à parte).
+2. Taxa de sucesso de A e de B, com a barra do intervalo.
+3. Veredito em português.
+4. pass^k: quantas tarefas passaram nas duas repetições.
+5. Fora do escopo.
+6. Por tarefa: o ganho (se houver) está nas tarefas de convenção (03–07) ou nas de controle?
+pass^2 em uma frase: "quantas das 8 tarefas passaram nas DUAS repetições; é a consistência."
+Comparar com a aposta da plateia (slide 5) depois de ler o veredito.
+O portão: "No repo, o portão só quebra o CI se A for melhor que B; inconclusivo passa."
+Não comemorar nem lamentar ainda: os próximos slides explicam como ler.
+Exemplo de resultado (o ensaio gravado, não o de hoje): A 12/16 (75%, 51% a 90%), B 16/16 (100%, 81% a 100%), pass^2 6/8 × 8/8, 3 fora do escopo (mexeram em `src/legado/` ou fora dos permitidos) e 1 teste escondido falhando, todos de A, 0 erro_agente → inconclusivo.</a:t>
+            </a:r>
+            <a:endParaRPr lang="en-US" dirty="0"/>
+          </a:p>
+        </p:txBody>
+      </p:sp>
+      <p:sp>
+        <p:nvSpPr>
+          <p:cNvPr id="4" name="Slide Number Placeholder 3"/>
+          <p:cNvSpPr>
+            <a:spLocks noGrp="1"/>
+          </p:cNvSpPr>
+          <p:nvPr>
+            <p:ph type="sldNum" sz="quarter" idx="10"/>
+          </p:nvPr>
+        </p:nvSpPr>
+        <p:spPr/>
+        <p:txBody>
+          <a:bodyPr/>
+          <a:lstStyle/>
+          <a:p>
+            <a:fld id="{F7021451-1387-4CA6-816F-3879F97B5CBC}" type="slidenum">
+              <a:rPr lang="en-US"/>
+              <a:t>18</a:t>
+            </a:fld>
+            <a:endParaRPr lang="en-US"/>
+          </a:p>
+        </p:txBody>
+      </p:sp>
+    </p:spTree>
+    <p:extLst>
+      <p:ext uri="{BB962C8B-B14F-4D97-AF65-F5344CB8AC3E}">
+        <p14:creationId xmlns:p14="http://schemas.microsoft.com/office/powerpoint/2010/main" val="1024086991"/>
+      </p:ext>
+    </p:extLst>
+  </p:cSld>
+  <p:clrMapOvr>
+    <a:masterClrMapping/>
+  </p:clrMapOvr>
+</p:notes>
+</file>
+
+<file path=ppt/notesSlides/notesSlide19.xml><?xml version="1.0" encoding="utf-8"?>
+<p:notes xmlns:a="http://schemas.openxmlformats.org/drawingml/2006/main" xmlns:r="http://schemas.openxmlformats.org/officeDocument/2006/relationships" xmlns:p="http://schemas.openxmlformats.org/presentationml/2006/main">
+  <p:cSld>
+    <p:spTree>
+      <p:nvGrpSpPr>
+        <p:cNvPr id="1" name=""/>
+        <p:cNvGrpSpPr/>
+        <p:nvPr/>
+      </p:nvGrpSpPr>
+      <p:grpSpPr>
+        <a:xfrm>
+          <a:off x="0" y="0"/>
+          <a:ext cx="0" cy="0"/>
+          <a:chOff x="0" y="0"/>
+          <a:chExt cx="0" cy="0"/>
+        </a:xfrm>
+      </p:grpSpPr>
+      <p:sp>
+        <p:nvSpPr>
+          <p:cNvPr id="2" name="Slide Image Placeholder 1"/>
+          <p:cNvSpPr>
+            <a:spLocks noGrp="1" noRot="1" noChangeAspect="1"/>
+          </p:cNvSpPr>
+          <p:nvPr>
+            <p:ph type="sldImg"/>
+          </p:nvPr>
+        </p:nvSpPr>
+        <p:spPr/>
+      </p:sp>
+      <p:sp>
+        <p:nvSpPr>
+          <p:cNvPr id="3" name="Notes Placeholder 2"/>
+          <p:cNvSpPr>
+            <a:spLocks noGrp="1"/>
+          </p:cNvSpPr>
+          <p:nvPr>
+            <p:ph type="body" idx="1"/>
+          </p:nvPr>
+        </p:nvSpPr>
+        <p:spPr/>
+        <p:txBody>
+          <a:bodyPr/>
+          <a:lstStyle/>
+          <a:p>
+            <a:r>
+              <a:rPr lang="en-US" dirty="0"/>
+              <a:t>[25:00–25:30] Slide único, sem cliques. EXEMPLO INVENTADO, não é o run de hoje. Perguntar: "A passou 6 de 16, B passou 12 de 16. B é o dobro. Quem acha que B ganhou?" (mãos; até 15 s). Se a maioria disse "ganhou": "É a resposta natural. E é exatamente o 'parece que melhorou'."
+Avançar para o slide seguinte com a resposta.</a:t>
+            </a:r>
+            <a:endParaRPr lang="en-US" dirty="0"/>
+          </a:p>
+        </p:txBody>
+      </p:sp>
+      <p:sp>
+        <p:nvSpPr>
+          <p:cNvPr id="4" name="Slide Number Placeholder 3"/>
+          <p:cNvSpPr>
+            <a:spLocks noGrp="1"/>
+          </p:cNvSpPr>
+          <p:nvPr>
+            <p:ph type="sldNum" sz="quarter" idx="10"/>
+          </p:nvPr>
+        </p:nvSpPr>
+        <p:spPr/>
+        <p:txBody>
+          <a:bodyPr/>
+          <a:lstStyle/>
+          <a:p>
+            <a:fld id="{F7021451-1387-4CA6-816F-3879F97B5CBC}" type="slidenum">
+              <a:rPr lang="en-US"/>
               <a:t>19</a:t>
             </a:fld>
             <a:endParaRPr lang="en-US"/>
@@ -1635,10 +1643,11 @@
           <a:p>
             <a:r>
               <a:rPr lang="en-US" dirty="0"/>
-              <a:t>[21:00–23:00] Camada 1: testes do MEDIDOR com agente falso: cópia limpa, teste escondido, escopo, erro do agente. Offline, segundos, a cada commit. Prova que a régua mede certo.
-Camada 2: `pnpm eval`, o Claude Code de verdade nas 8 tarefas. Minutos, consome cota, quando algo muda (prompt, CLAUDE.md, modelo). Mede o agente.
-Exemplos de teste da camada 1 no repo: agente falso que não faz nada → "falhou"; que aplica a solução de referência → "passou"; que edita o código congelado → "fora_do_escopo"; que devolve timeout → "erro_agente", sem derrubar o run.
-Também: toda tarefa tem que FALHAR no app intacto e PASSAR com a solução de referência. Tarefa que já passa sem fazer nada é tarefa inútil; tarefa que nem a solução passa é tarefa impossível.</a:t>
+              <a:t>[25:30–26:45] Slide único, sem cliques: barras e veredito já estão na tela. A: 37,5%, intervalo 18% a 61%. B: 75%, intervalo 51% a 90%. As barras se sobrepõem (51% a 61%): inconclusivo.
+O intervalo é a faixa de taxas "verdadeiras" compatíveis com o que vimos, com 95% de confiança. O ponto preto é a taxa observada.
+Wilson em vez da conta "p ± 1,96·√(p(1−p)/n)": com n pequeno ou taxa perto de 0% ou 100%, a conta simples dá intervalo que sai de [0, 1] ou tem largura zero (16/16 daria "100% ± 0"). Wilson não tem esse problema.
+Regra do repo: se o limite inferior de B passa do limite superior de A, "B melhor"; o contrário, "A melhor"; senão, "inconclusivo". Inconclusivo não é empate: é "não tenho dado para dizer".
+Não se sobrepor é um critério conservador de propósito (um teste z de duas proporções chamaria 6/16 × 12/16 de significativo, p≈0,03); o repo prefere não declarar vencedor cedo.</a:t>
             </a:r>
             <a:endParaRPr lang="en-US" dirty="0"/>
           </a:p>
@@ -1726,11 +1735,8 @@
           <a:p>
             <a:r>
               <a:rPr lang="en-US" dirty="0"/>
-              <a:t>[23:00–25:00] Ajuda: critérios que teste não pega (clareza, estilo, mensagem de commit); rápido de escrever (`llm-rubric` no promptfoo); bom para triagem, antes do olho humano.
-Atrapalha: vieses conhecidos (posição, verbosidade, preferir a si mesmo); juiz não determinístico avaliando agente não determinístico SOMA variância; precisa ser avaliado contra rótulo humano.
-Hoje o critério de feito é 100% teste: nenhuma tarefa precisa de juiz.
-Não é regra universal. Pergunta para a plateia (falar, não está no slide): "Que tarefa do seu dia a dia não dá para verificar com teste?" (ex.: "a documentação ficou clara?", "o PR está bem descrito?"). Ali o juiz pode valer, desde que você meça o juiz também.
-Transição: "Isso aqui não é teoria de laboratório. Vou mostrar o que aprendemos fazendo isso em produção."</a:t>
+              <a:t>[26:45–27:15] Slide único, sem cliques: as quatro opções já estão na tela. Perguntar e pedir mãos em cada uma ("quem diz 5? 16? 40? 200?"); até 20 s no total.
+Avançar para o slide seguinte com a resposta.</a:t>
             </a:r>
             <a:endParaRPr lang="en-US" dirty="0"/>
           </a:p>
@@ -1818,7 +1824,11 @@
           <a:p>
             <a:r>
               <a:rPr lang="en-US" dirty="0"/>
-              <a:t>[25:00] Contexto em uma frase: um time da Creditas construiu agentes que resolvem chamados operacionais de suporte (o "keep the lights on", KTLO). Não vou mostrar números internos nem nomes de sistemas: só o que aprendemos sobre medir.</a:t>
+              <a:t>[27:15–29:00] Slide único, sem cliques. Resposta (do ENSAIO, não do run de hoje): com as taxas do ensaio mantidas (A 12/16 × B 16/16), 27 execuções por variante até os intervalos de Wilson pararem de se sobrepor (critério do veredito); o piso pelo teste z é 24. Dizer "do ensaio" em voz alta.
+Se o relatório de hoje mostrou outro número em "execuções necessárias por variante (critério do veredito)" (campo execucoesNecessariasPorVariante), dizer: "no de hoje, deu [N]". Se as duas taxas forem iguais, o relatório diz "não calculável".
+Quem chutou 16 chegou perto: "é o que a gente rodou hoje, e não bastou." Quem chutou 40: "um pouco a mais do que precisava."
+Diferença pequena pede muitas execuções: 62,5% contra 75% pediria 212 por variante.
+Fala de fechamento, qualquer desfecho: "Eu não sei ainda se o meu CLAUDE.md presta. Mas agora eu sei quanto eu preciso rodar para saber. Isso é medir."</a:t>
             </a:r>
             <a:endParaRPr lang="en-US" dirty="0"/>
           </a:p>
@@ -1906,10 +1916,12 @@
           <a:p>
             <a:r>
               <a:rPr lang="en-US" dirty="0"/>
-              <a:t>[25:00–28:00] Lição 1 · Desfecho explícito por execução: toda execução termina com um rótulo: resolvido, assistido, escalado ou falta informação. "Funcionou?" não é pergunta que se responde no painel.
-"Assistido" = o agente diagnosticou, mas um humano executou. Contar isso como "resolvido" infla o número; contar como "falha" esconde valor. Por isso é um rótulo próprio.
-Lição 2 (clique) · Desfecho mal definido distorce a métrica: caso fora do escopo do agente contado como falha derruba a taxa, e ninguém sabe se o agente piorou ou se entrou outro tipo de caso. Se o denominador muda de composição, a taxa muda sem o agente mudar. Defina o desfecho antes de olhar o número.
-No repo de hoje: `passou`, `falhou`, `fora_do_escopo`, `erro_agente`.</a:t>
+              <a:t>[29:00–31:00] Os cinco hábitos (três no slide, dois na fala): 1. defina o DESFECHO antes do número; 2. tarefas reais com TESTE ESCONDIDO e escopo; 3. REPITA: pass^k e intervalo, não uma execução; 4. UMA MUDANÇA por vez; 5. toda falha vira TAREFA NOVA.
+O repo roda o experimento de hoje com o login do Claude Code. O ebook em PDF está dentro dele.
+Deixar este slide parado enquanto as pessoas fotografam o QR, e voltar a ele durante as perguntas (31:00–40:00, ~9 min).
+O QR é o mesmo do slide 2: a página de links do Mateus. PENDENTE antes da palestra: colocar o repositório publicado e o ebook nessa página.
+Desafio para quem levar o repo: trocar o CLAUDE.md por uma skill ou um hook e rodar de novo; ou apontar as tarefas para o próprio projeto.
+Perguntas prováveis (respostas no guia de fala): "funciona com Codex/Gemini CLI?" (sim, troca o runner; fica como desafio extra), "quanto custa rodar?" (usa a cota da assinatura; o relatório mostra o custo estimado), "e se meu projeto não tem teste?" (comece escrevendo o teste da tarefa: o critério de feito é o primeiro entregável).</a:t>
             </a:r>
             <a:endParaRPr lang="en-US" dirty="0"/>
           </a:p>
@@ -1997,9 +2009,8 @@
           <a:p>
             <a:r>
               <a:rPr lang="en-US" dirty="0"/>
-              <a:t>[28:00–28:45] Lição 3 · Custo varia muito entre execuções: algumas execuções custam MUITO mais que a média, por causa dos turnos.
-Slide único, sem cliques. Perguntar: "Quem acha que funciona?" (mãos; até 15 s). Se muita gente acha que sim: "Eu também achava." Se ninguém: "Vocês já apanharam disso, né?"
-Avançar para o slide seguinte com a resposta.</a:t>
+              <a:t>[apêndice, durante as perguntas] Slide de consulta: fica depois do QR e só aparece se alguém pedir as fontes (todas também estão no ebook, com link). Durante as perguntas, preferir o slide do QR.
+SWE-bench aparece aqui como referência do mesmo formato: issues reais de GitHub como tarefa para agentes de código.</a:t>
             </a:r>
             <a:endParaRPr lang="en-US" dirty="0"/>
           </a:p>
@@ -2023,456 +2034,6 @@
             <a:fld id="{F7021451-1387-4CA6-816F-3879F97B5CBC}" type="slidenum">
               <a:rPr lang="en-US"/>
               <a:t>24</a:t>
-            </a:fld>
-            <a:endParaRPr lang="en-US"/>
-          </a:p>
-        </p:txBody>
-      </p:sp>
-    </p:spTree>
-    <p:extLst>
-      <p:ext uri="{BB962C8B-B14F-4D97-AF65-F5344CB8AC3E}">
-        <p14:creationId xmlns:p14="http://schemas.microsoft.com/office/powerpoint/2010/main" val="1024086991"/>
-      </p:ext>
-    </p:extLst>
-  </p:cSld>
-  <p:clrMapOvr>
-    <a:masterClrMapping/>
-  </p:clrMapOvr>
-</p:notes>
-</file>
-
-<file path=ppt/notesSlides/notesSlide25.xml><?xml version="1.0" encoding="utf-8"?>
-<p:notes xmlns:a="http://schemas.openxmlformats.org/drawingml/2006/main" xmlns:r="http://schemas.openxmlformats.org/officeDocument/2006/relationships" xmlns:p="http://schemas.openxmlformats.org/presentationml/2006/main">
-  <p:cSld>
-    <p:spTree>
-      <p:nvGrpSpPr>
-        <p:cNvPr id="1" name=""/>
-        <p:cNvGrpSpPr/>
-        <p:nvPr/>
-      </p:nvGrpSpPr>
-      <p:grpSpPr>
-        <a:xfrm>
-          <a:off x="0" y="0"/>
-          <a:ext cx="0" cy="0"/>
-          <a:chOff x="0" y="0"/>
-          <a:chExt cx="0" cy="0"/>
-        </a:xfrm>
-      </p:grpSpPr>
-      <p:sp>
-        <p:nvSpPr>
-          <p:cNvPr id="2" name="Slide Image Placeholder 1"/>
-          <p:cNvSpPr>
-            <a:spLocks noGrp="1" noRot="1" noChangeAspect="1"/>
-          </p:cNvSpPr>
-          <p:nvPr>
-            <p:ph type="sldImg"/>
-          </p:nvPr>
-        </p:nvSpPr>
-        <p:spPr/>
-      </p:sp>
-      <p:sp>
-        <p:nvSpPr>
-          <p:cNvPr id="3" name="Notes Placeholder 2"/>
-          <p:cNvSpPr>
-            <a:spLocks noGrp="1"/>
-          </p:cNvSpPr>
-          <p:nvPr>
-            <p:ph type="body" idx="1"/>
-          </p:nvPr>
-        </p:nvSpPr>
-        <p:spPr/>
-        <p:txBody>
-          <a:bodyPr/>
-          <a:lstStyle/>
-          <a:p>
-            <a:r>
-              <a:rPr lang="en-US" dirty="0"/>
-              <a:t>[28:45–29:30] Slide único, sem cliques: as duas frases já estão na tela. Primeiro: "pare depois de N chamadas" no prompt não segura: o modelo não conta os próprios turnos. Depois: o teto de orçamento virou hook determinístico.
-Hook = script que o Claude Code roda antes de cada chamada de ferramenta; se ele sair com código 2, a chamada é bloqueada, não importa o que o modelo queira (doc "Hooks reference").
-Não dar número. Se perguntarem "quanto variava?", responder: "a variação era grande o bastante para uma média esconder tudo; por isso olhamos mediana e cauda, e travamos o teto em código".</a:t>
-            </a:r>
-            <a:endParaRPr lang="en-US" dirty="0"/>
-          </a:p>
-        </p:txBody>
-      </p:sp>
-      <p:sp>
-        <p:nvSpPr>
-          <p:cNvPr id="4" name="Slide Number Placeholder 3"/>
-          <p:cNvSpPr>
-            <a:spLocks noGrp="1"/>
-          </p:cNvSpPr>
-          <p:nvPr>
-            <p:ph type="sldNum" sz="quarter" idx="10"/>
-          </p:nvPr>
-        </p:nvSpPr>
-        <p:spPr/>
-        <p:txBody>
-          <a:bodyPr/>
-          <a:lstStyle/>
-          <a:p>
-            <a:fld id="{F7021451-1387-4CA6-816F-3879F97B5CBC}" type="slidenum">
-              <a:rPr lang="en-US"/>
-              <a:t>25</a:t>
-            </a:fld>
-            <a:endParaRPr lang="en-US"/>
-          </a:p>
-        </p:txBody>
-      </p:sp>
-    </p:spTree>
-    <p:extLst>
-      <p:ext uri="{BB962C8B-B14F-4D97-AF65-F5344CB8AC3E}">
-        <p14:creationId xmlns:p14="http://schemas.microsoft.com/office/powerpoint/2010/main" val="1024086991"/>
-      </p:ext>
-    </p:extLst>
-  </p:cSld>
-  <p:clrMapOvr>
-    <a:masterClrMapping/>
-  </p:clrMapOvr>
-</p:notes>
-</file>
-
-<file path=ppt/notesSlides/notesSlide26.xml><?xml version="1.0" encoding="utf-8"?>
-<p:notes xmlns:a="http://schemas.openxmlformats.org/drawingml/2006/main" xmlns:r="http://schemas.openxmlformats.org/officeDocument/2006/relationships" xmlns:p="http://schemas.openxmlformats.org/presentationml/2006/main">
-  <p:cSld>
-    <p:spTree>
-      <p:nvGrpSpPr>
-        <p:cNvPr id="1" name=""/>
-        <p:cNvGrpSpPr/>
-        <p:nvPr/>
-      </p:nvGrpSpPr>
-      <p:grpSpPr>
-        <a:xfrm>
-          <a:off x="0" y="0"/>
-          <a:ext cx="0" cy="0"/>
-          <a:chOff x="0" y="0"/>
-          <a:chExt cx="0" cy="0"/>
-        </a:xfrm>
-      </p:grpSpPr>
-      <p:sp>
-        <p:nvSpPr>
-          <p:cNvPr id="2" name="Slide Image Placeholder 1"/>
-          <p:cNvSpPr>
-            <a:spLocks noGrp="1" noRot="1" noChangeAspect="1"/>
-          </p:cNvSpPr>
-          <p:nvPr>
-            <p:ph type="sldImg"/>
-          </p:nvPr>
-        </p:nvSpPr>
-        <p:spPr/>
-      </p:sp>
-      <p:sp>
-        <p:nvSpPr>
-          <p:cNvPr id="3" name="Notes Placeholder 2"/>
-          <p:cNvSpPr>
-            <a:spLocks noGrp="1"/>
-          </p:cNvSpPr>
-          <p:nvPr>
-            <p:ph type="body" idx="1"/>
-          </p:nvPr>
-        </p:nvSpPr>
-        <p:spPr/>
-        <p:txBody>
-          <a:bodyPr/>
-          <a:lstStyle/>
-          <a:p>
-            <a:r>
-              <a:rPr lang="en-US" dirty="0"/>
-              <a:t>[29:30–30:30] Lição 6 · LLM-as-judge rejeitado ali: juiz não determinístico avaliando agente não determinístico soma variância. Lá, o critério ficou em código e gabarito humano.
-Volta no slide de LLM-as-judge (slide 21). No nosso contexto, o custo de variância não compensou. Ponto de discussão, não regra universal.</a:t>
-            </a:r>
-            <a:endParaRPr lang="en-US" dirty="0"/>
-          </a:p>
-        </p:txBody>
-      </p:sp>
-      <p:sp>
-        <p:nvSpPr>
-          <p:cNvPr id="4" name="Slide Number Placeholder 3"/>
-          <p:cNvSpPr>
-            <a:spLocks noGrp="1"/>
-          </p:cNvSpPr>
-          <p:nvPr>
-            <p:ph type="sldNum" sz="quarter" idx="10"/>
-          </p:nvPr>
-        </p:nvSpPr>
-        <p:spPr/>
-        <p:txBody>
-          <a:bodyPr/>
-          <a:lstStyle/>
-          <a:p>
-            <a:fld id="{F7021451-1387-4CA6-816F-3879F97B5CBC}" type="slidenum">
-              <a:rPr lang="en-US"/>
-              <a:t>26</a:t>
-            </a:fld>
-            <a:endParaRPr lang="en-US"/>
-          </a:p>
-        </p:txBody>
-      </p:sp>
-    </p:spTree>
-    <p:extLst>
-      <p:ext uri="{BB962C8B-B14F-4D97-AF65-F5344CB8AC3E}">
-        <p14:creationId xmlns:p14="http://schemas.microsoft.com/office/powerpoint/2010/main" val="1024086991"/>
-      </p:ext>
-    </p:extLst>
-  </p:cSld>
-  <p:clrMapOvr>
-    <a:masterClrMapping/>
-  </p:clrMapOvr>
-</p:notes>
-</file>
-
-<file path=ppt/notesSlides/notesSlide27.xml><?xml version="1.0" encoding="utf-8"?>
-<p:notes xmlns:a="http://schemas.openxmlformats.org/drawingml/2006/main" xmlns:r="http://schemas.openxmlformats.org/officeDocument/2006/relationships" xmlns:p="http://schemas.openxmlformats.org/presentationml/2006/main">
-  <p:cSld>
-    <p:spTree>
-      <p:nvGrpSpPr>
-        <p:cNvPr id="1" name=""/>
-        <p:cNvGrpSpPr/>
-        <p:nvPr/>
-      </p:nvGrpSpPr>
-      <p:grpSpPr>
-        <a:xfrm>
-          <a:off x="0" y="0"/>
-          <a:ext cx="0" cy="0"/>
-          <a:chOff x="0" y="0"/>
-          <a:chExt cx="0" cy="0"/>
-        </a:xfrm>
-      </p:grpSpPr>
-      <p:sp>
-        <p:nvSpPr>
-          <p:cNvPr id="2" name="Slide Image Placeholder 1"/>
-          <p:cNvSpPr>
-            <a:spLocks noGrp="1" noRot="1" noChangeAspect="1"/>
-          </p:cNvSpPr>
-          <p:nvPr>
-            <p:ph type="sldImg"/>
-          </p:nvPr>
-        </p:nvSpPr>
-        <p:spPr/>
-      </p:sp>
-      <p:sp>
-        <p:nvSpPr>
-          <p:cNvPr id="3" name="Notes Placeholder 2"/>
-          <p:cNvSpPr>
-            <a:spLocks noGrp="1"/>
-          </p:cNvSpPr>
-          <p:nvPr>
-            <p:ph type="body" idx="1"/>
-          </p:nvPr>
-        </p:nvSpPr>
-        <p:spPr/>
-        <p:txBody>
-          <a:bodyPr/>
-          <a:lstStyle/>
-          <a:p>
-            <a:r>
-              <a:rPr lang="en-US" dirty="0"/>
-              <a:t>[30:30–33:00] Um clique por linha.
-Lição 4 · Duas camadas: determinística a cada commit; modelo real contra gabarito curado por humano. O gabarito NASCE VAZIO, para não herdar o viés da resposta do agente: o humano escreve a resposta esperada sem olhar o que o agente respondeu. Se você copia a resposta do agente para o gabarito, você mede o agente contra ele mesmo.
-Lição 5 · Matriz-catraca: rota × desfecho. A lista de células SEM cobertura só pode encolher; um teste quebra se alguém tirar cobertura. Catraca é um mecanismo que só gira para um lado. Aplicado a eval: o conjunto de casos cobertos só cresce.
-Lição 7 · Falha vira caso: "o caso que surpreendeu na terça é um teste na quarta." Aprendizado visto em 2 ou mais casos vira regra; o "2 ou mais casos" evita transformar uma exceção em regra para todo mundo.
-Transição: "Então, como eu uso isso para melhorar o MEU agente?"</a:t>
-            </a:r>
-            <a:endParaRPr lang="en-US" dirty="0"/>
-          </a:p>
-        </p:txBody>
-      </p:sp>
-      <p:sp>
-        <p:nvSpPr>
-          <p:cNvPr id="4" name="Slide Number Placeholder 3"/>
-          <p:cNvSpPr>
-            <a:spLocks noGrp="1"/>
-          </p:cNvSpPr>
-          <p:nvPr>
-            <p:ph type="sldNum" sz="quarter" idx="10"/>
-          </p:nvPr>
-        </p:nvSpPr>
-        <p:spPr/>
-        <p:txBody>
-          <a:bodyPr/>
-          <a:lstStyle/>
-          <a:p>
-            <a:fld id="{F7021451-1387-4CA6-816F-3879F97B5CBC}" type="slidenum">
-              <a:rPr lang="en-US"/>
-              <a:t>27</a:t>
-            </a:fld>
-            <a:endParaRPr lang="en-US"/>
-          </a:p>
-        </p:txBody>
-      </p:sp>
-    </p:spTree>
-    <p:extLst>
-      <p:ext uri="{BB962C8B-B14F-4D97-AF65-F5344CB8AC3E}">
-        <p14:creationId xmlns:p14="http://schemas.microsoft.com/office/powerpoint/2010/main" val="1024086991"/>
-      </p:ext>
-    </p:extLst>
-  </p:cSld>
-  <p:clrMapOvr>
-    <a:masterClrMapping/>
-  </p:clrMapOvr>
-</p:notes>
-</file>
-
-<file path=ppt/notesSlides/notesSlide28.xml><?xml version="1.0" encoding="utf-8"?>
-<p:notes xmlns:a="http://schemas.openxmlformats.org/drawingml/2006/main" xmlns:r="http://schemas.openxmlformats.org/officeDocument/2006/relationships" xmlns:p="http://schemas.openxmlformats.org/presentationml/2006/main">
-  <p:cSld>
-    <p:spTree>
-      <p:nvGrpSpPr>
-        <p:cNvPr id="1" name=""/>
-        <p:cNvGrpSpPr/>
-        <p:nvPr/>
-      </p:nvGrpSpPr>
-      <p:grpSpPr>
-        <a:xfrm>
-          <a:off x="0" y="0"/>
-          <a:ext cx="0" cy="0"/>
-          <a:chOff x="0" y="0"/>
-          <a:chExt cx="0" cy="0"/>
-        </a:xfrm>
-      </p:grpSpPr>
-      <p:sp>
-        <p:nvSpPr>
-          <p:cNvPr id="2" name="Slide Image Placeholder 1"/>
-          <p:cNvSpPr>
-            <a:spLocks noGrp="1" noRot="1" noChangeAspect="1"/>
-          </p:cNvSpPr>
-          <p:nvPr>
-            <p:ph type="sldImg"/>
-          </p:nvPr>
-        </p:nvSpPr>
-        <p:spPr/>
-      </p:sp>
-      <p:sp>
-        <p:nvSpPr>
-          <p:cNvPr id="3" name="Notes Placeholder 2"/>
-          <p:cNvSpPr>
-            <a:spLocks noGrp="1"/>
-          </p:cNvSpPr>
-          <p:nvPr>
-            <p:ph type="body" idx="1"/>
-          </p:nvPr>
-        </p:nvSpPr>
-        <p:spPr/>
-        <p:txBody>
-          <a:bodyPr/>
-          <a:lstStyle/>
-          <a:p>
-            <a:r>
-              <a:rPr lang="en-US" dirty="0"/>
-              <a:t>[33:00]</a:t>
-            </a:r>
-            <a:endParaRPr lang="en-US" dirty="0"/>
-          </a:p>
-        </p:txBody>
-      </p:sp>
-      <p:sp>
-        <p:nvSpPr>
-          <p:cNvPr id="4" name="Slide Number Placeholder 3"/>
-          <p:cNvSpPr>
-            <a:spLocks noGrp="1"/>
-          </p:cNvSpPr>
-          <p:nvPr>
-            <p:ph type="sldNum" sz="quarter" idx="10"/>
-          </p:nvPr>
-        </p:nvSpPr>
-        <p:spPr/>
-        <p:txBody>
-          <a:bodyPr/>
-          <a:lstStyle/>
-          <a:p>
-            <a:fld id="{F7021451-1387-4CA6-816F-3879F97B5CBC}" type="slidenum">
-              <a:rPr lang="en-US"/>
-              <a:t>28</a:t>
-            </a:fld>
-            <a:endParaRPr lang="en-US"/>
-          </a:p>
-        </p:txBody>
-      </p:sp>
-    </p:spTree>
-    <p:extLst>
-      <p:ext uri="{BB962C8B-B14F-4D97-AF65-F5344CB8AC3E}">
-        <p14:creationId xmlns:p14="http://schemas.microsoft.com/office/powerpoint/2010/main" val="1024086991"/>
-      </p:ext>
-    </p:extLst>
-  </p:cSld>
-  <p:clrMapOvr>
-    <a:masterClrMapping/>
-  </p:clrMapOvr>
-</p:notes>
-</file>
-
-<file path=ppt/notesSlides/notesSlide29.xml><?xml version="1.0" encoding="utf-8"?>
-<p:notes xmlns:a="http://schemas.openxmlformats.org/drawingml/2006/main" xmlns:r="http://schemas.openxmlformats.org/officeDocument/2006/relationships" xmlns:p="http://schemas.openxmlformats.org/presentationml/2006/main">
-  <p:cSld>
-    <p:spTree>
-      <p:nvGrpSpPr>
-        <p:cNvPr id="1" name=""/>
-        <p:cNvGrpSpPr/>
-        <p:nvPr/>
-      </p:nvGrpSpPr>
-      <p:grpSpPr>
-        <a:xfrm>
-          <a:off x="0" y="0"/>
-          <a:ext cx="0" cy="0"/>
-          <a:chOff x="0" y="0"/>
-          <a:chExt cx="0" cy="0"/>
-        </a:xfrm>
-      </p:grpSpPr>
-      <p:sp>
-        <p:nvSpPr>
-          <p:cNvPr id="2" name="Slide Image Placeholder 1"/>
-          <p:cNvSpPr>
-            <a:spLocks noGrp="1" noRot="1" noChangeAspect="1"/>
-          </p:cNvSpPr>
-          <p:nvPr>
-            <p:ph type="sldImg"/>
-          </p:nvPr>
-        </p:nvSpPr>
-        <p:spPr/>
-      </p:sp>
-      <p:sp>
-        <p:nvSpPr>
-          <p:cNvPr id="3" name="Notes Placeholder 2"/>
-          <p:cNvSpPr>
-            <a:spLocks noGrp="1"/>
-          </p:cNvSpPr>
-          <p:nvPr>
-            <p:ph type="body" idx="1"/>
-          </p:nvPr>
-        </p:nvSpPr>
-        <p:spPr/>
-        <p:txBody>
-          <a:bodyPr/>
-          <a:lstStyle/>
-          <a:p>
-            <a:r>
-              <a:rPr lang="en-US" dirty="0"/>
-              <a:t>[33:00–35:00] Rode a eval ANTES (linha de base); mude UMA coisa; rode a eval de novo, com repetições; compare com intervalo, não com a média.
-O que conta como "uma coisa": o CLAUDE.md, uma skill nova, um hook, o modelo, o prompt da tarefa. Mudou o modelo E o CLAUDE.md juntos? Você não sabe quem ganhou.
-É o mesmo princípio de teste A/B de produto. O experimento de hoje muda só uma coisa: a existência do CLAUDE.md.
-Dica prática: commite a configuração do agente junto com o resultado da eval. Assim, daqui a um mês você sabe qual versão gerou qual número.</a:t>
-            </a:r>
-            <a:endParaRPr lang="en-US" dirty="0"/>
-          </a:p>
-        </p:txBody>
-      </p:sp>
-      <p:sp>
-        <p:nvSpPr>
-          <p:cNvPr id="4" name="Slide Number Placeholder 3"/>
-          <p:cNvSpPr>
-            <a:spLocks noGrp="1"/>
-          </p:cNvSpPr>
-          <p:nvPr>
-            <p:ph type="sldNum" sz="quarter" idx="10"/>
-          </p:nvPr>
-        </p:nvSpPr>
-        <p:spPr/>
-        <p:txBody>
-          <a:bodyPr/>
-          <a:lstStyle/>
-          <a:p>
-            <a:fld id="{F7021451-1387-4CA6-816F-3879F97B5CBC}" type="slidenum">
-              <a:rPr lang="en-US"/>
-              <a:t>29</a:t>
             </a:fld>
             <a:endParaRPr lang="en-US"/>
           </a:p>
@@ -2581,7 +2142,7 @@
 </p:notes>
 </file>
 
-<file path=ppt/notesSlides/notesSlide30.xml><?xml version="1.0" encoding="utf-8"?>
+<file path=ppt/notesSlides/notesSlide4.xml><?xml version="1.0" encoding="utf-8"?>
 <p:notes xmlns:a="http://schemas.openxmlformats.org/drawingml/2006/main" xmlns:r="http://schemas.openxmlformats.org/officeDocument/2006/relationships" xmlns:p="http://schemas.openxmlformats.org/presentationml/2006/main">
   <p:cSld>
     <p:spTree>
@@ -2627,13 +2188,10 @@
           <a:p>
             <a:r>
               <a:rPr lang="en-US" dirty="0"/>
-              <a:t>[35:00–37:00] CLAUDE.md: entra em TODA sessão; bom para convenções do repo, comando de teste, pastas proibidas; cuidado: é contexto, NÃO obrigação.
-Skill: entra só quando é usada; boa para procedimento longo, material de referência; cuidado: descrição ruim = nunca é chamada.
-Hook: roda antes/depois de cada ferramenta; para regra que PRECISA valer sempre; cuidado: é código, teste como código.
-A própria doc do Claude Code diz que CLAUDE.md é tratado como contexto, não como configuração obrigatória; para bloquear uma ação, use um hook PreToolUse.
-Skill: a doc diz que o corpo da skill só entra no contexto quando ela é usada, então referência longa custa quase nada até ser necessária.
-Clique: regra que não pode falhar não mora no prompt. Mora no hook, no teste ou no CI.
-Cada uma dessas mudanças é uma variante B possível no repo: troque o CLAUDE.md por uma skill ou um hook e rode de novo.</a:t>
+              <a:t>[01:15–02:15] Rodar `pnpm eval` AGORA, ao vivo. Deixar o terminal num monitor ou minimizado; não voltar nele até o minuto 22. No ensaio (sonnet, concorrência 4), as 32 execuções levaram ~3 min 28 s: o run termina muito antes da revelação, e o resultado fica esperando.
+De onde vem o 32: 2 variantes × 8 tarefas × 2 repetições = 32 execuções do Claude Code, rodando enquanto eu falo. Vou mudar UMA coisa no repositório: um `CLAUDE.md` com as convenções do projeto.
+Fala: "Eu escrevi um CLAUDE.md para este projeto. Acho que ele ajuda. Mas 'acho' não é medida. Então o agente vai trabalhar 32 vezes enquanto eu falo, e no minuto 22 a gente vê."
+Plano B se o run falhar (rede, login, cota): no minuto 22 usar `pnpm relatorio:ensaio`, que lê o run gravado no ensaio. Dizer isso em voz alta só se precisar.</a:t>
             </a:r>
             <a:endParaRPr lang="en-US" dirty="0"/>
           </a:p>
@@ -2656,7 +2214,7 @@
           <a:p>
             <a:fld id="{F7021451-1387-4CA6-816F-3879F97B5CBC}" type="slidenum">
               <a:rPr lang="en-US"/>
-              <a:t>30</a:t>
+              <a:t>4</a:t>
             </a:fld>
             <a:endParaRPr lang="en-US"/>
           </a:p>
@@ -2675,7 +2233,7 @@
 </p:notes>
 </file>
 
-<file path=ppt/notesSlides/notesSlide31.xml><?xml version="1.0" encoding="utf-8"?>
+<file path=ppt/notesSlides/notesSlide5.xml><?xml version="1.0" encoding="utf-8"?>
 <p:notes xmlns:a="http://schemas.openxmlformats.org/drawingml/2006/main" xmlns:r="http://schemas.openxmlformats.org/officeDocument/2006/relationships" xmlns:p="http://schemas.openxmlformats.org/presentationml/2006/main">
   <p:cSld>
     <p:spTree>
@@ -2721,8 +2279,9 @@
           <a:p>
             <a:r>
               <a:rPr lang="en-US" dirty="0"/>
-              <a:t>[37:00–38:30] Passo a passo: (1) o agente erra algo no dia a dia; (2) você escreve uma TAREFA com o prompt real e um TESTE ESCONDIDO que prova o certo; confere: falha no app intacto, passa com a solução; (3) entra no conjunto e não sai mais.
-É a lição do KTLO aplicada ao agente de código: o erro de terça vira tarefa na quarta. Catraca: o conjunto de tarefas só cresce.</a:t>
+              <a:t>[02:15–03:00] Slide único, sem cliques: opções e a frase "a resposta sai no minuto 22" já estão na tela. Perguntar e pedir mãos em cada opção: "Quem acha que o B, com CLAUDE.md, ganha?" / "Quem acha que dá empate?" / "Quem acha que o A ganha?". Contar por alto e GUARDAR a proporção (ex.: "uns 70% no B, uns 20% no empate"): ela volta no slide 18. No máximo 20 s.
+Se ninguém aposta no A: "Ninguém no A? Guardem isso." Se muita gente aposta no empate: "Tem gente desconfiada. Bom sinal."
+Fechar apontando a frase na tela: "a resposta sai no minuto 22".</a:t>
             </a:r>
             <a:endParaRPr lang="en-US" dirty="0"/>
           </a:p>
@@ -2745,7 +2304,7 @@
           <a:p>
             <a:fld id="{F7021451-1387-4CA6-816F-3879F97B5CBC}" type="slidenum">
               <a:rPr lang="en-US"/>
-              <a:t>31</a:t>
+              <a:t>5</a:t>
             </a:fld>
             <a:endParaRPr lang="en-US"/>
           </a:p>
@@ -2764,7 +2323,7 @@
 </p:notes>
 </file>
 
-<file path=ppt/notesSlides/notesSlide32.xml><?xml version="1.0" encoding="utf-8"?>
+<file path=ppt/notesSlides/notesSlide6.xml><?xml version="1.0" encoding="utf-8"?>
 <p:notes xmlns:a="http://schemas.openxmlformats.org/drawingml/2006/main" xmlns:r="http://schemas.openxmlformats.org/officeDocument/2006/relationships" xmlns:p="http://schemas.openxmlformats.org/presentationml/2006/main">
   <p:cSld>
     <p:spTree>
@@ -2810,11 +2369,11 @@
           <a:p>
             <a:r>
               <a:rPr lang="en-US" dirty="0"/>
-              <a:t>[38:30–40:00] Três cliques: um por linha e a frase final. O portão roda no CI: se B ficar PIOR que A (intervalos sem sobreposição), sai com código 1. No repo: "inconclusivo" não quebra o build. Só "A melhor" quebra.
-Termos: CI = integração contínua, o pipeline que roda testes a cada push/PR (ex.: GitHub Actions); "quebrar o build" = o pipeline fica vermelho e o merge é bloqueado.
-Por que o portão não olha a taxa crua: com 16 execuções, a taxa oscila de uma rodada para outra só por ruído; um portão "não pode cair" ficaria vermelho sem o agente ter piorado.
-Por que "inconclusivo" não quebra: quebrar o build por falta de dado ensina o time a ignorar o portão. Quebrar só quando há evidência de piora mantém o portão confiável.
-Transição: "Já deu tempo. Vamos ver o que o agente fez." Voltar para o terminal.</a:t>
+              <a:t>[03:00–04:45] Todo mundo já fez: mudou o prompt, o CLAUDE.md ou o modelo; pediu UMA tarefa; deu certo; "melhorou!".
+O que ficou de fora (falar, não está no slide): a tarefa era fácil ou difícil? E se você pedisse de novo? Quanto custou, quantos turnos? Ele mexeu onde não devia? E, a mais esquecida (clique): daria certo ANTES da mudança também?
+Pergunta opcional, se a sala estiver fria: "Quem aqui já trocou de modelo ou de configuração do agente porque 'sentiu' que estava melhor?" (quase todo mundo levanta a mão; o palestrante também).
+Ponto: vibe check não é inútil, é o ponto de partida. O problema é parar nele.
+Transição: "O agente não é determinístico: uma execução é uma amostra, não um resultado. Então quanto diz uma execução? Chutem."</a:t>
             </a:r>
             <a:endParaRPr lang="en-US" dirty="0"/>
           </a:p>
@@ -2837,7 +2396,7 @@
           <a:p>
             <a:fld id="{F7021451-1387-4CA6-816F-3879F97B5CBC}" type="slidenum">
               <a:rPr lang="en-US"/>
-              <a:t>32</a:t>
+              <a:t>6</a:t>
             </a:fld>
             <a:endParaRPr lang="en-US"/>
           </a:p>
@@ -2856,7 +2415,7 @@
 </p:notes>
 </file>
 
-<file path=ppt/notesSlides/notesSlide33.xml><?xml version="1.0" encoding="utf-8"?>
+<file path=ppt/notesSlides/notesSlide7.xml><?xml version="1.0" encoding="utf-8"?>
 <p:notes xmlns:a="http://schemas.openxmlformats.org/drawingml/2006/main" xmlns:r="http://schemas.openxmlformats.org/officeDocument/2006/relationships" xmlns:p="http://schemas.openxmlformats.org/presentationml/2006/main">
   <p:cSld>
     <p:spTree>
@@ -2902,7 +2461,8 @@
           <a:p>
             <a:r>
               <a:rPr lang="en-US" dirty="0"/>
-              <a:t>[40:00–40:30] Callback da aposta (slide 5): "No começo, [a proporção que você guardou, ex.: uns 70%] apostou no B. Vamos ver." Não pedir mãos de novo; só lembrar.</a:t>
+              <a:t>[04:45–05:15] Slide único, sem cliques. Perguntar: "Passou 1 de 1. É 100%. Quem confia?" Esperar as mãos (até 15 s). Se muita gente confia: "Vamos ver o que a conta diz." Se ninguém confia: "Desconfiança saudável. Quanto, então?"
+Avançar para o slide seguinte com a resposta.</a:t>
             </a:r>
             <a:endParaRPr lang="en-US" dirty="0"/>
           </a:p>
@@ -2925,7 +2485,7 @@
           <a:p>
             <a:fld id="{F7021451-1387-4CA6-816F-3879F97B5CBC}" type="slidenum">
               <a:rPr lang="en-US"/>
-              <a:t>33</a:t>
+              <a:t>7</a:t>
             </a:fld>
             <a:endParaRPr lang="en-US"/>
           </a:p>
@@ -2944,7 +2504,7 @@
 </p:notes>
 </file>
 
-<file path=ppt/notesSlides/notesSlide34.xml><?xml version="1.0" encoding="utf-8"?>
+<file path=ppt/notesSlides/notesSlide8.xml><?xml version="1.0" encoding="utf-8"?>
 <p:notes xmlns:a="http://schemas.openxmlformats.org/drawingml/2006/main" xmlns:r="http://schemas.openxmlformats.org/officeDocument/2006/relationships" xmlns:p="http://schemas.openxmlformats.org/presentationml/2006/main">
   <p:cSld>
     <p:spTree>
@@ -2990,17 +2550,9 @@
           <a:p>
             <a:r>
               <a:rPr lang="en-US" dirty="0"/>
-              <a:t>[40:30–43:00] Se o run ainda não terminou: mostrar o progresso do promptfoo e usar o ensaio. Se terminou: `pnpm relatorio` e abrir o HTML. Plano B: `pnpm relatorio:ensaio` (run gravado no ensaio).
-Roteiro de leitura (nesta ordem; a ordem importa):
-1. n real por variante e quantos erro_agente (contados à parte).
-2. Taxa de sucesso de A e de B, com a barra do intervalo.
-3. Veredito em português.
-4. pass^k: quantas tarefas passaram nas duas repetições.
-5. Fora do escopo.
-6. Por tarefa: o ganho (se houver) está nas tarefas de convenção (03–07) ou nas de controle?
-Comparar com a aposta da plateia (slide 5) depois de ler o veredito.
-Não comemorar nem lamentar ainda: os próximos slides explicam como ler.
-Exemplo de resultado (o ensaio gravado, não o de hoje): A 12/16 (75%, 51% a 90%), B 16/16 (100%, 81% a 100%), pass^2 6/8 × 8/8, 3 fora do escopo (mexeram em `src/legado/` ou fora dos permitidos) e 1 teste escondido falhando, todos de A, 0 erro_agente → inconclusivo.</a:t>
+              <a:t>[05:15–07:00] Slide único, sem cliques: as duas barras já estão na tela. A barra de 1 de 1 vai de 21% a 100%: "Com uma execução, a taxa real pode ser 21%." A de 16 de 16 vai de 81% a 100%: "Mesmo o '100%' de 16 execuções não prova 100%."
+Os números são conta, não opinião: intervalo de Wilson 95% para 1/1 e 16/16 (o mesmo cálculo que o relatório usa; dá para conferir em `src/metricas.ts`). A gente volta nele no minuto 25 (slide 20).
+Transição: "Se uma execução não basta, o que eu meço, e quantas vezes?"</a:t>
             </a:r>
             <a:endParaRPr lang="en-US" dirty="0"/>
           </a:p>
@@ -3023,7 +2575,7 @@
           <a:p>
             <a:fld id="{F7021451-1387-4CA6-816F-3879F97B5CBC}" type="slidenum">
               <a:rPr lang="en-US"/>
-              <a:t>34</a:t>
+              <a:t>8</a:t>
             </a:fld>
             <a:endParaRPr lang="en-US"/>
           </a:p>
@@ -3042,1093 +2594,6 @@
 </p:notes>
 </file>
 
-<file path=ppt/notesSlides/notesSlide35.xml><?xml version="1.0" encoding="utf-8"?>
-<p:notes xmlns:a="http://schemas.openxmlformats.org/drawingml/2006/main" xmlns:r="http://schemas.openxmlformats.org/officeDocument/2006/relationships" xmlns:p="http://schemas.openxmlformats.org/presentationml/2006/main">
-  <p:cSld>
-    <p:spTree>
-      <p:nvGrpSpPr>
-        <p:cNvPr id="1" name=""/>
-        <p:cNvGrpSpPr/>
-        <p:nvPr/>
-      </p:nvGrpSpPr>
-      <p:grpSpPr>
-        <a:xfrm>
-          <a:off x="0" y="0"/>
-          <a:ext cx="0" cy="0"/>
-          <a:chOff x="0" y="0"/>
-          <a:chExt cx="0" cy="0"/>
-        </a:xfrm>
-      </p:grpSpPr>
-      <p:sp>
-        <p:nvSpPr>
-          <p:cNvPr id="2" name="Slide Image Placeholder 1"/>
-          <p:cNvSpPr>
-            <a:spLocks noGrp="1" noRot="1" noChangeAspect="1"/>
-          </p:cNvSpPr>
-          <p:nvPr>
-            <p:ph type="sldImg"/>
-          </p:nvPr>
-        </p:nvSpPr>
-        <p:spPr/>
-      </p:sp>
-      <p:sp>
-        <p:nvSpPr>
-          <p:cNvPr id="3" name="Notes Placeholder 2"/>
-          <p:cNvSpPr>
-            <a:spLocks noGrp="1"/>
-          </p:cNvSpPr>
-          <p:nvPr>
-            <p:ph type="body" idx="1"/>
-          </p:nvPr>
-        </p:nvSpPr>
-        <p:spPr/>
-        <p:txBody>
-          <a:bodyPr/>
-          <a:lstStyle/>
-          <a:p>
-            <a:r>
-              <a:rPr lang="en-US" dirty="0"/>
-              <a:t>[43:00–43:45] Slide único, sem cliques. EXEMPLO INVENTADO, não é o run de hoje. Perguntar: "A passou 6 de 16, B passou 12 de 16. B é o dobro. Quem acha que B ganhou?" (mãos; até 15 s). Se a maioria disse "ganhou": "É a resposta natural. E é exatamente o 'parece que melhorou'."
-Avançar para o slide seguinte com a resposta.</a:t>
-            </a:r>
-            <a:endParaRPr lang="en-US" dirty="0"/>
-          </a:p>
-        </p:txBody>
-      </p:sp>
-      <p:sp>
-        <p:nvSpPr>
-          <p:cNvPr id="4" name="Slide Number Placeholder 3"/>
-          <p:cNvSpPr>
-            <a:spLocks noGrp="1"/>
-          </p:cNvSpPr>
-          <p:nvPr>
-            <p:ph type="sldNum" sz="quarter" idx="10"/>
-          </p:nvPr>
-        </p:nvSpPr>
-        <p:spPr/>
-        <p:txBody>
-          <a:bodyPr/>
-          <a:lstStyle/>
-          <a:p>
-            <a:fld id="{F7021451-1387-4CA6-816F-3879F97B5CBC}" type="slidenum">
-              <a:rPr lang="en-US"/>
-              <a:t>35</a:t>
-            </a:fld>
-            <a:endParaRPr lang="en-US"/>
-          </a:p>
-        </p:txBody>
-      </p:sp>
-    </p:spTree>
-    <p:extLst>
-      <p:ext uri="{BB962C8B-B14F-4D97-AF65-F5344CB8AC3E}">
-        <p14:creationId xmlns:p14="http://schemas.microsoft.com/office/powerpoint/2010/main" val="1024086991"/>
-      </p:ext>
-    </p:extLst>
-  </p:cSld>
-  <p:clrMapOvr>
-    <a:masterClrMapping/>
-  </p:clrMapOvr>
-</p:notes>
-</file>
-
-<file path=ppt/notesSlides/notesSlide36.xml><?xml version="1.0" encoding="utf-8"?>
-<p:notes xmlns:a="http://schemas.openxmlformats.org/drawingml/2006/main" xmlns:r="http://schemas.openxmlformats.org/officeDocument/2006/relationships" xmlns:p="http://schemas.openxmlformats.org/presentationml/2006/main">
-  <p:cSld>
-    <p:spTree>
-      <p:nvGrpSpPr>
-        <p:cNvPr id="1" name=""/>
-        <p:cNvGrpSpPr/>
-        <p:nvPr/>
-      </p:nvGrpSpPr>
-      <p:grpSpPr>
-        <a:xfrm>
-          <a:off x="0" y="0"/>
-          <a:ext cx="0" cy="0"/>
-          <a:chOff x="0" y="0"/>
-          <a:chExt cx="0" cy="0"/>
-        </a:xfrm>
-      </p:grpSpPr>
-      <p:sp>
-        <p:nvSpPr>
-          <p:cNvPr id="2" name="Slide Image Placeholder 1"/>
-          <p:cNvSpPr>
-            <a:spLocks noGrp="1" noRot="1" noChangeAspect="1"/>
-          </p:cNvSpPr>
-          <p:nvPr>
-            <p:ph type="sldImg"/>
-          </p:nvPr>
-        </p:nvSpPr>
-        <p:spPr/>
-      </p:sp>
-      <p:sp>
-        <p:nvSpPr>
-          <p:cNvPr id="3" name="Notes Placeholder 2"/>
-          <p:cNvSpPr>
-            <a:spLocks noGrp="1"/>
-          </p:cNvSpPr>
-          <p:nvPr>
-            <p:ph type="body" idx="1"/>
-          </p:nvPr>
-        </p:nvSpPr>
-        <p:spPr/>
-        <p:txBody>
-          <a:bodyPr/>
-          <a:lstStyle/>
-          <a:p>
-            <a:r>
-              <a:rPr lang="en-US" dirty="0"/>
-              <a:t>[43:45–45:00] Slide único, sem cliques: barras e veredito já estão na tela. A: 37,5%, intervalo 18% a 61%. B: 75%, intervalo 51% a 90%. As barras se sobrepõem (51% a 61%): inconclusivo.
-O intervalo é a faixa de taxas "verdadeiras" compatíveis com o que vimos, com 95% de confiança. O ponto preto é a taxa observada.
-Wilson em vez da conta "p ± 1,96·√(p(1−p)/n)": com n pequeno ou taxa perto de 0% ou 100%, a conta simples dá intervalo que sai de [0, 1] ou tem largura zero (16/16 daria "100% ± 0"). Wilson não tem esse problema.
-Regra do repo: se o limite inferior de B passa do limite superior de A, "B melhor"; o contrário, "A melhor"; senão, "inconclusivo". Inconclusivo não é empate: é "não tenho dado para dizer".
-Não se sobrepor é um critério conservador de propósito (um teste z de duas proporções chamaria 6/16 × 12/16 de significativo, p≈0,03); o repo prefere não declarar vencedor cedo.</a:t>
-            </a:r>
-            <a:endParaRPr lang="en-US" dirty="0"/>
-          </a:p>
-        </p:txBody>
-      </p:sp>
-      <p:sp>
-        <p:nvSpPr>
-          <p:cNvPr id="4" name="Slide Number Placeholder 3"/>
-          <p:cNvSpPr>
-            <a:spLocks noGrp="1"/>
-          </p:cNvSpPr>
-          <p:nvPr>
-            <p:ph type="sldNum" sz="quarter" idx="10"/>
-          </p:nvPr>
-        </p:nvSpPr>
-        <p:spPr/>
-        <p:txBody>
-          <a:bodyPr/>
-          <a:lstStyle/>
-          <a:p>
-            <a:fld id="{F7021451-1387-4CA6-816F-3879F97B5CBC}" type="slidenum">
-              <a:rPr lang="en-US"/>
-              <a:t>36</a:t>
-            </a:fld>
-            <a:endParaRPr lang="en-US"/>
-          </a:p>
-        </p:txBody>
-      </p:sp>
-    </p:spTree>
-    <p:extLst>
-      <p:ext uri="{BB962C8B-B14F-4D97-AF65-F5344CB8AC3E}">
-        <p14:creationId xmlns:p14="http://schemas.microsoft.com/office/powerpoint/2010/main" val="1024086991"/>
-      </p:ext>
-    </p:extLst>
-  </p:cSld>
-  <p:clrMapOvr>
-    <a:masterClrMapping/>
-  </p:clrMapOvr>
-</p:notes>
-</file>
-
-<file path=ppt/notesSlides/notesSlide37.xml><?xml version="1.0" encoding="utf-8"?>
-<p:notes xmlns:a="http://schemas.openxmlformats.org/drawingml/2006/main" xmlns:r="http://schemas.openxmlformats.org/officeDocument/2006/relationships" xmlns:p="http://schemas.openxmlformats.org/presentationml/2006/main">
-  <p:cSld>
-    <p:spTree>
-      <p:nvGrpSpPr>
-        <p:cNvPr id="1" name=""/>
-        <p:cNvGrpSpPr/>
-        <p:nvPr/>
-      </p:nvGrpSpPr>
-      <p:grpSpPr>
-        <a:xfrm>
-          <a:off x="0" y="0"/>
-          <a:ext cx="0" cy="0"/>
-          <a:chOff x="0" y="0"/>
-          <a:chExt cx="0" cy="0"/>
-        </a:xfrm>
-      </p:grpSpPr>
-      <p:sp>
-        <p:nvSpPr>
-          <p:cNvPr id="2" name="Slide Image Placeholder 1"/>
-          <p:cNvSpPr>
-            <a:spLocks noGrp="1" noRot="1" noChangeAspect="1"/>
-          </p:cNvSpPr>
-          <p:nvPr>
-            <p:ph type="sldImg"/>
-          </p:nvPr>
-        </p:nvSpPr>
-        <p:spPr/>
-      </p:sp>
-      <p:sp>
-        <p:nvSpPr>
-          <p:cNvPr id="3" name="Notes Placeholder 2"/>
-          <p:cNvSpPr>
-            <a:spLocks noGrp="1"/>
-          </p:cNvSpPr>
-          <p:nvPr>
-            <p:ph type="body" idx="1"/>
-          </p:nvPr>
-        </p:nvSpPr>
-        <p:spPr/>
-        <p:txBody>
-          <a:bodyPr/>
-          <a:lstStyle/>
-          <a:p>
-            <a:r>
-              <a:rPr lang="en-US" dirty="0"/>
-              <a:t>[45:00–45:30] Slide único, sem cliques: as quatro opções já estão na tela. Perguntar e pedir mãos em cada uma ("quem diz 5? 16? 40? 200?"); até 20 s no total.
-Avançar para o slide seguinte com a resposta.</a:t>
-            </a:r>
-            <a:endParaRPr lang="en-US" dirty="0"/>
-          </a:p>
-        </p:txBody>
-      </p:sp>
-      <p:sp>
-        <p:nvSpPr>
-          <p:cNvPr id="4" name="Slide Number Placeholder 3"/>
-          <p:cNvSpPr>
-            <a:spLocks noGrp="1"/>
-          </p:cNvSpPr>
-          <p:nvPr>
-            <p:ph type="sldNum" sz="quarter" idx="10"/>
-          </p:nvPr>
-        </p:nvSpPr>
-        <p:spPr/>
-        <p:txBody>
-          <a:bodyPr/>
-          <a:lstStyle/>
-          <a:p>
-            <a:fld id="{F7021451-1387-4CA6-816F-3879F97B5CBC}" type="slidenum">
-              <a:rPr lang="en-US"/>
-              <a:t>37</a:t>
-            </a:fld>
-            <a:endParaRPr lang="en-US"/>
-          </a:p>
-        </p:txBody>
-      </p:sp>
-    </p:spTree>
-    <p:extLst>
-      <p:ext uri="{BB962C8B-B14F-4D97-AF65-F5344CB8AC3E}">
-        <p14:creationId xmlns:p14="http://schemas.microsoft.com/office/powerpoint/2010/main" val="1024086991"/>
-      </p:ext>
-    </p:extLst>
-  </p:cSld>
-  <p:clrMapOvr>
-    <a:masterClrMapping/>
-  </p:clrMapOvr>
-</p:notes>
-</file>
-
-<file path=ppt/notesSlides/notesSlide38.xml><?xml version="1.0" encoding="utf-8"?>
-<p:notes xmlns:a="http://schemas.openxmlformats.org/drawingml/2006/main" xmlns:r="http://schemas.openxmlformats.org/officeDocument/2006/relationships" xmlns:p="http://schemas.openxmlformats.org/presentationml/2006/main">
-  <p:cSld>
-    <p:spTree>
-      <p:nvGrpSpPr>
-        <p:cNvPr id="1" name=""/>
-        <p:cNvGrpSpPr/>
-        <p:nvPr/>
-      </p:nvGrpSpPr>
-      <p:grpSpPr>
-        <a:xfrm>
-          <a:off x="0" y="0"/>
-          <a:ext cx="0" cy="0"/>
-          <a:chOff x="0" y="0"/>
-          <a:chExt cx="0" cy="0"/>
-        </a:xfrm>
-      </p:grpSpPr>
-      <p:sp>
-        <p:nvSpPr>
-          <p:cNvPr id="2" name="Slide Image Placeholder 1"/>
-          <p:cNvSpPr>
-            <a:spLocks noGrp="1" noRot="1" noChangeAspect="1"/>
-          </p:cNvSpPr>
-          <p:nvPr>
-            <p:ph type="sldImg"/>
-          </p:nvPr>
-        </p:nvSpPr>
-        <p:spPr/>
-      </p:sp>
-      <p:sp>
-        <p:nvSpPr>
-          <p:cNvPr id="3" name="Notes Placeholder 2"/>
-          <p:cNvSpPr>
-            <a:spLocks noGrp="1"/>
-          </p:cNvSpPr>
-          <p:nvPr>
-            <p:ph type="body" idx="1"/>
-          </p:nvPr>
-        </p:nvSpPr>
-        <p:spPr/>
-        <p:txBody>
-          <a:bodyPr/>
-          <a:lstStyle/>
-          <a:p>
-            <a:r>
-              <a:rPr lang="en-US" dirty="0"/>
-              <a:t>[45:30–46:00] Slide único, sem cliques. Resposta (do ENSAIO, não do run de hoje): com as taxas do ensaio mantidas (A 12/16 × B 16/16), 27 execuções por variante até os intervalos de Wilson pararem de se sobrepor (critério do veredito); o piso pelo teste z é 24. Dizer "do ensaio" em voz alta.
-Se o relatório de hoje mostrou outro número em "execuções necessárias por variante (critério do veredito)" (campo execucoesNecessariasPorVariante), dizer: "no de hoje, deu [N]". Se as duas taxas forem iguais, o relatório diz "não calculável".
-Quem chutou 16 chegou perto: "é o que a gente rodou hoje, e não bastou." Quem chutou 40: "um pouco a mais do que precisava."</a:t>
-            </a:r>
-            <a:endParaRPr lang="en-US" dirty="0"/>
-          </a:p>
-        </p:txBody>
-      </p:sp>
-      <p:sp>
-        <p:nvSpPr>
-          <p:cNvPr id="4" name="Slide Number Placeholder 3"/>
-          <p:cNvSpPr>
-            <a:spLocks noGrp="1"/>
-          </p:cNvSpPr>
-          <p:nvPr>
-            <p:ph type="sldNum" sz="quarter" idx="10"/>
-          </p:nvPr>
-        </p:nvSpPr>
-        <p:spPr/>
-        <p:txBody>
-          <a:bodyPr/>
-          <a:lstStyle/>
-          <a:p>
-            <a:fld id="{F7021451-1387-4CA6-816F-3879F97B5CBC}" type="slidenum">
-              <a:rPr lang="en-US"/>
-              <a:t>38</a:t>
-            </a:fld>
-            <a:endParaRPr lang="en-US"/>
-          </a:p>
-        </p:txBody>
-      </p:sp>
-    </p:spTree>
-    <p:extLst>
-      <p:ext uri="{BB962C8B-B14F-4D97-AF65-F5344CB8AC3E}">
-        <p14:creationId xmlns:p14="http://schemas.microsoft.com/office/powerpoint/2010/main" val="1024086991"/>
-      </p:ext>
-    </p:extLst>
-  </p:cSld>
-  <p:clrMapOvr>
-    <a:masterClrMapping/>
-  </p:clrMapOvr>
-</p:notes>
-</file>
-
-<file path=ppt/notesSlides/notesSlide39.xml><?xml version="1.0" encoding="utf-8"?>
-<p:notes xmlns:a="http://schemas.openxmlformats.org/drawingml/2006/main" xmlns:r="http://schemas.openxmlformats.org/officeDocument/2006/relationships" xmlns:p="http://schemas.openxmlformats.org/presentationml/2006/main">
-  <p:cSld>
-    <p:spTree>
-      <p:nvGrpSpPr>
-        <p:cNvPr id="1" name=""/>
-        <p:cNvGrpSpPr/>
-        <p:nvPr/>
-      </p:nvGrpSpPr>
-      <p:grpSpPr>
-        <a:xfrm>
-          <a:off x="0" y="0"/>
-          <a:ext cx="0" cy="0"/>
-          <a:chOff x="0" y="0"/>
-          <a:chExt cx="0" cy="0"/>
-        </a:xfrm>
-      </p:grpSpPr>
-      <p:sp>
-        <p:nvSpPr>
-          <p:cNvPr id="2" name="Slide Image Placeholder 1"/>
-          <p:cNvSpPr>
-            <a:spLocks noGrp="1" noRot="1" noChangeAspect="1"/>
-          </p:cNvSpPr>
-          <p:nvPr>
-            <p:ph type="sldImg"/>
-          </p:nvPr>
-        </p:nvSpPr>
-        <p:spPr/>
-      </p:sp>
-      <p:sp>
-        <p:nvSpPr>
-          <p:cNvPr id="3" name="Notes Placeholder 2"/>
-          <p:cNvSpPr>
-            <a:spLocks noGrp="1"/>
-          </p:cNvSpPr>
-          <p:nvPr>
-            <p:ph type="body" idx="1"/>
-          </p:nvPr>
-        </p:nvSpPr>
-        <p:spPr/>
-        <p:txBody>
-          <a:bodyPr/>
-          <a:lstStyle/>
-          <a:p>
-            <a:r>
-              <a:rPr lang="en-US" dirty="0"/>
-              <a:t>[46:00–47:00] Quantas execuções por variante até as barras pararem de se sobrepor, mantidas as taxas observadas. Entre parênteses, o piso pelo teste z (95% de confiança, 80% de poder). No relatório: "execuções necessárias por variante (critério do veredito)". É estimativa, não garantia.
-Esta é a lição da palestra: 16 execuções por variante quase nunca bastam para uma diferença moderada. O n cresce com 1/(diferença)²: diferença pequena = muitas execuções.
-O número grande é o critério do veredito: com as taxas mantidas, a partir de quantas execuções por variante os intervalos de Wilson deixam de se sobrepor. O relatório testa n = 1, 2, 3… até achar. O número entre parênteses é o piso pelo teste z de duas proporções; com ele o relatório ainda pode sair inconclusivo.
-Fórmula do piso (se perguntarem): n ≈ (1,96 + 0,84)² · [pA(1−pA) + pB(1−pB)] / (pA − pB)². 1,96 vem dos 95% de confiança; 0,84 vem dos 80% de poder.
-Poder = a chance de o experimento detectar a diferença se ela existir de verdade. 80% de poder: se o CLAUDE.md ajuda mesmo, em 8 de cada 10 experimentos desse tamanho a gente veria.
-Essa é a fórmula clássica de tamanho de amostra para comparar duas proporções. O critério do veredito (intervalos sem sobreposição) é mais exigente que ela, por isso o relatório mostra as duas e manda pela de Wilson.
-Qualquer que seja o resultado: B ganhou → o efeito está nas tarefas de convenção? Se estiver também nas de controle, desconfie. Inconclusivo → não é empate; o relatório diz quantas execuções faltam. A ganhou → o CLAUDE.md atrapalhou; abra as execuções e veja onde; o portão sai com código 1.
-Fala de fechamento, qualquer desfecho: "Eu não sei ainda se o meu CLAUDE.md presta. Mas agora eu sei quanto eu preciso rodar para saber. Isso é medir."</a:t>
-            </a:r>
-            <a:endParaRPr lang="en-US" dirty="0"/>
-          </a:p>
-        </p:txBody>
-      </p:sp>
-      <p:sp>
-        <p:nvSpPr>
-          <p:cNvPr id="4" name="Slide Number Placeholder 3"/>
-          <p:cNvSpPr>
-            <a:spLocks noGrp="1"/>
-          </p:cNvSpPr>
-          <p:nvPr>
-            <p:ph type="sldNum" sz="quarter" idx="10"/>
-          </p:nvPr>
-        </p:nvSpPr>
-        <p:spPr/>
-        <p:txBody>
-          <a:bodyPr/>
-          <a:lstStyle/>
-          <a:p>
-            <a:fld id="{F7021451-1387-4CA6-816F-3879F97B5CBC}" type="slidenum">
-              <a:rPr lang="en-US"/>
-              <a:t>39</a:t>
-            </a:fld>
-            <a:endParaRPr lang="en-US"/>
-          </a:p>
-        </p:txBody>
-      </p:sp>
-    </p:spTree>
-    <p:extLst>
-      <p:ext uri="{BB962C8B-B14F-4D97-AF65-F5344CB8AC3E}">
-        <p14:creationId xmlns:p14="http://schemas.microsoft.com/office/powerpoint/2010/main" val="1024086991"/>
-      </p:ext>
-    </p:extLst>
-  </p:cSld>
-  <p:clrMapOvr>
-    <a:masterClrMapping/>
-  </p:clrMapOvr>
-</p:notes>
-</file>
-
-<file path=ppt/notesSlides/notesSlide4.xml><?xml version="1.0" encoding="utf-8"?>
-<p:notes xmlns:a="http://schemas.openxmlformats.org/drawingml/2006/main" xmlns:r="http://schemas.openxmlformats.org/officeDocument/2006/relationships" xmlns:p="http://schemas.openxmlformats.org/presentationml/2006/main">
-  <p:cSld>
-    <p:spTree>
-      <p:nvGrpSpPr>
-        <p:cNvPr id="1" name=""/>
-        <p:cNvGrpSpPr/>
-        <p:nvPr/>
-      </p:nvGrpSpPr>
-      <p:grpSpPr>
-        <a:xfrm>
-          <a:off x="0" y="0"/>
-          <a:ext cx="0" cy="0"/>
-          <a:chOff x="0" y="0"/>
-          <a:chExt cx="0" cy="0"/>
-        </a:xfrm>
-      </p:grpSpPr>
-      <p:sp>
-        <p:nvSpPr>
-          <p:cNvPr id="2" name="Slide Image Placeholder 1"/>
-          <p:cNvSpPr>
-            <a:spLocks noGrp="1" noRot="1" noChangeAspect="1"/>
-          </p:cNvSpPr>
-          <p:nvPr>
-            <p:ph type="sldImg"/>
-          </p:nvPr>
-        </p:nvSpPr>
-        <p:spPr/>
-      </p:sp>
-      <p:sp>
-        <p:nvSpPr>
-          <p:cNvPr id="3" name="Notes Placeholder 2"/>
-          <p:cNvSpPr>
-            <a:spLocks noGrp="1"/>
-          </p:cNvSpPr>
-          <p:nvPr>
-            <p:ph type="body" idx="1"/>
-          </p:nvPr>
-        </p:nvSpPr>
-        <p:spPr/>
-        <p:txBody>
-          <a:bodyPr/>
-          <a:lstStyle/>
-          <a:p>
-            <a:r>
-              <a:rPr lang="en-US" dirty="0"/>
-              <a:t>[01:15–02:15] Rodar `pnpm eval` AGORA, ao vivo. Deixar o terminal num monitor ou minimizado; não voltar nele até o minuto 40. No ensaio (sonnet, concorrência 4), as 32 execuções levaram ~3 min 28 s: o run termina muito antes da revelação, e o resultado fica esperando.
-De onde vem o 32: 2 variantes × 8 tarefas × 2 repetições = 32 execuções do Claude Code, rodando enquanto eu falo. Vou mudar UMA coisa no repositório: um `CLAUDE.md` com as convenções do projeto.
-Fala: "Eu escrevi um CLAUDE.md para este projeto. Acho que ele ajuda. Mas 'acho' não é medida. Então o agente vai trabalhar 32 vezes enquanto eu falo, e no minuto 40 a gente vê."
-Plano B se o run falhar (rede, login, cota): no minuto 40 usar `pnpm relatorio:ensaio`, que lê o run gravado no ensaio. Dizer isso em voz alta só se precisar.</a:t>
-            </a:r>
-            <a:endParaRPr lang="en-US" dirty="0"/>
-          </a:p>
-        </p:txBody>
-      </p:sp>
-      <p:sp>
-        <p:nvSpPr>
-          <p:cNvPr id="4" name="Slide Number Placeholder 3"/>
-          <p:cNvSpPr>
-            <a:spLocks noGrp="1"/>
-          </p:cNvSpPr>
-          <p:nvPr>
-            <p:ph type="sldNum" sz="quarter" idx="10"/>
-          </p:nvPr>
-        </p:nvSpPr>
-        <p:spPr/>
-        <p:txBody>
-          <a:bodyPr/>
-          <a:lstStyle/>
-          <a:p>
-            <a:fld id="{F7021451-1387-4CA6-816F-3879F97B5CBC}" type="slidenum">
-              <a:rPr lang="en-US"/>
-              <a:t>4</a:t>
-            </a:fld>
-            <a:endParaRPr lang="en-US"/>
-          </a:p>
-        </p:txBody>
-      </p:sp>
-    </p:spTree>
-    <p:extLst>
-      <p:ext uri="{BB962C8B-B14F-4D97-AF65-F5344CB8AC3E}">
-        <p14:creationId xmlns:p14="http://schemas.microsoft.com/office/powerpoint/2010/main" val="1024086991"/>
-      </p:ext>
-    </p:extLst>
-  </p:cSld>
-  <p:clrMapOvr>
-    <a:masterClrMapping/>
-  </p:clrMapOvr>
-</p:notes>
-</file>
-
-<file path=ppt/notesSlides/notesSlide40.xml><?xml version="1.0" encoding="utf-8"?>
-<p:notes xmlns:a="http://schemas.openxmlformats.org/drawingml/2006/main" xmlns:r="http://schemas.openxmlformats.org/officeDocument/2006/relationships" xmlns:p="http://schemas.openxmlformats.org/presentationml/2006/main">
-  <p:cSld>
-    <p:spTree>
-      <p:nvGrpSpPr>
-        <p:cNvPr id="1" name=""/>
-        <p:cNvGrpSpPr/>
-        <p:nvPr/>
-      </p:nvGrpSpPr>
-      <p:grpSpPr>
-        <a:xfrm>
-          <a:off x="0" y="0"/>
-          <a:ext cx="0" cy="0"/>
-          <a:chOff x="0" y="0"/>
-          <a:chExt cx="0" cy="0"/>
-        </a:xfrm>
-      </p:grpSpPr>
-      <p:sp>
-        <p:nvSpPr>
-          <p:cNvPr id="2" name="Slide Image Placeholder 1"/>
-          <p:cNvSpPr>
-            <a:spLocks noGrp="1" noRot="1" noChangeAspect="1"/>
-          </p:cNvSpPr>
-          <p:nvPr>
-            <p:ph type="sldImg"/>
-          </p:nvPr>
-        </p:nvSpPr>
-        <p:spPr/>
-      </p:sp>
-      <p:sp>
-        <p:nvSpPr>
-          <p:cNvPr id="3" name="Notes Placeholder 2"/>
-          <p:cNvSpPr>
-            <a:spLocks noGrp="1"/>
-          </p:cNvSpPr>
-          <p:nvPr>
-            <p:ph type="body" idx="1"/>
-          </p:nvPr>
-        </p:nvSpPr>
-        <p:spPr/>
-        <p:txBody>
-          <a:bodyPr/>
-          <a:lstStyle/>
-          <a:p>
-            <a:r>
-              <a:rPr lang="en-US" dirty="0"/>
-              <a:t>[47:00–50:00] Os cinco hábitos (três no slide, dois na fala): 1. defina o DESFECHO antes do número; 2. tarefas reais com TESTE ESCONDIDO e escopo; 3. REPITA: pass^k e intervalo, não uma execução; 4. UMA MUDANÇA por vez; 5. toda falha vira TAREFA NOVA.
-O repo roda o experimento de hoje com o login do Claude Code. O ebook em PDF está dentro dele.
-Deixar este slide parado enquanto as pessoas fotografam o QR, e voltar a ele durante as perguntas.
-O QR é o mesmo do slide 2: a página de links do Mateus. PENDENTE antes da palestra: colocar o repositório publicado e o ebook nessa página.
-Desafio para quem levar o repo: trocar o CLAUDE.md por uma skill ou um hook e rodar de novo; ou apontar as tarefas para o próprio projeto.
-Perguntas prováveis (respostas no guia de fala): "funciona com Codex/Gemini CLI?" (sim, troca o runner; fica como desafio extra), "quanto custa rodar?" (usa a cota da assinatura; o relatório mostra o custo estimado), "e se meu projeto não tem teste?" (comece escrevendo o teste da tarefa: o critério de feito é o primeiro entregável).</a:t>
-            </a:r>
-            <a:endParaRPr lang="en-US" dirty="0"/>
-          </a:p>
-        </p:txBody>
-      </p:sp>
-      <p:sp>
-        <p:nvSpPr>
-          <p:cNvPr id="4" name="Slide Number Placeholder 3"/>
-          <p:cNvSpPr>
-            <a:spLocks noGrp="1"/>
-          </p:cNvSpPr>
-          <p:nvPr>
-            <p:ph type="sldNum" sz="quarter" idx="10"/>
-          </p:nvPr>
-        </p:nvSpPr>
-        <p:spPr/>
-        <p:txBody>
-          <a:bodyPr/>
-          <a:lstStyle/>
-          <a:p>
-            <a:fld id="{F7021451-1387-4CA6-816F-3879F97B5CBC}" type="slidenum">
-              <a:rPr lang="en-US"/>
-              <a:t>40</a:t>
-            </a:fld>
-            <a:endParaRPr lang="en-US"/>
-          </a:p>
-        </p:txBody>
-      </p:sp>
-    </p:spTree>
-    <p:extLst>
-      <p:ext uri="{BB962C8B-B14F-4D97-AF65-F5344CB8AC3E}">
-        <p14:creationId xmlns:p14="http://schemas.microsoft.com/office/powerpoint/2010/main" val="1024086991"/>
-      </p:ext>
-    </p:extLst>
-  </p:cSld>
-  <p:clrMapOvr>
-    <a:masterClrMapping/>
-  </p:clrMapOvr>
-</p:notes>
-</file>
-
-<file path=ppt/notesSlides/notesSlide41.xml><?xml version="1.0" encoding="utf-8"?>
-<p:notes xmlns:a="http://schemas.openxmlformats.org/drawingml/2006/main" xmlns:r="http://schemas.openxmlformats.org/officeDocument/2006/relationships" xmlns:p="http://schemas.openxmlformats.org/presentationml/2006/main">
-  <p:cSld>
-    <p:spTree>
-      <p:nvGrpSpPr>
-        <p:cNvPr id="1" name=""/>
-        <p:cNvGrpSpPr/>
-        <p:nvPr/>
-      </p:nvGrpSpPr>
-      <p:grpSpPr>
-        <a:xfrm>
-          <a:off x="0" y="0"/>
-          <a:ext cx="0" cy="0"/>
-          <a:chOff x="0" y="0"/>
-          <a:chExt cx="0" cy="0"/>
-        </a:xfrm>
-      </p:grpSpPr>
-      <p:sp>
-        <p:nvSpPr>
-          <p:cNvPr id="2" name="Slide Image Placeholder 1"/>
-          <p:cNvSpPr>
-            <a:spLocks noGrp="1" noRot="1" noChangeAspect="1"/>
-          </p:cNvSpPr>
-          <p:nvPr>
-            <p:ph type="sldImg"/>
-          </p:nvPr>
-        </p:nvSpPr>
-        <p:spPr/>
-      </p:sp>
-      <p:sp>
-        <p:nvSpPr>
-          <p:cNvPr id="3" name="Notes Placeholder 2"/>
-          <p:cNvSpPr>
-            <a:spLocks noGrp="1"/>
-          </p:cNvSpPr>
-          <p:nvPr>
-            <p:ph type="body" idx="1"/>
-          </p:nvPr>
-        </p:nvSpPr>
-        <p:spPr/>
-        <p:txBody>
-          <a:bodyPr/>
-          <a:lstStyle/>
-          <a:p>
-            <a:r>
-              <a:rPr lang="en-US" dirty="0"/>
-              <a:t>[apêndice, durante as perguntas] Slide de consulta: fica depois do QR e só aparece se alguém pedir as fontes (todas também estão no ebook, com link). Durante as perguntas, preferir o slide do QR.
-SWE-bench aparece aqui como referência do mesmo formato: issues reais de GitHub como tarefa para agentes de código.</a:t>
-            </a:r>
-            <a:endParaRPr lang="en-US" dirty="0"/>
-          </a:p>
-        </p:txBody>
-      </p:sp>
-      <p:sp>
-        <p:nvSpPr>
-          <p:cNvPr id="4" name="Slide Number Placeholder 3"/>
-          <p:cNvSpPr>
-            <a:spLocks noGrp="1"/>
-          </p:cNvSpPr>
-          <p:nvPr>
-            <p:ph type="sldNum" sz="quarter" idx="10"/>
-          </p:nvPr>
-        </p:nvSpPr>
-        <p:spPr/>
-        <p:txBody>
-          <a:bodyPr/>
-          <a:lstStyle/>
-          <a:p>
-            <a:fld id="{F7021451-1387-4CA6-816F-3879F97B5CBC}" type="slidenum">
-              <a:rPr lang="en-US"/>
-              <a:t>41</a:t>
-            </a:fld>
-            <a:endParaRPr lang="en-US"/>
-          </a:p>
-        </p:txBody>
-      </p:sp>
-    </p:spTree>
-    <p:extLst>
-      <p:ext uri="{BB962C8B-B14F-4D97-AF65-F5344CB8AC3E}">
-        <p14:creationId xmlns:p14="http://schemas.microsoft.com/office/powerpoint/2010/main" val="1024086991"/>
-      </p:ext>
-    </p:extLst>
-  </p:cSld>
-  <p:clrMapOvr>
-    <a:masterClrMapping/>
-  </p:clrMapOvr>
-</p:notes>
-</file>
-
-<file path=ppt/notesSlides/notesSlide5.xml><?xml version="1.0" encoding="utf-8"?>
-<p:notes xmlns:a="http://schemas.openxmlformats.org/drawingml/2006/main" xmlns:r="http://schemas.openxmlformats.org/officeDocument/2006/relationships" xmlns:p="http://schemas.openxmlformats.org/presentationml/2006/main">
-  <p:cSld>
-    <p:spTree>
-      <p:nvGrpSpPr>
-        <p:cNvPr id="1" name=""/>
-        <p:cNvGrpSpPr/>
-        <p:nvPr/>
-      </p:nvGrpSpPr>
-      <p:grpSpPr>
-        <a:xfrm>
-          <a:off x="0" y="0"/>
-          <a:ext cx="0" cy="0"/>
-          <a:chOff x="0" y="0"/>
-          <a:chExt cx="0" cy="0"/>
-        </a:xfrm>
-      </p:grpSpPr>
-      <p:sp>
-        <p:nvSpPr>
-          <p:cNvPr id="2" name="Slide Image Placeholder 1"/>
-          <p:cNvSpPr>
-            <a:spLocks noGrp="1" noRot="1" noChangeAspect="1"/>
-          </p:cNvSpPr>
-          <p:nvPr>
-            <p:ph type="sldImg"/>
-          </p:nvPr>
-        </p:nvSpPr>
-        <p:spPr/>
-      </p:sp>
-      <p:sp>
-        <p:nvSpPr>
-          <p:cNvPr id="3" name="Notes Placeholder 2"/>
-          <p:cNvSpPr>
-            <a:spLocks noGrp="1"/>
-          </p:cNvSpPr>
-          <p:nvPr>
-            <p:ph type="body" idx="1"/>
-          </p:nvPr>
-        </p:nvSpPr>
-        <p:spPr/>
-        <p:txBody>
-          <a:bodyPr/>
-          <a:lstStyle/>
-          <a:p>
-            <a:r>
-              <a:rPr lang="en-US" dirty="0"/>
-              <a:t>[02:15–03:00] Slide único, sem cliques: opções e a frase "a resposta sai no minuto 40" já estão na tela. Perguntar e pedir mãos em cada opção: "Quem acha que o B, com CLAUDE.md, ganha?" / "Quem acha que dá empate?" / "Quem acha que o A ganha?". Contar por alto e GUARDAR a proporção (ex.: "uns 70% no B, uns 20% no empate"): ela volta no slide 33. No máximo 20 s.
-Se ninguém aposta no A: "Ninguém no A? Guardem isso." Se muita gente aposta no empate: "Tem gente desconfiada. Bom sinal."
-Fechar apontando a frase na tela: "a resposta sai no minuto 40".</a:t>
-            </a:r>
-            <a:endParaRPr lang="en-US" dirty="0"/>
-          </a:p>
-        </p:txBody>
-      </p:sp>
-      <p:sp>
-        <p:nvSpPr>
-          <p:cNvPr id="4" name="Slide Number Placeholder 3"/>
-          <p:cNvSpPr>
-            <a:spLocks noGrp="1"/>
-          </p:cNvSpPr>
-          <p:nvPr>
-            <p:ph type="sldNum" sz="quarter" idx="10"/>
-          </p:nvPr>
-        </p:nvSpPr>
-        <p:spPr/>
-        <p:txBody>
-          <a:bodyPr/>
-          <a:lstStyle/>
-          <a:p>
-            <a:fld id="{F7021451-1387-4CA6-816F-3879F97B5CBC}" type="slidenum">
-              <a:rPr lang="en-US"/>
-              <a:t>5</a:t>
-            </a:fld>
-            <a:endParaRPr lang="en-US"/>
-          </a:p>
-        </p:txBody>
-      </p:sp>
-    </p:spTree>
-    <p:extLst>
-      <p:ext uri="{BB962C8B-B14F-4D97-AF65-F5344CB8AC3E}">
-        <p14:creationId xmlns:p14="http://schemas.microsoft.com/office/powerpoint/2010/main" val="1024086991"/>
-      </p:ext>
-    </p:extLst>
-  </p:cSld>
-  <p:clrMapOvr>
-    <a:masterClrMapping/>
-  </p:clrMapOvr>
-</p:notes>
-</file>
-
-<file path=ppt/notesSlides/notesSlide6.xml><?xml version="1.0" encoding="utf-8"?>
-<p:notes xmlns:a="http://schemas.openxmlformats.org/drawingml/2006/main" xmlns:r="http://schemas.openxmlformats.org/officeDocument/2006/relationships" xmlns:p="http://schemas.openxmlformats.org/presentationml/2006/main">
-  <p:cSld>
-    <p:spTree>
-      <p:nvGrpSpPr>
-        <p:cNvPr id="1" name=""/>
-        <p:cNvGrpSpPr/>
-        <p:nvPr/>
-      </p:nvGrpSpPr>
-      <p:grpSpPr>
-        <a:xfrm>
-          <a:off x="0" y="0"/>
-          <a:ext cx="0" cy="0"/>
-          <a:chOff x="0" y="0"/>
-          <a:chExt cx="0" cy="0"/>
-        </a:xfrm>
-      </p:grpSpPr>
-      <p:sp>
-        <p:nvSpPr>
-          <p:cNvPr id="2" name="Slide Image Placeholder 1"/>
-          <p:cNvSpPr>
-            <a:spLocks noGrp="1" noRot="1" noChangeAspect="1"/>
-          </p:cNvSpPr>
-          <p:nvPr>
-            <p:ph type="sldImg"/>
-          </p:nvPr>
-        </p:nvSpPr>
-        <p:spPr/>
-      </p:sp>
-      <p:sp>
-        <p:nvSpPr>
-          <p:cNvPr id="3" name="Notes Placeholder 2"/>
-          <p:cNvSpPr>
-            <a:spLocks noGrp="1"/>
-          </p:cNvSpPr>
-          <p:nvPr>
-            <p:ph type="body" idx="1"/>
-          </p:nvPr>
-        </p:nvSpPr>
-        <p:spPr/>
-        <p:txBody>
-          <a:bodyPr/>
-          <a:lstStyle/>
-          <a:p>
-            <a:r>
-              <a:rPr lang="en-US" dirty="0"/>
-              <a:t>[03:00]</a:t>
-            </a:r>
-            <a:endParaRPr lang="en-US" dirty="0"/>
-          </a:p>
-        </p:txBody>
-      </p:sp>
-      <p:sp>
-        <p:nvSpPr>
-          <p:cNvPr id="4" name="Slide Number Placeholder 3"/>
-          <p:cNvSpPr>
-            <a:spLocks noGrp="1"/>
-          </p:cNvSpPr>
-          <p:nvPr>
-            <p:ph type="sldNum" sz="quarter" idx="10"/>
-          </p:nvPr>
-        </p:nvSpPr>
-        <p:spPr/>
-        <p:txBody>
-          <a:bodyPr/>
-          <a:lstStyle/>
-          <a:p>
-            <a:fld id="{F7021451-1387-4CA6-816F-3879F97B5CBC}" type="slidenum">
-              <a:rPr lang="en-US"/>
-              <a:t>6</a:t>
-            </a:fld>
-            <a:endParaRPr lang="en-US"/>
-          </a:p>
-        </p:txBody>
-      </p:sp>
-    </p:spTree>
-    <p:extLst>
-      <p:ext uri="{BB962C8B-B14F-4D97-AF65-F5344CB8AC3E}">
-        <p14:creationId xmlns:p14="http://schemas.microsoft.com/office/powerpoint/2010/main" val="1024086991"/>
-      </p:ext>
-    </p:extLst>
-  </p:cSld>
-  <p:clrMapOvr>
-    <a:masterClrMapping/>
-  </p:clrMapOvr>
-</p:notes>
-</file>
-
-<file path=ppt/notesSlides/notesSlide7.xml><?xml version="1.0" encoding="utf-8"?>
-<p:notes xmlns:a="http://schemas.openxmlformats.org/drawingml/2006/main" xmlns:r="http://schemas.openxmlformats.org/officeDocument/2006/relationships" xmlns:p="http://schemas.openxmlformats.org/presentationml/2006/main">
-  <p:cSld>
-    <p:spTree>
-      <p:nvGrpSpPr>
-        <p:cNvPr id="1" name=""/>
-        <p:cNvGrpSpPr/>
-        <p:nvPr/>
-      </p:nvGrpSpPr>
-      <p:grpSpPr>
-        <a:xfrm>
-          <a:off x="0" y="0"/>
-          <a:ext cx="0" cy="0"/>
-          <a:chOff x="0" y="0"/>
-          <a:chExt cx="0" cy="0"/>
-        </a:xfrm>
-      </p:grpSpPr>
-      <p:sp>
-        <p:nvSpPr>
-          <p:cNvPr id="2" name="Slide Image Placeholder 1"/>
-          <p:cNvSpPr>
-            <a:spLocks noGrp="1" noRot="1" noChangeAspect="1"/>
-          </p:cNvSpPr>
-          <p:nvPr>
-            <p:ph type="sldImg"/>
-          </p:nvPr>
-        </p:nvSpPr>
-        <p:spPr/>
-      </p:sp>
-      <p:sp>
-        <p:nvSpPr>
-          <p:cNvPr id="3" name="Notes Placeholder 2"/>
-          <p:cNvSpPr>
-            <a:spLocks noGrp="1"/>
-          </p:cNvSpPr>
-          <p:nvPr>
-            <p:ph type="body" idx="1"/>
-          </p:nvPr>
-        </p:nvSpPr>
-        <p:spPr/>
-        <p:txBody>
-          <a:bodyPr/>
-          <a:lstStyle/>
-          <a:p>
-            <a:r>
-              <a:rPr lang="en-US" dirty="0"/>
-              <a:t>[03:00–05:00] Todo mundo já fez: mudou o prompt, o CLAUDE.md ou o modelo; pediu UMA tarefa; deu certo; "melhorou!".
-O que ficou de fora (falar, não está no slide): a tarefa era fácil ou difícil? E se você pedisse de novo? Quanto custou, quantos turnos? Ele mexeu onde não devia? E, a mais esquecida (clique): daria certo ANTES da mudança também?
-Pergunta opcional, se a sala estiver fria: "Quem aqui já trocou de modelo ou de configuração do agente porque 'sentiu' que estava melhor?" (quase todo mundo levanta a mão; o palestrante também).
-Ponto: vibe check não é inútil, é o ponto de partida. O problema é parar nele.</a:t>
-            </a:r>
-            <a:endParaRPr lang="en-US" dirty="0"/>
-          </a:p>
-        </p:txBody>
-      </p:sp>
-      <p:sp>
-        <p:nvSpPr>
-          <p:cNvPr id="4" name="Slide Number Placeholder 3"/>
-          <p:cNvSpPr>
-            <a:spLocks noGrp="1"/>
-          </p:cNvSpPr>
-          <p:nvPr>
-            <p:ph type="sldNum" sz="quarter" idx="10"/>
-          </p:nvPr>
-        </p:nvSpPr>
-        <p:spPr/>
-        <p:txBody>
-          <a:bodyPr/>
-          <a:lstStyle/>
-          <a:p>
-            <a:fld id="{F7021451-1387-4CA6-816F-3879F97B5CBC}" type="slidenum">
-              <a:rPr lang="en-US"/>
-              <a:t>7</a:t>
-            </a:fld>
-            <a:endParaRPr lang="en-US"/>
-          </a:p>
-        </p:txBody>
-      </p:sp>
-    </p:spTree>
-    <p:extLst>
-      <p:ext uri="{BB962C8B-B14F-4D97-AF65-F5344CB8AC3E}">
-        <p14:creationId xmlns:p14="http://schemas.microsoft.com/office/powerpoint/2010/main" val="1024086991"/>
-      </p:ext>
-    </p:extLst>
-  </p:cSld>
-  <p:clrMapOvr>
-    <a:masterClrMapping/>
-  </p:clrMapOvr>
-</p:notes>
-</file>
-
-<file path=ppt/notesSlides/notesSlide8.xml><?xml version="1.0" encoding="utf-8"?>
-<p:notes xmlns:a="http://schemas.openxmlformats.org/drawingml/2006/main" xmlns:r="http://schemas.openxmlformats.org/officeDocument/2006/relationships" xmlns:p="http://schemas.openxmlformats.org/presentationml/2006/main">
-  <p:cSld>
-    <p:spTree>
-      <p:nvGrpSpPr>
-        <p:cNvPr id="1" name=""/>
-        <p:cNvGrpSpPr/>
-        <p:nvPr/>
-      </p:nvGrpSpPr>
-      <p:grpSpPr>
-        <a:xfrm>
-          <a:off x="0" y="0"/>
-          <a:ext cx="0" cy="0"/>
-          <a:chOff x="0" y="0"/>
-          <a:chExt cx="0" cy="0"/>
-        </a:xfrm>
-      </p:grpSpPr>
-      <p:sp>
-        <p:nvSpPr>
-          <p:cNvPr id="2" name="Slide Image Placeholder 1"/>
-          <p:cNvSpPr>
-            <a:spLocks noGrp="1" noRot="1" noChangeAspect="1"/>
-          </p:cNvSpPr>
-          <p:nvPr>
-            <p:ph type="sldImg"/>
-          </p:nvPr>
-        </p:nvSpPr>
-        <p:spPr/>
-      </p:sp>
-      <p:sp>
-        <p:nvSpPr>
-          <p:cNvPr id="3" name="Notes Placeholder 2"/>
-          <p:cNvSpPr>
-            <a:spLocks noGrp="1"/>
-          </p:cNvSpPr>
-          <p:nvPr>
-            <p:ph type="body" idx="1"/>
-          </p:nvPr>
-        </p:nvSpPr>
-        <p:spPr/>
-        <p:txBody>
-          <a:bodyPr/>
-          <a:lstStyle/>
-          <a:p>
-            <a:r>
-              <a:rPr lang="en-US" dirty="0"/>
-              <a:t>[05:00–06:00] Mesmo prompt, mesmo repo, mesmo modelo: caminhos diferentes, turnos diferentes; às vezes passa, às vezes não; o custo varia de uma execução para outra.
-O agente amostra tokens; o loop de ferramentas amplifica qualquer diferença pequena no começo. Isso é normal, não é bug.
-Transição: "Então quanto diz uma execução? Chutem."</a:t>
-            </a:r>
-            <a:endParaRPr lang="en-US" dirty="0"/>
-          </a:p>
-        </p:txBody>
-      </p:sp>
-      <p:sp>
-        <p:nvSpPr>
-          <p:cNvPr id="4" name="Slide Number Placeholder 3"/>
-          <p:cNvSpPr>
-            <a:spLocks noGrp="1"/>
-          </p:cNvSpPr>
-          <p:nvPr>
-            <p:ph type="sldNum" sz="quarter" idx="10"/>
-          </p:nvPr>
-        </p:nvSpPr>
-        <p:spPr/>
-        <p:txBody>
-          <a:bodyPr/>
-          <a:lstStyle/>
-          <a:p>
-            <a:fld id="{F7021451-1387-4CA6-816F-3879F97B5CBC}" type="slidenum">
-              <a:rPr lang="en-US"/>
-              <a:t>8</a:t>
-            </a:fld>
-            <a:endParaRPr lang="en-US"/>
-          </a:p>
-        </p:txBody>
-      </p:sp>
-    </p:spTree>
-    <p:extLst>
-      <p:ext uri="{BB962C8B-B14F-4D97-AF65-F5344CB8AC3E}">
-        <p14:creationId xmlns:p14="http://schemas.microsoft.com/office/powerpoint/2010/main" val="1024086991"/>
-      </p:ext>
-    </p:extLst>
-  </p:cSld>
-  <p:clrMapOvr>
-    <a:masterClrMapping/>
-  </p:clrMapOvr>
-</p:notes>
-</file>
-
 <file path=ppt/notesSlides/notesSlide9.xml><?xml version="1.0" encoding="utf-8"?>
 <p:notes xmlns:a="http://schemas.openxmlformats.org/drawingml/2006/main" xmlns:r="http://schemas.openxmlformats.org/officeDocument/2006/relationships" xmlns:p="http://schemas.openxmlformats.org/presentationml/2006/main">
   <p:cSld>
@@ -4175,8 +2640,12 @@
           <a:p>
             <a:r>
               <a:rPr lang="en-US" dirty="0"/>
-              <a:t>[06:00–06:45] Slide único, sem cliques. Perguntar: "Passou 1 de 1. É 100%. Quem confia?" Esperar as mãos (até 15 s). Se muita gente confia: "Vamos ver o que a conta diz." Se ninguém confia: "Desconfiança saudável. Quanto, então?"
-Avançar para o slide seguinte com a resposta.</a:t>
+              <a:t>[07:00–09:00] Ir linha por linha, devagar. Para quem é júnior: "turno" = uma ida e volta entre o modelo e uma ferramenta (ler arquivo, editar, rodar teste).
+Como o repo mede cada uma: sucesso = teste escondido passou (critério de feito); custo/tokens = `usage` e `total_cost_usd` do `claude -p`; turnos = `num_turns`; tempo = `duration_ms`; fora do escopo = diff fora dos arquivos permitidos; consistência = pass^k (passou em todas as repetições).
+Fora do escopo é separado de propósito: resolveu mexendo onde não devia não é sucesso.
+Consistência = pass^k: passou em TODAS as k tentativas; no relatório, k = 2.
+O `claude -p --output-format json` devolve esses campos no JSON final (doc "Run Claude Code programmatically"). A doc diz que o custo é estimativa do lado do cliente: com assinatura, leia o custo em US$ como "tamanho do esforço", não como fatura.
+Tokens: o relatório mostra a mediana de entrada + saída separada da mediana de cache (leitura + criação), porque o cache domina a contagem e esconderia a diferença.</a:t>
             </a:r>
             <a:endParaRPr lang="en-US" dirty="0"/>
           </a:p>
@@ -5188,201 +3657,6 @@
 </p:sld>
 </file>
 
-<file path=ppt/slides/slide25.xml><?xml version="1.0" encoding="utf-8"?>
-<p:sld xmlns:a="http://schemas.openxmlformats.org/drawingml/2006/main" xmlns:r="http://schemas.openxmlformats.org/officeDocument/2006/relationships" xmlns:p="http://schemas.openxmlformats.org/presentationml/2006/main">
-  <p:cSld name="Slide 25">
-    <p:bg>
-      <p:bgPr>
-        <a:blipFill dpi="0" rotWithShape="1">
-          <a:blip r:embed="rId1">
-            <a:lum/>
-          </a:blip>
-          <a:srcRect/>
-          <a:stretch>
-            <a:fillRect/>
-          </a:stretch>
-        </a:blipFill>
-        <a:effectLst/>
-      </p:bgPr>
-    </p:bg>
-    <p:spTree>
-      <p:nvGrpSpPr>
-        <p:cNvPr id="1" name=""/>
-        <p:cNvGrpSpPr/>
-        <p:nvPr/>
-      </p:nvGrpSpPr>
-      <p:grpSpPr>
-        <a:xfrm>
-          <a:off x="0" y="0"/>
-          <a:ext cx="0" cy="0"/>
-          <a:chOff x="0" y="0"/>
-          <a:chExt cx="0" cy="0"/>
-        </a:xfrm>
-      </p:grpSpPr>
-    </p:spTree>
-  </p:cSld>
-  <p:clrMapOvr>
-    <a:masterClrMapping/>
-  </p:clrMapOvr>
-</p:sld>
-</file>
-
-<file path=ppt/slides/slide26.xml><?xml version="1.0" encoding="utf-8"?>
-<p:sld xmlns:a="http://schemas.openxmlformats.org/drawingml/2006/main" xmlns:r="http://schemas.openxmlformats.org/officeDocument/2006/relationships" xmlns:p="http://schemas.openxmlformats.org/presentationml/2006/main">
-  <p:cSld name="Slide 26">
-    <p:bg>
-      <p:bgPr>
-        <a:blipFill dpi="0" rotWithShape="1">
-          <a:blip r:embed="rId1">
-            <a:lum/>
-          </a:blip>
-          <a:srcRect/>
-          <a:stretch>
-            <a:fillRect/>
-          </a:stretch>
-        </a:blipFill>
-        <a:effectLst/>
-      </p:bgPr>
-    </p:bg>
-    <p:spTree>
-      <p:nvGrpSpPr>
-        <p:cNvPr id="1" name=""/>
-        <p:cNvGrpSpPr/>
-        <p:nvPr/>
-      </p:nvGrpSpPr>
-      <p:grpSpPr>
-        <a:xfrm>
-          <a:off x="0" y="0"/>
-          <a:ext cx="0" cy="0"/>
-          <a:chOff x="0" y="0"/>
-          <a:chExt cx="0" cy="0"/>
-        </a:xfrm>
-      </p:grpSpPr>
-    </p:spTree>
-  </p:cSld>
-  <p:clrMapOvr>
-    <a:masterClrMapping/>
-  </p:clrMapOvr>
-</p:sld>
-</file>
-
-<file path=ppt/slides/slide27.xml><?xml version="1.0" encoding="utf-8"?>
-<p:sld xmlns:a="http://schemas.openxmlformats.org/drawingml/2006/main" xmlns:r="http://schemas.openxmlformats.org/officeDocument/2006/relationships" xmlns:p="http://schemas.openxmlformats.org/presentationml/2006/main">
-  <p:cSld name="Slide 27">
-    <p:bg>
-      <p:bgPr>
-        <a:blipFill dpi="0" rotWithShape="1">
-          <a:blip r:embed="rId1">
-            <a:lum/>
-          </a:blip>
-          <a:srcRect/>
-          <a:stretch>
-            <a:fillRect/>
-          </a:stretch>
-        </a:blipFill>
-        <a:effectLst/>
-      </p:bgPr>
-    </p:bg>
-    <p:spTree>
-      <p:nvGrpSpPr>
-        <p:cNvPr id="1" name=""/>
-        <p:cNvGrpSpPr/>
-        <p:nvPr/>
-      </p:nvGrpSpPr>
-      <p:grpSpPr>
-        <a:xfrm>
-          <a:off x="0" y="0"/>
-          <a:ext cx="0" cy="0"/>
-          <a:chOff x="0" y="0"/>
-          <a:chExt cx="0" cy="0"/>
-        </a:xfrm>
-      </p:grpSpPr>
-    </p:spTree>
-  </p:cSld>
-  <p:clrMapOvr>
-    <a:masterClrMapping/>
-  </p:clrMapOvr>
-</p:sld>
-</file>
-
-<file path=ppt/slides/slide28.xml><?xml version="1.0" encoding="utf-8"?>
-<p:sld xmlns:a="http://schemas.openxmlformats.org/drawingml/2006/main" xmlns:r="http://schemas.openxmlformats.org/officeDocument/2006/relationships" xmlns:p="http://schemas.openxmlformats.org/presentationml/2006/main">
-  <p:cSld name="Slide 28">
-    <p:bg>
-      <p:bgPr>
-        <a:blipFill dpi="0" rotWithShape="1">
-          <a:blip r:embed="rId1">
-            <a:lum/>
-          </a:blip>
-          <a:srcRect/>
-          <a:stretch>
-            <a:fillRect/>
-          </a:stretch>
-        </a:blipFill>
-        <a:effectLst/>
-      </p:bgPr>
-    </p:bg>
-    <p:spTree>
-      <p:nvGrpSpPr>
-        <p:cNvPr id="1" name=""/>
-        <p:cNvGrpSpPr/>
-        <p:nvPr/>
-      </p:nvGrpSpPr>
-      <p:grpSpPr>
-        <a:xfrm>
-          <a:off x="0" y="0"/>
-          <a:ext cx="0" cy="0"/>
-          <a:chOff x="0" y="0"/>
-          <a:chExt cx="0" cy="0"/>
-        </a:xfrm>
-      </p:grpSpPr>
-    </p:spTree>
-  </p:cSld>
-  <p:clrMapOvr>
-    <a:masterClrMapping/>
-  </p:clrMapOvr>
-</p:sld>
-</file>
-
-<file path=ppt/slides/slide29.xml><?xml version="1.0" encoding="utf-8"?>
-<p:sld xmlns:a="http://schemas.openxmlformats.org/drawingml/2006/main" xmlns:r="http://schemas.openxmlformats.org/officeDocument/2006/relationships" xmlns:p="http://schemas.openxmlformats.org/presentationml/2006/main">
-  <p:cSld name="Slide 29">
-    <p:bg>
-      <p:bgPr>
-        <a:blipFill dpi="0" rotWithShape="1">
-          <a:blip r:embed="rId1">
-            <a:lum/>
-          </a:blip>
-          <a:srcRect/>
-          <a:stretch>
-            <a:fillRect/>
-          </a:stretch>
-        </a:blipFill>
-        <a:effectLst/>
-      </p:bgPr>
-    </p:bg>
-    <p:spTree>
-      <p:nvGrpSpPr>
-        <p:cNvPr id="1" name=""/>
-        <p:cNvGrpSpPr/>
-        <p:nvPr/>
-      </p:nvGrpSpPr>
-      <p:grpSpPr>
-        <a:xfrm>
-          <a:off x="0" y="0"/>
-          <a:ext cx="0" cy="0"/>
-          <a:chOff x="0" y="0"/>
-          <a:chExt cx="0" cy="0"/>
-        </a:xfrm>
-      </p:grpSpPr>
-    </p:spTree>
-  </p:cSld>
-  <p:clrMapOvr>
-    <a:masterClrMapping/>
-  </p:clrMapOvr>
-</p:sld>
-</file>
-
 <file path=ppt/slides/slide3.xml><?xml version="1.0" encoding="utf-8"?>
 <p:sld xmlns:a="http://schemas.openxmlformats.org/drawingml/2006/main" xmlns:r="http://schemas.openxmlformats.org/officeDocument/2006/relationships" xmlns:p="http://schemas.openxmlformats.org/presentationml/2006/main">
   <p:cSld name="Slide 3">
@@ -5422,477 +3696,9 @@
 </p:sld>
 </file>
 
-<file path=ppt/slides/slide30.xml><?xml version="1.0" encoding="utf-8"?>
-<p:sld xmlns:a="http://schemas.openxmlformats.org/drawingml/2006/main" xmlns:r="http://schemas.openxmlformats.org/officeDocument/2006/relationships" xmlns:p="http://schemas.openxmlformats.org/presentationml/2006/main">
-  <p:cSld name="Slide 30">
-    <p:bg>
-      <p:bgPr>
-        <a:blipFill dpi="0" rotWithShape="1">
-          <a:blip r:embed="rId1">
-            <a:lum/>
-          </a:blip>
-          <a:srcRect/>
-          <a:stretch>
-            <a:fillRect/>
-          </a:stretch>
-        </a:blipFill>
-        <a:effectLst/>
-      </p:bgPr>
-    </p:bg>
-    <p:spTree>
-      <p:nvGrpSpPr>
-        <p:cNvPr id="1" name=""/>
-        <p:cNvGrpSpPr/>
-        <p:nvPr/>
-      </p:nvGrpSpPr>
-      <p:grpSpPr>
-        <a:xfrm>
-          <a:off x="0" y="0"/>
-          <a:ext cx="0" cy="0"/>
-          <a:chOff x="0" y="0"/>
-          <a:chExt cx="0" cy="0"/>
-        </a:xfrm>
-      </p:grpSpPr>
-    </p:spTree>
-  </p:cSld>
-  <p:clrMapOvr>
-    <a:masterClrMapping/>
-  </p:clrMapOvr>
-</p:sld>
-</file>
-
-<file path=ppt/slides/slide31.xml><?xml version="1.0" encoding="utf-8"?>
-<p:sld xmlns:a="http://schemas.openxmlformats.org/drawingml/2006/main" xmlns:r="http://schemas.openxmlformats.org/officeDocument/2006/relationships" xmlns:p="http://schemas.openxmlformats.org/presentationml/2006/main">
-  <p:cSld name="Slide 31">
-    <p:bg>
-      <p:bgPr>
-        <a:blipFill dpi="0" rotWithShape="1">
-          <a:blip r:embed="rId1">
-            <a:lum/>
-          </a:blip>
-          <a:srcRect/>
-          <a:stretch>
-            <a:fillRect/>
-          </a:stretch>
-        </a:blipFill>
-        <a:effectLst/>
-      </p:bgPr>
-    </p:bg>
-    <p:spTree>
-      <p:nvGrpSpPr>
-        <p:cNvPr id="1" name=""/>
-        <p:cNvGrpSpPr/>
-        <p:nvPr/>
-      </p:nvGrpSpPr>
-      <p:grpSpPr>
-        <a:xfrm>
-          <a:off x="0" y="0"/>
-          <a:ext cx="0" cy="0"/>
-          <a:chOff x="0" y="0"/>
-          <a:chExt cx="0" cy="0"/>
-        </a:xfrm>
-      </p:grpSpPr>
-    </p:spTree>
-  </p:cSld>
-  <p:clrMapOvr>
-    <a:masterClrMapping/>
-  </p:clrMapOvr>
-</p:sld>
-</file>
-
-<file path=ppt/slides/slide32.xml><?xml version="1.0" encoding="utf-8"?>
-<p:sld xmlns:a="http://schemas.openxmlformats.org/drawingml/2006/main" xmlns:r="http://schemas.openxmlformats.org/officeDocument/2006/relationships" xmlns:p="http://schemas.openxmlformats.org/presentationml/2006/main">
-  <p:cSld name="Slide 32">
-    <p:bg>
-      <p:bgPr>
-        <a:blipFill dpi="0" rotWithShape="1">
-          <a:blip r:embed="rId1">
-            <a:lum/>
-          </a:blip>
-          <a:srcRect/>
-          <a:stretch>
-            <a:fillRect/>
-          </a:stretch>
-        </a:blipFill>
-        <a:effectLst/>
-      </p:bgPr>
-    </p:bg>
-    <p:spTree>
-      <p:nvGrpSpPr>
-        <p:cNvPr id="1" name=""/>
-        <p:cNvGrpSpPr/>
-        <p:nvPr/>
-      </p:nvGrpSpPr>
-      <p:grpSpPr>
-        <a:xfrm>
-          <a:off x="0" y="0"/>
-          <a:ext cx="0" cy="0"/>
-          <a:chOff x="0" y="0"/>
-          <a:chExt cx="0" cy="0"/>
-        </a:xfrm>
-      </p:grpSpPr>
-    </p:spTree>
-  </p:cSld>
-  <p:clrMapOvr>
-    <a:masterClrMapping/>
-  </p:clrMapOvr>
-</p:sld>
-</file>
-
-<file path=ppt/slides/slide33.xml><?xml version="1.0" encoding="utf-8"?>
-<p:sld xmlns:a="http://schemas.openxmlformats.org/drawingml/2006/main" xmlns:r="http://schemas.openxmlformats.org/officeDocument/2006/relationships" xmlns:p="http://schemas.openxmlformats.org/presentationml/2006/main">
-  <p:cSld name="Slide 33">
-    <p:bg>
-      <p:bgPr>
-        <a:blipFill dpi="0" rotWithShape="1">
-          <a:blip r:embed="rId1">
-            <a:lum/>
-          </a:blip>
-          <a:srcRect/>
-          <a:stretch>
-            <a:fillRect/>
-          </a:stretch>
-        </a:blipFill>
-        <a:effectLst/>
-      </p:bgPr>
-    </p:bg>
-    <p:spTree>
-      <p:nvGrpSpPr>
-        <p:cNvPr id="1" name=""/>
-        <p:cNvGrpSpPr/>
-        <p:nvPr/>
-      </p:nvGrpSpPr>
-      <p:grpSpPr>
-        <a:xfrm>
-          <a:off x="0" y="0"/>
-          <a:ext cx="0" cy="0"/>
-          <a:chOff x="0" y="0"/>
-          <a:chExt cx="0" cy="0"/>
-        </a:xfrm>
-      </p:grpSpPr>
-    </p:spTree>
-  </p:cSld>
-  <p:clrMapOvr>
-    <a:masterClrMapping/>
-  </p:clrMapOvr>
-</p:sld>
-</file>
-
-<file path=ppt/slides/slide34.xml><?xml version="1.0" encoding="utf-8"?>
-<p:sld xmlns:a="http://schemas.openxmlformats.org/drawingml/2006/main" xmlns:r="http://schemas.openxmlformats.org/officeDocument/2006/relationships" xmlns:p="http://schemas.openxmlformats.org/presentationml/2006/main">
-  <p:cSld name="Slide 34">
-    <p:bg>
-      <p:bgPr>
-        <a:blipFill dpi="0" rotWithShape="1">
-          <a:blip r:embed="rId1">
-            <a:lum/>
-          </a:blip>
-          <a:srcRect/>
-          <a:stretch>
-            <a:fillRect/>
-          </a:stretch>
-        </a:blipFill>
-        <a:effectLst/>
-      </p:bgPr>
-    </p:bg>
-    <p:spTree>
-      <p:nvGrpSpPr>
-        <p:cNvPr id="1" name=""/>
-        <p:cNvGrpSpPr/>
-        <p:nvPr/>
-      </p:nvGrpSpPr>
-      <p:grpSpPr>
-        <a:xfrm>
-          <a:off x="0" y="0"/>
-          <a:ext cx="0" cy="0"/>
-          <a:chOff x="0" y="0"/>
-          <a:chExt cx="0" cy="0"/>
-        </a:xfrm>
-      </p:grpSpPr>
-    </p:spTree>
-  </p:cSld>
-  <p:clrMapOvr>
-    <a:masterClrMapping/>
-  </p:clrMapOvr>
-</p:sld>
-</file>
-
-<file path=ppt/slides/slide35.xml><?xml version="1.0" encoding="utf-8"?>
-<p:sld xmlns:a="http://schemas.openxmlformats.org/drawingml/2006/main" xmlns:r="http://schemas.openxmlformats.org/officeDocument/2006/relationships" xmlns:p="http://schemas.openxmlformats.org/presentationml/2006/main">
-  <p:cSld name="Slide 35">
-    <p:bg>
-      <p:bgPr>
-        <a:blipFill dpi="0" rotWithShape="1">
-          <a:blip r:embed="rId1">
-            <a:lum/>
-          </a:blip>
-          <a:srcRect/>
-          <a:stretch>
-            <a:fillRect/>
-          </a:stretch>
-        </a:blipFill>
-        <a:effectLst/>
-      </p:bgPr>
-    </p:bg>
-    <p:spTree>
-      <p:nvGrpSpPr>
-        <p:cNvPr id="1" name=""/>
-        <p:cNvGrpSpPr/>
-        <p:nvPr/>
-      </p:nvGrpSpPr>
-      <p:grpSpPr>
-        <a:xfrm>
-          <a:off x="0" y="0"/>
-          <a:ext cx="0" cy="0"/>
-          <a:chOff x="0" y="0"/>
-          <a:chExt cx="0" cy="0"/>
-        </a:xfrm>
-      </p:grpSpPr>
-    </p:spTree>
-  </p:cSld>
-  <p:clrMapOvr>
-    <a:masterClrMapping/>
-  </p:clrMapOvr>
-</p:sld>
-</file>
-
-<file path=ppt/slides/slide36.xml><?xml version="1.0" encoding="utf-8"?>
-<p:sld xmlns:a="http://schemas.openxmlformats.org/drawingml/2006/main" xmlns:r="http://schemas.openxmlformats.org/officeDocument/2006/relationships" xmlns:p="http://schemas.openxmlformats.org/presentationml/2006/main">
-  <p:cSld name="Slide 36">
-    <p:bg>
-      <p:bgPr>
-        <a:blipFill dpi="0" rotWithShape="1">
-          <a:blip r:embed="rId1">
-            <a:lum/>
-          </a:blip>
-          <a:srcRect/>
-          <a:stretch>
-            <a:fillRect/>
-          </a:stretch>
-        </a:blipFill>
-        <a:effectLst/>
-      </p:bgPr>
-    </p:bg>
-    <p:spTree>
-      <p:nvGrpSpPr>
-        <p:cNvPr id="1" name=""/>
-        <p:cNvGrpSpPr/>
-        <p:nvPr/>
-      </p:nvGrpSpPr>
-      <p:grpSpPr>
-        <a:xfrm>
-          <a:off x="0" y="0"/>
-          <a:ext cx="0" cy="0"/>
-          <a:chOff x="0" y="0"/>
-          <a:chExt cx="0" cy="0"/>
-        </a:xfrm>
-      </p:grpSpPr>
-    </p:spTree>
-  </p:cSld>
-  <p:clrMapOvr>
-    <a:masterClrMapping/>
-  </p:clrMapOvr>
-</p:sld>
-</file>
-
-<file path=ppt/slides/slide37.xml><?xml version="1.0" encoding="utf-8"?>
-<p:sld xmlns:a="http://schemas.openxmlformats.org/drawingml/2006/main" xmlns:r="http://schemas.openxmlformats.org/officeDocument/2006/relationships" xmlns:p="http://schemas.openxmlformats.org/presentationml/2006/main">
-  <p:cSld name="Slide 37">
-    <p:bg>
-      <p:bgPr>
-        <a:blipFill dpi="0" rotWithShape="1">
-          <a:blip r:embed="rId1">
-            <a:lum/>
-          </a:blip>
-          <a:srcRect/>
-          <a:stretch>
-            <a:fillRect/>
-          </a:stretch>
-        </a:blipFill>
-        <a:effectLst/>
-      </p:bgPr>
-    </p:bg>
-    <p:spTree>
-      <p:nvGrpSpPr>
-        <p:cNvPr id="1" name=""/>
-        <p:cNvGrpSpPr/>
-        <p:nvPr/>
-      </p:nvGrpSpPr>
-      <p:grpSpPr>
-        <a:xfrm>
-          <a:off x="0" y="0"/>
-          <a:ext cx="0" cy="0"/>
-          <a:chOff x="0" y="0"/>
-          <a:chExt cx="0" cy="0"/>
-        </a:xfrm>
-      </p:grpSpPr>
-    </p:spTree>
-  </p:cSld>
-  <p:clrMapOvr>
-    <a:masterClrMapping/>
-  </p:clrMapOvr>
-</p:sld>
-</file>
-
-<file path=ppt/slides/slide38.xml><?xml version="1.0" encoding="utf-8"?>
-<p:sld xmlns:a="http://schemas.openxmlformats.org/drawingml/2006/main" xmlns:r="http://schemas.openxmlformats.org/officeDocument/2006/relationships" xmlns:p="http://schemas.openxmlformats.org/presentationml/2006/main">
-  <p:cSld name="Slide 38">
-    <p:bg>
-      <p:bgPr>
-        <a:blipFill dpi="0" rotWithShape="1">
-          <a:blip r:embed="rId1">
-            <a:lum/>
-          </a:blip>
-          <a:srcRect/>
-          <a:stretch>
-            <a:fillRect/>
-          </a:stretch>
-        </a:blipFill>
-        <a:effectLst/>
-      </p:bgPr>
-    </p:bg>
-    <p:spTree>
-      <p:nvGrpSpPr>
-        <p:cNvPr id="1" name=""/>
-        <p:cNvGrpSpPr/>
-        <p:nvPr/>
-      </p:nvGrpSpPr>
-      <p:grpSpPr>
-        <a:xfrm>
-          <a:off x="0" y="0"/>
-          <a:ext cx="0" cy="0"/>
-          <a:chOff x="0" y="0"/>
-          <a:chExt cx="0" cy="0"/>
-        </a:xfrm>
-      </p:grpSpPr>
-    </p:spTree>
-  </p:cSld>
-  <p:clrMapOvr>
-    <a:masterClrMapping/>
-  </p:clrMapOvr>
-</p:sld>
-</file>
-
-<file path=ppt/slides/slide39.xml><?xml version="1.0" encoding="utf-8"?>
-<p:sld xmlns:a="http://schemas.openxmlformats.org/drawingml/2006/main" xmlns:r="http://schemas.openxmlformats.org/officeDocument/2006/relationships" xmlns:p="http://schemas.openxmlformats.org/presentationml/2006/main">
-  <p:cSld name="Slide 39">
-    <p:bg>
-      <p:bgPr>
-        <a:blipFill dpi="0" rotWithShape="1">
-          <a:blip r:embed="rId1">
-            <a:lum/>
-          </a:blip>
-          <a:srcRect/>
-          <a:stretch>
-            <a:fillRect/>
-          </a:stretch>
-        </a:blipFill>
-        <a:effectLst/>
-      </p:bgPr>
-    </p:bg>
-    <p:spTree>
-      <p:nvGrpSpPr>
-        <p:cNvPr id="1" name=""/>
-        <p:cNvGrpSpPr/>
-        <p:nvPr/>
-      </p:nvGrpSpPr>
-      <p:grpSpPr>
-        <a:xfrm>
-          <a:off x="0" y="0"/>
-          <a:ext cx="0" cy="0"/>
-          <a:chOff x="0" y="0"/>
-          <a:chExt cx="0" cy="0"/>
-        </a:xfrm>
-      </p:grpSpPr>
-    </p:spTree>
-  </p:cSld>
-  <p:clrMapOvr>
-    <a:masterClrMapping/>
-  </p:clrMapOvr>
-</p:sld>
-</file>
-
 <file path=ppt/slides/slide4.xml><?xml version="1.0" encoding="utf-8"?>
 <p:sld xmlns:a="http://schemas.openxmlformats.org/drawingml/2006/main" xmlns:r="http://schemas.openxmlformats.org/officeDocument/2006/relationships" xmlns:p="http://schemas.openxmlformats.org/presentationml/2006/main">
   <p:cSld name="Slide 4">
-    <p:bg>
-      <p:bgPr>
-        <a:blipFill dpi="0" rotWithShape="1">
-          <a:blip r:embed="rId1">
-            <a:lum/>
-          </a:blip>
-          <a:srcRect/>
-          <a:stretch>
-            <a:fillRect/>
-          </a:stretch>
-        </a:blipFill>
-        <a:effectLst/>
-      </p:bgPr>
-    </p:bg>
-    <p:spTree>
-      <p:nvGrpSpPr>
-        <p:cNvPr id="1" name=""/>
-        <p:cNvGrpSpPr/>
-        <p:nvPr/>
-      </p:nvGrpSpPr>
-      <p:grpSpPr>
-        <a:xfrm>
-          <a:off x="0" y="0"/>
-          <a:ext cx="0" cy="0"/>
-          <a:chOff x="0" y="0"/>
-          <a:chExt cx="0" cy="0"/>
-        </a:xfrm>
-      </p:grpSpPr>
-    </p:spTree>
-  </p:cSld>
-  <p:clrMapOvr>
-    <a:masterClrMapping/>
-  </p:clrMapOvr>
-</p:sld>
-</file>
-
-<file path=ppt/slides/slide40.xml><?xml version="1.0" encoding="utf-8"?>
-<p:sld xmlns:a="http://schemas.openxmlformats.org/drawingml/2006/main" xmlns:r="http://schemas.openxmlformats.org/officeDocument/2006/relationships" xmlns:p="http://schemas.openxmlformats.org/presentationml/2006/main">
-  <p:cSld name="Slide 40">
-    <p:bg>
-      <p:bgPr>
-        <a:blipFill dpi="0" rotWithShape="1">
-          <a:blip r:embed="rId1">
-            <a:lum/>
-          </a:blip>
-          <a:srcRect/>
-          <a:stretch>
-            <a:fillRect/>
-          </a:stretch>
-        </a:blipFill>
-        <a:effectLst/>
-      </p:bgPr>
-    </p:bg>
-    <p:spTree>
-      <p:nvGrpSpPr>
-        <p:cNvPr id="1" name=""/>
-        <p:cNvGrpSpPr/>
-        <p:nvPr/>
-      </p:nvGrpSpPr>
-      <p:grpSpPr>
-        <a:xfrm>
-          <a:off x="0" y="0"/>
-          <a:ext cx="0" cy="0"/>
-          <a:chOff x="0" y="0"/>
-          <a:chExt cx="0" cy="0"/>
-        </a:xfrm>
-      </p:grpSpPr>
-    </p:spTree>
-  </p:cSld>
-  <p:clrMapOvr>
-    <a:masterClrMapping/>
-  </p:clrMapOvr>
-</p:sld>
-</file>
-
-<file path=ppt/slides/slide41.xml><?xml version="1.0" encoding="utf-8"?>
-<p:sld xmlns:a="http://schemas.openxmlformats.org/drawingml/2006/main" xmlns:r="http://schemas.openxmlformats.org/officeDocument/2006/relationships" xmlns:p="http://schemas.openxmlformats.org/presentationml/2006/main">
-  <p:cSld name="Slide 41">
     <p:bg>
       <p:bgPr>
         <a:blipFill dpi="0" rotWithShape="1">

--- a/palestra/apresentacao.pptx
+++ b/palestra/apresentacao.pptx
@@ -2279,9 +2279,9 @@
           <a:p>
             <a:r>
               <a:rPr lang="en-US" dirty="0"/>
-              <a:t>[02:15–03:00] Slide único, sem cliques: opções e a frase "a resposta sai no minuto 22" já estão na tela. Perguntar e pedir mãos em cada opção: "Quem acha que o B, com CLAUDE.md, ganha?" / "Quem acha que dá empate?" / "Quem acha que o A ganha?". Contar por alto e GUARDAR a proporção (ex.: "uns 70% no B, uns 20% no empate"): ela volta no slide 18. No máximo 20 s.
+              <a:t>[02:15–03:00] Slide único, sem cliques: as opções já estão na tela. Perguntar e pedir mãos em cada opção: "Quem acha que o B, com CLAUDE.md, ganha?" / "Quem acha que dá empate?" / "Quem acha que o A ganha?". Contar por alto e GUARDAR a proporção (ex.: "uns 70% no B, uns 20% no empate"): ela volta no slide 18. No máximo 20 s.
 Se ninguém aposta no A: "Ninguém no A? Guardem isso." Se muita gente aposta no empate: "Tem gente desconfiada. Bom sinal."
-Fechar apontando a frase na tela: "a resposta sai no minuto 22".</a:t>
+Fechar dizendo: "a resposta sai no fim da palestra, no relatório ao vivo".</a:t>
             </a:r>
             <a:endParaRPr lang="en-US" dirty="0"/>
           </a:p>

--- a/palestra/apresentacao.pptx
+++ b/palestra/apresentacao.pptx
@@ -713,7 +713,8 @@
             <a:r>
               <a:rPr lang="en-US" dirty="0"/>
               <a:t>[11:00–13:00] Arquivos reais de `tarefas/03-evento-lotado/`. Em cima, o trecho do `prompt` do `tarefa.json`; prompt inteiro: "Hoje dá para inscrever mais gente do que a capacidade do evento. Não deixe inscrever em evento lotado: quando o evento já tiver `capacidade` inscritos, `inscrever` deve recusar a nova inscrição." O agente só vê o prompt. O campo `permitidos` (`src/inscricoes.ts`, `test/**`) define o escopo.
-Embaixo, as asserções do `oculto.test.ts` (o agente não vê; a última, no arquivo, tem a mensagem "CAPACIDADE_INVALIDA já existe e significa outra coisa"). O teste tem mais um caso: a vaga liberada por cancelamento pode ser ocupada.
+Embaixo, em português, o que as asserções do `oculto.test.ts` conferem (o agente não vê o arquivo): `toBeInstanceOf(ErroDominio)`; código em SCREAMING_SNAKE (`/^[A-Z][A-Z0-9_]*$/`) falando de lotação (`/LOTAD|CHEIO|CAPACIDADE|ESGOT|LIMITE|VAGA/`); e `not.toBe("CAPACIDADE_INVALIDA")`, com a mensagem "CAPACIDADE_INVALIDA já existe e significa outra coisa". O teste tem mais um caso: a vaga liberada por cancelamento pode ser ocupada.
+Analogia: o teste escondido é a prova que o aluno não viu antes. Ele estuda pelo enunciado (o pedido), e a correção usa um gabarito que fica com o professor.
 Ler o critério de feito: não basta "lançar um erro". Tem que ser o erro do domínio (`ErroDominio`), com o código no formato da casa (SCREAMING_SNAKE). O prompt não diz qual código usar, então o teste não exige um nome exato: aceita qualquer nome razoável de lotação e só recusa reaproveitar `CAPACIDADE_INVALIDA`, que já existe e significa outra coisa. É exatamente o tipo de coisa que um dev novo no time erraria sem ler a documentação, e que o agente sem CLAUDE.md também tende a errar.
 O teste nunca entra na pasta do agente: a correção roda numa pasta nova, com o app intacto + os arquivos que o agente mudou, e o teste escondido entra por último, por cima de qualquer arquivo com o mesmo nome. Se o agente "criar" um teste oculto falso para passar, não adianta.</a:t>
             </a:r>
@@ -803,7 +804,8 @@
           <a:p>
             <a:r>
               <a:rPr lang="en-US" dirty="0"/>
-              <a:t>[13:00–14:30] 1 · Cópia limpa: pasta temporária com o app. Variante B ganha o CLAUDE.md. O git que mede o diff fica FORA da cópia.
+              <a:t>[13:00–14:30] Para iniciantes, a fala é a do slide: o agente trabalha numa cópia (nunca no código de verdade), faz a tarefa trancado numa caixa sem internet, e depois um teste que ele não viu confere o trabalho. O resto desta nota é para quem perguntar os detalhes.
+1 · Cópia limpa: pasta temporária com o app. Variante B ganha o CLAUDE.md. O git que mede o diff fica FORA da cópia.
 2 · Agente: `claude -p` headless, saída JSON, ferramentas numa lista fechada, sandbox do SO (sem rede, escrita só na cópia), limite de turnos e timeout.
 3 · Correção: pasta NOVA: app intacto + o que o agente mudou + teste escondido. Vitest em sandbox; diff contra `permitidos`.
 O promptfoo orquestra: um provider JS por variante, `repeat: 2`, concorrência 4, saída em JSON. Um script lê o JSON e calcula as métricas.
@@ -900,7 +902,8 @@
           <a:p>
             <a:r>
               <a:rPr lang="en-US" dirty="0"/>
-              <a:t>[14:30–16:00] Ajuda: critérios que teste não pega (clareza, estilo, mensagem de commit); rápido de escrever (`llm-rubric` no promptfoo); bom para triagem, antes do olho humano.
+              <a:t>[14:30–16:00] Em uma frase: "IA como juiz (LLM-as-judge) é pedir para um modelo dar nota ao trabalho de outro." Analogia: é um corretor de redação que, no mesmo texto, às vezes dá 7 e às vezes dá 9.
+Ajuda: critérios que teste não pega (clareza, estilo, mensagem de commit); rápido de escrever (`llm-rubric` no promptfoo); bom para triagem, antes do olho humano.
 Atrapalha: vieses conhecidos (posição, verbosidade, preferir a si mesmo); juiz não determinístico avaliando agente não determinístico SOMA variância; precisa ser avaliado contra rótulo humano.
 Hoje o critério de feito é 100% teste: nenhuma tarefa precisa de juiz.
 Não é regra universal. Pergunta para a plateia (falar, não está no slide): "Que tarefa do seu dia a dia não dá para verificar com teste?" (ex.: "a documentação ficou clara?", "o PR está bem descrito?"). Ali o juiz pode valer, desde que você meça o juiz também.
@@ -1177,7 +1180,8 @@
           <a:p>
             <a:r>
               <a:rPr lang="en-US" dirty="0"/>
-              <a:t>[19:00–20:30] Rode a eval ANTES (linha de base); mude UMA coisa; rode a eval de novo, com repetições; compare com intervalo, não com a média.
+              <a:t>[19:00–20:30] Analogia: é como testar uma receita nova. Se você muda o forno E a farinha no mesmo dia e o bolo fica melhor, não sabe qual dos dois ajudou.
+Rode a eval ANTES (linha de base); mude UMA coisa; rode a eval de novo, com repetições; compare com intervalo, não com a média.
 O que conta como "uma coisa": o CLAUDE.md, uma skill nova, um hook, o modelo, o prompt da tarefa. Mudou o modelo E o CLAUDE.md juntos? Você não sabe quem ganhou.
 É o mesmo princípio de teste A/B de produto. O experimento de hoje muda só uma coisa: a existência do CLAUDE.md.
 Dica prática: commite a configuração do agente junto com o resultado da eval. Assim, daqui a um mês você sabe qual versão gerou qual número.</a:t>
@@ -1268,14 +1272,15 @@
           <a:p>
             <a:r>
               <a:rPr lang="en-US" dirty="0"/>
-              <a:t>[20:30–22:00] CLAUDE.md: entra em TODA sessão; bom para convenções do repo, comando de teste, pastas proibidas; cuidado: é contexto, NÃO obrigação.
+              <a:t>[20:30–22:00] Em uma linha cada, para quem nunca usou: CLAUDE.md é um texto com as regras do projeto que o agente lê no começo; skill é um "manual" que ele só abre quando a tarefa pede; hook é um script seu que roda automaticamente antes ou depois de cada ação do agente e pode bloquear a ação.
+CLAUDE.md: entra em TODA sessão; bom para convenções do repo, comando de teste, pastas proibidas; cuidado: é contexto, NÃO obrigação.
 Skill: entra só quando é usada; boa para procedimento longo, material de referência; cuidado: descrição ruim = nunca é chamada.
 Hook: roda antes/depois de cada ferramenta; para regra que PRECISA valer sempre; cuidado: é código, teste como código.
 A própria doc do Claude Code diz que CLAUDE.md é tratado como contexto, não como configuração obrigatória; para bloquear uma ação, use um hook PreToolUse.
 Skill: a doc diz que o corpo da skill só entra no contexto quando ela é usada, então referência longa custa quase nada até ser necessária.
 Clique: regra que não pode falhar não mora no prompt. Mora no hook, no teste ou no CI.
 Cada uma dessas mudanças é uma variante B possível no repo: troque o CLAUDE.md por uma skill ou um hook e rode de novo.
-Transição: "Já deu tempo. Vamos ver o que o agente fez." Voltar para o terminal.</a:t>
+Transição: "Já deu tempo. Vamos ver o que o agente fez." Avançar: o slide 18 mostra o relatório sozinho (não precisa ir ao terminal nem ao navegador).</a:t>
             </a:r>
             <a:endParaRPr lang="en-US" dirty="0"/>
           </a:p>
@@ -1364,19 +1369,20 @@
             <a:r>
               <a:rPr lang="en-US" dirty="0"/>
               <a:t>[22:00–25:00] Primeiro, a volta da aposta (slide 5): "No começo, [a proporção que você guardou, ex.: uns 70%] apostou no B. Vamos ver." Não pedir mãos de novo; só lembrar.
-Se o run ainda não terminou: mostrar o progresso do promptfoo e usar o ensaio. Se terminou: `pnpm relatorio` e abrir o HTML. Plano B: `pnpm relatorio:ensaio` (run gravado no ensaio).
-Roteiro de leitura (nesta ordem; a ordem importa):
-1. n real por variante e quantos erro_agente (contados à parte).
-2. Taxa de sucesso de A e de B, com a barra do intervalo.
-3. Veredito em português.
-4. pass^k: quantas tarefas passaram nas duas repetições.
-5. Fora do escopo.
-6. Por tarefa: o ganho (se houver) está nas tarefas de convenção (03–07) ou nas de controle?
-pass^2 em uma frase: "quantas das 8 tarefas passaram nas DUAS repetições; é a consistência."
-Comparar com a aposta da plateia (slide 5) depois de ler o veredito.
-O portão: "No repo, o portão só quebra o CI se A for melhor que B; inconclusivo passa."
+O slide recarrega `resultados/relatorio.html` toda vez que aparece. O `pnpm eval` grava esse arquivo sozinho quando termina; antes disso, ele mostra a página de espera ("O agente ainda está trabalhando…", gravada por `pnpm relatorio:aguardando` antes da palestra).
+- Apareceu o relatório: ler (abaixo). Conferir que diz "de 16" nas duas linhas; se aparecer outro número (run caiu no meio), ir de plano B.
+- Ainda aparece "O agente ainda está trabalhando…": dar 1 ou 2 min de fala (a leitura do ensaio, ou a regra das barras), voltar um slide e avançar de novo. Se não sair, plano B.
+- Plano B (run falhou ou não terminou): no terminal, `pnpm relatorio:planob` (copia o relatório do ensaio para o lugar do ao vivo), voltar um slide e avançar para o 18. Dizer: "este é o run do ensaio, com o mesmo comando".
+Roteiro de leitura em linguagem simples (de cima para baixo, como está na tela):
+1. O título: "Ainda não dá para saber" / "Com CLAUDE.md foi melhor" / "Sem CLAUDE.md foi melhor".
+2. As duas linhas grandes: "Sem CLAUDE.md, 12 de 16 deram certo; com, 16 de 16." Sempre ler COM a margem de erro: "as faixas coloridas são a margem de erro, como na pesquisa eleitoral".
+3. As faixas se cruzam? Se sim, é "ainda não dá para saber", que não é empate. A frase do topo diz quantas execuções seriam precisas.
+4. Na tabela: "Resolve sempre?" (passou nas 2 tentativas) e "Mexeu onde não devia".
+5. Tarefa por tarefa: o ganho, se houver, está nas tarefas de regra da casa (03–07) ou nas de controle?
+Comparar com a aposta da plateia (slide 5) depois de ler o título.
+O portão: "No repo, o portão só quebra o CI se A for melhor que B; 'ainda não dá para saber' passa."
 Não comemorar nem lamentar ainda: os próximos slides explicam como ler.
-Exemplo de resultado (o ensaio gravado, não o de hoje): A 12/16 (75%, 51% a 90%), B 16/16 (100%, 81% a 100%), pass^2 6/8 × 8/8, 3 fora do escopo (mexeram em `src/legado/` ou fora dos permitidos) e 1 teste escondido falhando, todos de A, 0 erro_agente → inconclusivo.</a:t>
+Exemplo de resultado (o ensaio gravado, não o de hoje): A 12/16 (75%, margem 51% a 90%), B 16/16 (100%, 81% a 100%), resolve sempre 6/8 × 8/8, 3 mexeram onde não deviam (em `src/legado/` ou fora dos permitidos) e 1 teste escondido falhando, todos de A, 0 erro do agente → inconclusivo ("ainda não dá para saber"), 27 de cada para ter certeza.</a:t>
             </a:r>
             <a:endParaRPr lang="en-US" dirty="0"/>
           </a:p>
@@ -1643,7 +1649,8 @@
           <a:p>
             <a:r>
               <a:rPr lang="en-US" dirty="0"/>
-              <a:t>[25:30–26:45] Slide único, sem cliques: barras e veredito já estão na tela. A: 37,5%, intervalo 18% a 61%. B: 75%, intervalo 51% a 90%. As barras se sobrepõem (51% a 61%): inconclusivo.
+              <a:t>[25:30–26:45] Slide único, sem cliques: barras e veredito já estão na tela. A: 37,5%, intervalo 18% a 61%. B: 75%, intervalo 51% a 90%. As barras se sobrepõem (51% a 61%): inconclusivo, ou seja, "ainda não dá para saber".
+Analogia: dois candidatos com 37% e 75% parecem distantes, mas, se a pesquisa ouviu só 16 pessoas, as margens de erro se cruzam e ainda é "empate técnico". Mais entrevistas, margem menor.
 O intervalo é a faixa de taxas "verdadeiras" compatíveis com o que vimos, com 95% de confiança. O ponto preto é a taxa observada.
 Wilson em vez da conta "p ± 1,96·√(p(1−p)/n)": com n pequeno ou taxa perto de 0% ou 100%, a conta simples dá intervalo que sai de [0, 1] ou tem largura zero (16/16 daria "100% ± 0"). Wilson não tem esse problema.
 Regra do repo: se o limite inferior de B passa do limite superior de A, "B melhor"; o contrário, "A melhor"; senão, "inconclusivo". Inconclusivo não é empate: é "não tenho dado para dizer".
@@ -1825,7 +1832,8 @@
             <a:r>
               <a:rPr lang="en-US" dirty="0"/>
               <a:t>[27:15–29:00] Slide único, sem cliques. Resposta (do ENSAIO, não do run de hoje): com as taxas do ensaio mantidas (A 12/16 × B 16/16), 27 execuções por variante até os intervalos de Wilson pararem de se sobrepor (critério do veredito); o piso pelo teste z é 24. Dizer "do ensaio" em voz alta.
-Se o relatório de hoje mostrou outro número em "execuções necessárias por variante (critério do veredito)" (campo execucoesNecessariasPorVariante), dizer: "no de hoje, deu [N]". Se as duas taxas forem iguais, o relatório diz "não calculável".
+Se o relatório de hoje mostrou outro número (na frase do topo, "seriam umas [N] execuções de cada"; nos detalhes técnicos, "execuções necessárias por variante"; campo execucoesNecessariasPorVariante), dizer: "no de hoje, deu [N]".
+Analogia: jogar uma moeda 4 vezes e dar 3 caras não prova que ela é viciada; jogar 400 vezes e dar 300, prova. Quanto menor a diferença que você quer ver, mais vezes precisa jogar. Se as duas taxas forem iguais, o relatório diz "não calculável".
 Quem chutou 16 chegou perto: "é o que a gente rodou hoje, e não bastou." Quem chutou 40: "um pouco a mais do que precisava."
 Diferença pequena pede muitas execuções: 62,5% contra 75% pediria 212 por variante.
 Fala de fechamento, qualquer desfecho: "Eu não sei ainda se o meu CLAUDE.md presta. Mas agora eu sei quanto eu preciso rodar para saber. Isso é medir."</a:t>
@@ -1916,7 +1924,8 @@
           <a:p>
             <a:r>
               <a:rPr lang="en-US" dirty="0"/>
-              <a:t>[29:00–31:00] Os cinco hábitos (três no slide, dois na fala): 1. defina o DESFECHO antes do número; 2. tarefas reais com TESTE ESCONDIDO e escopo; 3. REPITA: pass^k e intervalo, não uma execução; 4. UMA MUDANÇA por vez; 5. toda falha vira TAREFA NOVA.
+              <a:t>[29:00–31:00] A frase para levar: "'parece que melhorou' não é medida. Dá para medir o seu agente com tarefas e um teste automático, repetindo várias vezes, e comparar antes e depois de uma mudança."
+Os cinco hábitos (três no slide, dois na fala): 1. defina o que é DAR CERTO (o desfecho) antes de olhar o número; 2. tarefas reais com TESTE ESCONDIDO e escopo; 3. REPITA: resolve sempre? e margem de erro, não uma execução; 4. UMA MUDANÇA por vez; 5. toda falha vira TAREFA NOVA.
 O repo roda o experimento de hoje com o login do Claude Code. O ebook em PDF está dentro dele.
 Deixar este slide parado enquanto as pessoas fotografam o QR, e voltar a ele durante as perguntas (31:00–40:00, ~9 min).
 O QR é o mesmo do slide 2: a página de links do Mateus. PENDENTE antes da palestra: colocar o repositório publicado e o ebook nessa página.
@@ -2188,10 +2197,10 @@
           <a:p>
             <a:r>
               <a:rPr lang="en-US" dirty="0"/>
-              <a:t>[01:15–02:15] Rodar `pnpm eval` AGORA, ao vivo. Deixar o terminal num monitor ou minimizado; não voltar nele até o minuto 22. No ensaio (sonnet, concorrência 4), as 32 execuções levaram ~3 min 28 s: o run termina muito antes da revelação, e o resultado fica esperando.
+              <a:t>[01:15–02:15] Rodar `pnpm eval` AGORA, ao vivo. Deixar o terminal minimizado: não precisa voltar nele. Quando o run termina, o próprio `pnpm eval` gera o relatório (`resultados/relatorio.html`), e o slide 18 mostra sozinho. No ensaio (sonnet, concorrência 4), as 32 execuções levaram ~3 min 28 s: o relatório fica pronto muito antes da revelação.
 De onde vem o 32: 2 variantes × 8 tarefas × 2 repetições = 32 execuções do Claude Code, rodando enquanto eu falo. Vou mudar UMA coisa no repositório: um `CLAUDE.md` com as convenções do projeto.
-Fala: "Eu escrevi um CLAUDE.md para este projeto. Acho que ele ajuda. Mas 'acho' não é medida. Então o agente vai trabalhar 32 vezes enquanto eu falo, e no minuto 22 a gente vê."
-Plano B se o run falhar (rede, login, cota): no minuto 22 usar `pnpm relatorio:ensaio`, que lê o run gravado no ensaio. Dizer isso em voz alta só se precisar.</a:t>
+Fala: "Eu escrevi um CLAUDE.md para este projeto: é um arquivo de texto com as regras da casa, que o agente lê antes de começar. Acho que ele ajuda. Mas 'acho' não é medida. Então o agente vai trabalhar 32 vezes enquanto eu falo, e no fim a gente vê."
+Plano B se o run falhar (rede, login, cota): no slide 18, rodar `pnpm relatorio:planob` (copia o relatório do ensaio para o lugar do relatório ao vivo) e voltar ao slide 18. Dizer isso em voz alta só se precisar.</a:t>
             </a:r>
             <a:endParaRPr lang="en-US" dirty="0"/>
           </a:p>
@@ -2551,7 +2560,7 @@
             <a:r>
               <a:rPr lang="en-US" dirty="0"/>
               <a:t>[05:15–07:00] Slide único, sem cliques: as duas barras já estão na tela. A barra de 1 de 1 vai de 21% a 100%: "Com uma execução, a taxa real pode ser 21%." A de 16 de 16 vai de 81% a 100%: "Mesmo o '100%' de 16 execuções não prova 100%."
-Os números são conta, não opinião: intervalo de Wilson 95% para 1/1 e 16/16 (o mesmo cálculo que o relatório usa; dá para conferir em `src/metricas.ts`). A gente volta nele no minuto 25 (slide 20).
+Analogia: é a margem de erro da pesquisa eleitoral. Com 1 entrevistado, a margem é enorme; com 16, já fica mais estreita. Os números são conta, não opinião: intervalo de Wilson 95% para 1/1 e 16/16 (o mesmo cálculo que o relatório usa; dá para conferir em `src/metricas.ts`). A gente volta nele no minuto 25 (slide 20).
 Transição: "Se uma execução não basta, o que eu meço, e quantas vezes?"</a:t>
             </a:r>
             <a:endParaRPr lang="en-US" dirty="0"/>
@@ -2640,10 +2649,10 @@
           <a:p>
             <a:r>
               <a:rPr lang="en-US" dirty="0"/>
-              <a:t>[07:00–09:00] Ir linha por linha, devagar. Para quem é júnior: "turno" = uma ida e volta entre o modelo e uma ferramenta (ler arquivo, editar, rodar teste).
+              <a:t>[07:00–09:00] Ir linha por linha, devagar. "Voltas" (turnos, no jargão) = uma ida e volta entre o modelo e uma ferramenta (ler arquivo, editar, rodar teste). "Custo" é medido em tokens, os pedacinhos de texto que o modelo lê e escreve.
 Como o repo mede cada uma: sucesso = teste escondido passou (critério de feito); custo/tokens = `usage` e `total_cost_usd` do `claude -p`; turnos = `num_turns`; tempo = `duration_ms`; fora do escopo = diff fora dos arquivos permitidos; consistência = pass^k (passou em todas as repetições).
 Fora do escopo é separado de propósito: resolveu mexendo onde não devia não é sucesso.
-Consistência = pass^k: passou em TODAS as k tentativas; no relatório, k = 2.
+Consistência = pass^k no jargão: passou em TODAS as k tentativas; no relatório, k = 2, e a linha se chama "Resolve sempre?". Analogia: acertar uma vez pode ser sorte; acertar todas as vezes é saber.
 O `claude -p --output-format json` devolve esses campos no JSON final (doc "Run Claude Code programmatically"). A doc diz que o custo é estimativa do lado do cliente: com assinatura, leia o custo em US$ como "tamanho do esforço", não como fatura.
 Tokens: o relatório mostra a mediana de entrada + saída separada da mediana de cache (leitura + criação), porque o cache domina a contagem e esconderia a diferença.</a:t>
             </a:r>

--- a/palestra/apresentacao.pptx
+++ b/palestra/apresentacao.pptx
@@ -1470,7 +1470,8 @@
           <a:p>
             <a:r>
               <a:rPr lang="en-US" dirty="0"/>
-              <a:t>[25:00–25:30] Slide único, sem cliques. EXEMPLO INVENTADO, não é o run de hoje. Perguntar: "A passou 6 de 16, B passou 12 de 16. B é o dobro. Quem acha que B ganhou?" (mãos; até 15 s). Se a maioria disse "ganhou": "É a resposta natural. E é exatamente o 'parece que melhorou'."
+              <a:t>[25:00–25:30] Slide único, sem cliques. A pergunta é sobre o relatório que acabou de aparecer no slide 18. Perguntar: "B acertou mais que A. Quem acha que B ganhou?" (mãos; até 15 s). Se a maioria disse "ganhou": "É a resposta natural. E é exatamente o 'parece que melhorou' do começo."
+Se hoje B NÃO acertou mais (empate ou A na frente): trocar a pergunta por "Então A e B são iguais?" e seguir; a resposta do slide seguinte vale do mesmo jeito.
 Avançar para o slide seguinte com a resposta.</a:t>
             </a:r>
             <a:endParaRPr lang="en-US" dirty="0"/>
@@ -1649,12 +1650,11 @@
           <a:p>
             <a:r>
               <a:rPr lang="en-US" dirty="0"/>
-              <a:t>[25:30–26:45] Slide único, sem cliques: barras e veredito já estão na tela. A: 37,5%, intervalo 18% a 61%. B: 75%, intervalo 51% a 90%. As barras se sobrepõem (51% a 61%): inconclusivo, ou seja, "ainda não dá para saber".
-Analogia: dois candidatos com 37% e 75% parecem distantes, mas, se a pesquisa ouviu só 16 pessoas, as margens de erro se cruzam e ainda é "empate técnico". Mais entrevistas, margem menor.
-O intervalo é a faixa de taxas "verdadeiras" compatíveis com o que vimos, com 95% de confiança. O ponto preto é a taxa observada.
-Wilson em vez da conta "p ± 1,96·√(p(1−p)/n)": com n pequeno ou taxa perto de 0% ou 100%, a conta simples dá intervalo que sai de [0, 1] ou tem largura zero (16/16 daria "100% ± 0"). Wilson não tem esse problema.
-Regra do repo: se o limite inferior de B passa do limite superior de A, "B melhor"; o contrário, "A melhor"; senão, "inconclusivo". Inconclusivo não é empate: é "não tenho dado para dizer".
-Não se sobrepor é um critério conservador de propósito (um teste z de duas proporções chamaria 6/16 × 12/16 de significativo, p≈0,03); o repo prefere não declarar vencedor cedo.</a:t>
+              <a:t>[25:30–26:45] Slide único, sem cliques. Não tem número de propósito: é a regra para ler qualquer relatório, inclusive o de hoje.
+Fala: "Cada variante tem a sua faixa: a margem de erro. Se as faixas se cruzam, ainda não dá para saber quem é melhor. Só quando elas se separam dá para dizer." Depois, apontar para o relatório de hoje (slide 18): "No nosso, as faixas se cruzam. Então: ainda não dá para saber."
+Analogia: pesquisa eleitoral com poucas entrevistas: dois candidatos parecem longe, mas as margens se cruzam e é "empate técnico". Mais entrevistas, margem menor.
+Regra do repo: se a faixa de B fica toda acima da de A, "B melhor"; toda abaixo, "A melhor"; senão, "inconclusivo" (= ainda não dá para saber). Não é empate: é "não tenho dado para dizer".
+Se perguntarem por que não um teste de hipótese: exigir faixas sem cruzar é mais rigoroso de propósito; um teste z de duas proporções declararia vencedor mais cedo. Por que Wilson: com poucas execuções ou taxa perto de 0% ou 100%, a conta simples dá faixas absurdas (16 de 16 daria "100% ± 0").</a:t>
             </a:r>
             <a:endParaRPr lang="en-US" dirty="0"/>
           </a:p>

--- a/palestra/apresentacao.pptx
+++ b/palestra/apresentacao.pptx
@@ -1832,7 +1832,7 @@
             <a:r>
               <a:rPr lang="en-US" dirty="0"/>
               <a:t>[27:15–29:00] Slide único, sem cliques. Resposta (do ENSAIO, não do run de hoje): com as taxas do ensaio mantidas (A 12/16 × B 16/16), 27 execuções por variante até os intervalos de Wilson pararem de se sobrepor (critério do veredito); o piso pelo teste z é 24. Dizer "do ensaio" em voz alta.
-Se o relatório de hoje mostrou outro número (na frase do topo, "seriam umas [N] execuções de cada"; nos detalhes técnicos, "execuções necessárias por variante"; campo execucoesNecessariasPorVariante), dizer: "no de hoje, deu [N]".
+Se o relatório de hoje mostrou outro número (no terminal e nos detalhes técnicos do relatório, "execuções necessárias por variante"), dizer: "no de hoje, deu [N]".
 Analogia: jogar uma moeda 4 vezes e dar 3 caras não prova que ela é viciada; jogar 400 vezes e dar 300, prova. Quanto menor a diferença que você quer ver, mais vezes precisa jogar. Se as duas taxas forem iguais, o relatório diz "não calculável".
 Quem chutou 16 chegou perto: "é o que a gente rodou hoje, e não bastou." Quem chutou 40: "um pouco a mais do que precisava."
 Diferença pequena pede muitas execuções: 62,5% contra 75% pediria 212 por variante.
